--- a/経歴紹介 伊藤浩也20260525A.pptx
+++ b/経歴紹介 伊藤浩也20260525A.pptx
@@ -132,10 +132,7 @@
 <file path=ppt/revisionInfo.xml><?xml version="1.0" encoding="utf-8"?>
 <p1510:revInfo xmlns:a="http://schemas.openxmlformats.org/drawingml/2006/main" xmlns:r="http://schemas.openxmlformats.org/officeDocument/2006/relationships" xmlns:p1510="http://schemas.microsoft.com/office/powerpoint/2015/10/main">
   <p1510:revLst>
-    <p1510:client id="{97B42D65-2678-4C7B-A05A-6CAFA3C6F6E0}" v="16" dt="2025-06-22T06:52:58.602"/>
-    <p1510:client id="{ACFB44CF-05B5-9C5F-2B1F-4FC7B2B8D57F}" v="76" dt="2025-06-22T13:40:09.221"/>
-    <p1510:client id="{E7DFDC42-0FBA-44D8-822C-C277E08F6BAE}" v="11" dt="2025-06-22T05:21:37.980"/>
-    <p1510:client id="{F7AFB8AB-4FD7-48C6-9890-0FE119B9B83A}" v="1233" dt="2025-06-22T06:28:14.652"/>
+    <p1510:client id="{A6A076F5-9AD5-5592-AB3B-C5B17FB85031}" v="76" dt="2026-05-25T15:27:59.311"/>
   </p1510:revLst>
 </p1510:revInfo>
 </file>
@@ -222,7 +219,7 @@
           <a:p>
             <a:fld id="{37870CCA-E613-4006-88D6-7487C09CBAB1}" type="datetimeFigureOut">
               <a:rPr kumimoji="1" lang="ja-JP" altLang="en-US" smtClean="0"/>
-              <a:t>2026/5/25</a:t>
+              <a:t>2026/5/27</a:t>
             </a:fld>
             <a:endParaRPr kumimoji="1" lang="ja-JP" altLang="en-US"/>
           </a:p>
@@ -388,7 +385,7 @@
           <a:p>
             <a:fld id="{250C317B-7CC0-49F3-AF73-77180FBC0122}" type="datetimeFigureOut">
               <a:rPr kumimoji="1" lang="ja-JP" altLang="en-US" smtClean="0"/>
-              <a:t>2026/5/25</a:t>
+              <a:t>2026/5/27</a:t>
             </a:fld>
             <a:endParaRPr kumimoji="1" lang="ja-JP" altLang="en-US"/>
           </a:p>
@@ -835,7 +832,7 @@
           <a:p>
             <a:fld id="{73D8B6BF-8BF4-438F-986C-B9B57CB546F8}" type="datetime1">
               <a:rPr kumimoji="1" lang="ja-JP" altLang="en-US" smtClean="0"/>
-              <a:t>2026/5/25</a:t>
+              <a:t>2026/5/27</a:t>
             </a:fld>
             <a:endParaRPr kumimoji="1" lang="ja-JP" altLang="en-US"/>
           </a:p>
@@ -1065,7 +1062,7 @@
           <a:p>
             <a:fld id="{1DB39BF8-7A3F-47D3-8BEE-85D44D054918}" type="datetime1">
               <a:rPr kumimoji="1" lang="ja-JP" altLang="en-US" smtClean="0"/>
-              <a:t>2026/5/25</a:t>
+              <a:t>2026/5/27</a:t>
             </a:fld>
             <a:endParaRPr kumimoji="1" lang="ja-JP" altLang="en-US"/>
           </a:p>
@@ -1306,7 +1303,7 @@
           <a:p>
             <a:fld id="{FE8ECF09-AA56-49FD-A9FA-1B82F0242FB0}" type="datetime1">
               <a:rPr kumimoji="1" lang="ja-JP" altLang="en-US" smtClean="0"/>
-              <a:t>2026/5/25</a:t>
+              <a:t>2026/5/27</a:t>
             </a:fld>
             <a:endParaRPr kumimoji="1" lang="ja-JP" altLang="en-US"/>
           </a:p>
@@ -1536,7 +1533,7 @@
           <a:p>
             <a:fld id="{B3DCA516-ABFF-468F-9F51-11295DC7FCB5}" type="datetime1">
               <a:rPr kumimoji="1" lang="ja-JP" altLang="en-US" smtClean="0"/>
-              <a:t>2026/5/25</a:t>
+              <a:t>2026/5/27</a:t>
             </a:fld>
             <a:endParaRPr kumimoji="1" lang="ja-JP" altLang="en-US"/>
           </a:p>
@@ -1811,7 +1808,7 @@
           <a:p>
             <a:fld id="{439D9D46-8B28-4FE8-A536-96BF53925FB3}" type="datetime1">
               <a:rPr kumimoji="1" lang="ja-JP" altLang="en-US" smtClean="0"/>
-              <a:t>2026/5/25</a:t>
+              <a:t>2026/5/27</a:t>
             </a:fld>
             <a:endParaRPr kumimoji="1" lang="ja-JP" altLang="en-US"/>
           </a:p>
@@ -2140,7 +2137,7 @@
           <a:p>
             <a:fld id="{6CA6FD81-F6A0-4CD7-B2F9-D6801EE7FB58}" type="datetime1">
               <a:rPr kumimoji="1" lang="ja-JP" altLang="en-US" smtClean="0"/>
-              <a:t>2026/5/25</a:t>
+              <a:t>2026/5/27</a:t>
             </a:fld>
             <a:endParaRPr kumimoji="1" lang="ja-JP" altLang="en-US"/>
           </a:p>
@@ -2616,7 +2613,7 @@
           <a:p>
             <a:fld id="{77ED9117-64D0-485F-A88A-1DB132CBFFA3}" type="datetime1">
               <a:rPr kumimoji="1" lang="ja-JP" altLang="en-US" smtClean="0"/>
-              <a:t>2026/5/25</a:t>
+              <a:t>2026/5/27</a:t>
             </a:fld>
             <a:endParaRPr kumimoji="1" lang="ja-JP" altLang="en-US"/>
           </a:p>
@@ -2757,7 +2754,7 @@
           <a:p>
             <a:fld id="{D747BA22-49A8-4D13-BA4D-904E30E4C09C}" type="datetime1">
               <a:rPr kumimoji="1" lang="ja-JP" altLang="en-US" smtClean="0"/>
-              <a:t>2026/5/25</a:t>
+              <a:t>2026/5/27</a:t>
             </a:fld>
             <a:endParaRPr kumimoji="1" lang="ja-JP" altLang="en-US"/>
           </a:p>
@@ -2870,7 +2867,7 @@
           <a:p>
             <a:fld id="{9B5CFC76-6D47-4306-AE53-5904CEA81B8D}" type="datetime1">
               <a:rPr kumimoji="1" lang="ja-JP" altLang="en-US" smtClean="0"/>
-              <a:t>2026/5/25</a:t>
+              <a:t>2026/5/27</a:t>
             </a:fld>
             <a:endParaRPr kumimoji="1" lang="ja-JP" altLang="en-US"/>
           </a:p>
@@ -3213,7 +3210,7 @@
           <a:p>
             <a:fld id="{1DB39BF8-7A3F-47D3-8BEE-85D44D054918}" type="datetime1">
               <a:rPr kumimoji="1" lang="ja-JP" altLang="en-US" smtClean="0"/>
-              <a:t>2026/5/25</a:t>
+              <a:t>2026/5/27</a:t>
             </a:fld>
             <a:endParaRPr kumimoji="1" lang="ja-JP" altLang="en-US"/>
           </a:p>
@@ -3502,7 +3499,7 @@
           <a:p>
             <a:fld id="{BAA684CE-472D-43C7-B072-ED364692F5A2}" type="datetime1">
               <a:rPr kumimoji="1" lang="ja-JP" altLang="en-US" smtClean="0"/>
-              <a:t>2026/5/25</a:t>
+              <a:t>2026/5/27</a:t>
             </a:fld>
             <a:endParaRPr kumimoji="1" lang="ja-JP" altLang="en-US"/>
           </a:p>
@@ -3775,7 +3772,7 @@
           <a:p>
             <a:fld id="{1DB39BF8-7A3F-47D3-8BEE-85D44D054918}" type="datetime1">
               <a:rPr kumimoji="1" lang="ja-JP" altLang="en-US" smtClean="0"/>
-              <a:t>2026/5/25</a:t>
+              <a:t>2026/5/27</a:t>
             </a:fld>
             <a:endParaRPr kumimoji="1" lang="ja-JP" altLang="en-US"/>
           </a:p>
@@ -4265,7 +4262,7 @@
           <a:p>
             <a:pPr algn="ctr"/>
             <a:r>
-              <a:rPr kumimoji="1" lang="ja-JP" altLang="en-US" sz="4800" dirty="0"/>
+              <a:rPr kumimoji="1" lang="ja-JP" altLang="en-US" sz="4800"/>
               <a:t>業務経歴＆スキル概略資料</a:t>
             </a:r>
           </a:p>
@@ -4488,76 +4485,76 @@
           <a:p>
             <a:pPr algn="l"/>
             <a:r>
-              <a:rPr lang="ja-JP" altLang="en-US" sz="2400" dirty="0">
+              <a:rPr lang="ja-JP" altLang="en-US" sz="2400">
                 <a:ea typeface="游ゴシック"/>
               </a:rPr>
               <a:t>１．業務経歴①～⑥</a:t>
             </a:r>
-            <a:endParaRPr lang="en-US" altLang="ja-JP" sz="2400" dirty="0"/>
+            <a:endParaRPr lang="en-US" altLang="ja-JP" sz="2400"/>
           </a:p>
           <a:p>
             <a:pPr algn="l"/>
             <a:r>
-              <a:rPr lang="ja-JP" altLang="en-US" sz="2400" dirty="0"/>
+              <a:rPr lang="ja-JP" altLang="en-US" sz="2400"/>
               <a:t>２．</a:t>
             </a:r>
             <a:r>
-              <a:rPr lang="en-US" altLang="ja-JP" sz="2400" dirty="0"/>
+              <a:rPr lang="en-US" altLang="ja-JP" sz="2400"/>
               <a:t>S</a:t>
             </a:r>
             <a:r>
-              <a:rPr lang="ja-JP" altLang="en-US" sz="2400" dirty="0"/>
+              <a:rPr lang="ja-JP" altLang="en-US" sz="2400"/>
               <a:t>社での知識とスキル</a:t>
             </a:r>
-            <a:endParaRPr lang="en-US" altLang="ja-JP" sz="2400" dirty="0"/>
+            <a:endParaRPr lang="en-US" altLang="ja-JP" sz="2400"/>
           </a:p>
           <a:p>
             <a:pPr algn="l"/>
             <a:r>
-              <a:rPr lang="ja-JP" altLang="en-US" sz="2400" dirty="0"/>
+              <a:rPr lang="ja-JP" altLang="en-US" sz="2400"/>
               <a:t>３．</a:t>
             </a:r>
             <a:r>
-              <a:rPr lang="en-US" altLang="ja-JP" sz="2400" dirty="0"/>
+              <a:rPr lang="en-US" altLang="ja-JP" sz="2400"/>
               <a:t>N</a:t>
             </a:r>
             <a:r>
-              <a:rPr lang="ja-JP" altLang="en-US" sz="2400" dirty="0"/>
+              <a:rPr lang="ja-JP" altLang="en-US" sz="2400"/>
               <a:t>社での知識とスキル</a:t>
             </a:r>
-            <a:endParaRPr lang="en-US" altLang="ja-JP" sz="2400" dirty="0"/>
+            <a:endParaRPr lang="en-US" altLang="ja-JP" sz="2400"/>
           </a:p>
           <a:p>
             <a:pPr algn="l"/>
             <a:r>
-              <a:rPr lang="ja-JP" altLang="en-US" sz="2400" dirty="0"/>
+              <a:rPr lang="ja-JP" altLang="en-US" sz="2400"/>
               <a:t>４．</a:t>
             </a:r>
             <a:r>
-              <a:rPr lang="en-US" altLang="ja-JP" sz="2400" dirty="0"/>
+              <a:rPr lang="en-US" altLang="ja-JP" sz="2400"/>
               <a:t>M</a:t>
             </a:r>
             <a:r>
-              <a:rPr lang="ja-JP" altLang="en-US" sz="2400" dirty="0"/>
+              <a:rPr lang="ja-JP" altLang="en-US" sz="2400"/>
               <a:t>社での知識とスキル</a:t>
             </a:r>
-            <a:endParaRPr lang="en-US" altLang="ja-JP" sz="2400" dirty="0"/>
+            <a:endParaRPr lang="en-US" altLang="ja-JP" sz="2400"/>
           </a:p>
           <a:p>
             <a:pPr algn="l"/>
             <a:r>
-              <a:rPr lang="ja-JP" altLang="en-US" sz="2400" dirty="0"/>
+              <a:rPr lang="ja-JP" altLang="en-US" sz="2400"/>
               <a:t>５．現職での知識とスキル</a:t>
             </a:r>
-            <a:endParaRPr lang="en-US" altLang="ja-JP" sz="2400" dirty="0"/>
+            <a:endParaRPr lang="en-US" altLang="ja-JP" sz="2400"/>
           </a:p>
           <a:p>
             <a:pPr algn="l"/>
             <a:r>
-              <a:rPr lang="ja-JP" altLang="en-US" sz="2400" dirty="0"/>
+              <a:rPr lang="ja-JP" altLang="en-US" sz="2400"/>
               <a:t>６．基板製作スキル</a:t>
             </a:r>
-            <a:endParaRPr lang="en-US" altLang="ja-JP" sz="2400" dirty="0"/>
+            <a:endParaRPr lang="en-US" altLang="ja-JP" sz="2400"/>
           </a:p>
         </p:txBody>
       </p:sp>
@@ -4605,14 +4602,14 @@
           <a:p>
             <a:pPr algn="ctr"/>
             <a:r>
-              <a:rPr kumimoji="1" lang="en-US" altLang="ja-JP" dirty="0">
+              <a:rPr kumimoji="1" lang="en-US" altLang="ja-JP">
                 <a:solidFill>
                   <a:srgbClr val="FF0000"/>
                 </a:solidFill>
               </a:rPr>
               <a:t>Confidential</a:t>
             </a:r>
-            <a:endParaRPr kumimoji="1" lang="ja-JP" altLang="en-US" dirty="0">
+            <a:endParaRPr kumimoji="1" lang="ja-JP" altLang="en-US">
               <a:solidFill>
                 <a:srgbClr val="FF0000"/>
               </a:solidFill>
@@ -4650,23 +4647,23 @@
           <a:p>
             <a:pPr algn="ctr"/>
             <a:r>
-              <a:rPr lang="ja-JP" altLang="en-US" sz="1200" dirty="0"/>
+              <a:rPr lang="ja-JP" altLang="en-US" sz="1200"/>
               <a:t>株式会社 </a:t>
             </a:r>
             <a:r>
-              <a:rPr lang="en-US" altLang="ja-JP" sz="1200" dirty="0"/>
+              <a:rPr lang="en-US" altLang="ja-JP" sz="1200"/>
               <a:t>BREXA Technology</a:t>
             </a:r>
             <a:r>
-              <a:rPr lang="ja-JP" altLang="en-US" sz="1200" dirty="0"/>
+              <a:rPr lang="ja-JP" altLang="en-US" sz="1200"/>
               <a:t> </a:t>
             </a:r>
-            <a:endParaRPr lang="en-US" altLang="ja-JP" sz="1200" dirty="0"/>
+            <a:endParaRPr lang="en-US" altLang="ja-JP" sz="1200"/>
           </a:p>
           <a:p>
             <a:pPr algn="ctr"/>
             <a:r>
-              <a:rPr kumimoji="1" lang="ja-JP" altLang="en-US" sz="1200" dirty="0"/>
+              <a:rPr kumimoji="1" lang="ja-JP" altLang="en-US" sz="1200"/>
               <a:t>伊藤浩也</a:t>
             </a:r>
           </a:p>
@@ -4726,18 +4723,18 @@
           <a:lstStyle/>
           <a:p>
             <a:r>
-              <a:rPr lang="ja-JP" altLang="en-US" sz="3200" dirty="0"/>
+              <a:rPr lang="ja-JP" altLang="en-US" sz="3200"/>
               <a:t>４．</a:t>
             </a:r>
             <a:r>
-              <a:rPr lang="en-US" altLang="ja-JP" sz="3200" dirty="0"/>
+              <a:rPr lang="en-US" altLang="ja-JP" sz="3200"/>
               <a:t>M</a:t>
             </a:r>
             <a:r>
-              <a:rPr lang="ja-JP" altLang="en-US" sz="3200" dirty="0"/>
+              <a:rPr lang="ja-JP" altLang="en-US" sz="3200"/>
               <a:t>社での知識とスキル</a:t>
             </a:r>
-            <a:endParaRPr kumimoji="1" lang="ja-JP" altLang="en-US" sz="3200" dirty="0"/>
+            <a:endParaRPr kumimoji="1" lang="ja-JP" altLang="en-US" sz="3200"/>
           </a:p>
         </p:txBody>
       </p:sp>
@@ -4814,14 +4811,14 @@
           <a:p>
             <a:pPr algn="ctr"/>
             <a:r>
-              <a:rPr kumimoji="1" lang="en-US" altLang="ja-JP" dirty="0">
+              <a:rPr kumimoji="1" lang="en-US" altLang="ja-JP">
                 <a:solidFill>
                   <a:srgbClr val="FF0000"/>
                 </a:solidFill>
               </a:rPr>
               <a:t>Confidential</a:t>
             </a:r>
-            <a:endParaRPr kumimoji="1" lang="ja-JP" altLang="en-US" dirty="0">
+            <a:endParaRPr kumimoji="1" lang="ja-JP" altLang="en-US">
               <a:solidFill>
                 <a:srgbClr val="FF0000"/>
               </a:solidFill>
@@ -4884,12 +4881,12 @@
                     <a:p>
                       <a:pPr algn="ctr"/>
                       <a:r>
-                        <a:rPr lang="ja-JP" sz="1350" kern="100" dirty="0">
+                        <a:rPr lang="ja-JP" sz="1350" kern="100">
                           <a:effectLst/>
                         </a:rPr>
                         <a:t>実践技術</a:t>
                       </a:r>
-                      <a:endParaRPr lang="ja-JP" sz="1350" kern="100" dirty="0">
+                      <a:endParaRPr lang="ja-JP" sz="1350" kern="100">
                         <a:effectLst/>
                         <a:latin typeface="Century" panose="02040604050505020304" pitchFamily="18" charset="0"/>
                         <a:ea typeface="ＭＳ 明朝" panose="02020609040205080304" pitchFamily="17" charset="-128"/>
@@ -4912,7 +4909,7 @@
                         <a:t>プリンタシステムの動作習得、</a:t>
                       </a:r>
                       <a:r>
-                        <a:rPr lang="en-US" sz="1350" kern="100" dirty="0">
+                        <a:rPr lang="en-US" sz="1350" kern="100">
                           <a:effectLst/>
                         </a:rPr>
                         <a:t>VHDL</a:t>
@@ -4936,12 +4933,12 @@
                         <a:t>等の最新</a:t>
                       </a:r>
                       <a:r>
-                        <a:rPr lang="en-US" sz="1350" kern="100" dirty="0">
+                        <a:rPr lang="en-US" sz="1350" kern="100">
                           <a:effectLst/>
                         </a:rPr>
                         <a:t>FPGA</a:t>
                       </a:r>
-                      <a:endParaRPr lang="ja-JP" sz="1350" kern="100" dirty="0">
+                      <a:endParaRPr lang="ja-JP" sz="1350" kern="100">
                         <a:effectLst/>
                         <a:latin typeface="Century" panose="02040604050505020304" pitchFamily="18" charset="0"/>
                         <a:ea typeface="ＭＳ 明朝" panose="02020609040205080304" pitchFamily="17" charset="-128"/>
@@ -4965,12 +4962,12 @@
                     <a:p>
                       <a:pPr algn="ctr"/>
                       <a:r>
-                        <a:rPr lang="ja-JP" sz="1350" kern="100" dirty="0">
+                        <a:rPr lang="ja-JP" sz="1350" kern="100">
                           <a:effectLst/>
                         </a:rPr>
                         <a:t>評価ユーザ支援技術</a:t>
                       </a:r>
-                      <a:endParaRPr lang="ja-JP" sz="1350" kern="100" dirty="0">
+                      <a:endParaRPr lang="ja-JP" sz="1350" kern="100">
                         <a:effectLst/>
                         <a:latin typeface="Century" panose="02040604050505020304" pitchFamily="18" charset="0"/>
                         <a:ea typeface="ＭＳ 明朝" panose="02020609040205080304" pitchFamily="17" charset="-128"/>
@@ -4987,24 +4984,24 @@
                     <a:p>
                       <a:pPr algn="just"/>
                       <a:r>
-                        <a:rPr lang="ja-JP" sz="1350" kern="100" dirty="0">
+                        <a:rPr lang="ja-JP" sz="1350" kern="100">
                           <a:effectLst/>
                         </a:rPr>
                         <a:t>デジタルオシロでの評価。</a:t>
                       </a:r>
                       <a:r>
-                        <a:rPr lang="en-US" sz="1350" kern="100" dirty="0">
+                        <a:rPr lang="en-US" sz="1350" kern="100">
                           <a:effectLst/>
                         </a:rPr>
                         <a:t>485</a:t>
                       </a:r>
                       <a:r>
-                        <a:rPr lang="ja-JP" sz="1350" kern="100" dirty="0">
+                        <a:rPr lang="ja-JP" sz="1350" kern="100">
                           <a:effectLst/>
                         </a:rPr>
                         <a:t>等の遠距離通信。</a:t>
                       </a:r>
-                      <a:endParaRPr lang="ja-JP" sz="1350" kern="100" dirty="0">
+                      <a:endParaRPr lang="ja-JP" sz="1350" kern="100">
                         <a:effectLst/>
                         <a:latin typeface="Century" panose="02040604050505020304" pitchFamily="18" charset="0"/>
                         <a:ea typeface="ＭＳ 明朝" panose="02020609040205080304" pitchFamily="17" charset="-128"/>
@@ -5050,12 +5047,12 @@
                     <a:p>
                       <a:pPr algn="just"/>
                       <a:r>
-                        <a:rPr lang="ja-JP" sz="1350" kern="100" dirty="0">
+                        <a:rPr lang="ja-JP" sz="1350" kern="100">
                           <a:effectLst/>
                         </a:rPr>
                         <a:t>業務用新ヘッド搭載のプリンタ新機種開発。重量巻取り装置開発</a:t>
                       </a:r>
-                      <a:endParaRPr lang="ja-JP" sz="1350" kern="100" dirty="0">
+                      <a:endParaRPr lang="ja-JP" sz="1350" kern="100">
                         <a:effectLst/>
                         <a:latin typeface="Century" panose="02040604050505020304" pitchFamily="18" charset="0"/>
                         <a:ea typeface="ＭＳ 明朝" panose="02020609040205080304" pitchFamily="17" charset="-128"/>
@@ -5101,24 +5098,24 @@
                     <a:p>
                       <a:pPr algn="just"/>
                       <a:r>
-                        <a:rPr lang="ja-JP" sz="1350" kern="100" dirty="0">
+                        <a:rPr lang="ja-JP" sz="1350" kern="100">
                           <a:effectLst/>
                         </a:rPr>
                         <a:t>技術課長として、部下</a:t>
                       </a:r>
                       <a:r>
-                        <a:rPr lang="en-US" sz="1350" kern="100" dirty="0">
+                        <a:rPr lang="en-US" sz="1350" kern="100">
                           <a:effectLst/>
                         </a:rPr>
                         <a:t>14</a:t>
                       </a:r>
                       <a:r>
-                        <a:rPr lang="ja-JP" sz="1350" kern="100" dirty="0">
+                        <a:rPr lang="ja-JP" sz="1350" kern="100">
                           <a:effectLst/>
                         </a:rPr>
                         <a:t>名をマネージメント</a:t>
                       </a:r>
-                      <a:endParaRPr lang="ja-JP" sz="1350" kern="100" dirty="0">
+                      <a:endParaRPr lang="ja-JP" sz="1350" kern="100">
                         <a:effectLst/>
                         <a:latin typeface="Century" panose="02040604050505020304" pitchFamily="18" charset="0"/>
                         <a:ea typeface="ＭＳ 明朝" panose="02020609040205080304" pitchFamily="17" charset="-128"/>
@@ -5192,14 +5189,14 @@
           <a:lstStyle/>
           <a:p>
             <a:r>
-              <a:rPr lang="en-US" altLang="ja-JP" sz="3200" dirty="0"/>
+              <a:rPr lang="en-US" altLang="ja-JP" sz="3200"/>
               <a:t>5</a:t>
             </a:r>
             <a:r>
-              <a:rPr lang="ja-JP" altLang="en-US" sz="3200" dirty="0"/>
+              <a:rPr lang="ja-JP" altLang="en-US" sz="3200"/>
               <a:t>．現職での知識とスキル</a:t>
             </a:r>
-            <a:endParaRPr kumimoji="1" lang="ja-JP" altLang="en-US" sz="3200" dirty="0"/>
+            <a:endParaRPr kumimoji="1" lang="ja-JP" altLang="en-US" sz="3200"/>
           </a:p>
         </p:txBody>
       </p:sp>
@@ -5276,14 +5273,14 @@
           <a:p>
             <a:pPr algn="ctr"/>
             <a:r>
-              <a:rPr kumimoji="1" lang="en-US" altLang="ja-JP" dirty="0">
+              <a:rPr kumimoji="1" lang="en-US" altLang="ja-JP">
                 <a:solidFill>
                   <a:srgbClr val="FF0000"/>
                 </a:solidFill>
               </a:rPr>
               <a:t>Confidential</a:t>
             </a:r>
-            <a:endParaRPr kumimoji="1" lang="ja-JP" altLang="en-US" dirty="0">
+            <a:endParaRPr kumimoji="1" lang="ja-JP" altLang="en-US">
               <a:solidFill>
                 <a:srgbClr val="FF0000"/>
               </a:solidFill>
@@ -5346,12 +5343,12 @@
                     <a:p>
                       <a:pPr algn="ctr"/>
                       <a:r>
-                        <a:rPr lang="ja-JP" sz="1350" kern="100" dirty="0">
+                        <a:rPr lang="ja-JP" sz="1350" kern="100">
                           <a:effectLst/>
                         </a:rPr>
                         <a:t>実践技術</a:t>
                       </a:r>
-                      <a:endParaRPr lang="ja-JP" sz="1350" kern="100" dirty="0">
+                      <a:endParaRPr lang="ja-JP" sz="1350" kern="100">
                         <a:effectLst/>
                         <a:latin typeface="Century" panose="02040604050505020304" pitchFamily="18" charset="0"/>
                         <a:ea typeface="ＭＳ 明朝" panose="02020609040205080304" pitchFamily="17" charset="-128"/>
@@ -5409,12 +5406,12 @@
                     <a:p>
                       <a:pPr algn="ctr"/>
                       <a:r>
-                        <a:rPr lang="ja-JP" sz="1350" kern="100" dirty="0">
+                        <a:rPr lang="ja-JP" sz="1350" kern="100">
                           <a:effectLst/>
                         </a:rPr>
                         <a:t>評価ユーザ支援技術</a:t>
                       </a:r>
-                      <a:endParaRPr lang="ja-JP" sz="1350" kern="100" dirty="0">
+                      <a:endParaRPr lang="ja-JP" sz="1350" kern="100">
                         <a:effectLst/>
                         <a:latin typeface="Century" panose="02040604050505020304" pitchFamily="18" charset="0"/>
                         <a:ea typeface="ＭＳ 明朝" panose="02020609040205080304" pitchFamily="17" charset="-128"/>
@@ -5431,12 +5428,12 @@
                     <a:p>
                       <a:pPr algn="just"/>
                       <a:r>
-                        <a:rPr lang="ja-JP" sz="1350" kern="100" dirty="0">
+                        <a:rPr lang="ja-JP" sz="1350" kern="100">
                           <a:effectLst/>
                         </a:rPr>
                         <a:t>デジタルオシロでの評価。</a:t>
                       </a:r>
-                      <a:endParaRPr lang="ja-JP" sz="1350" kern="100" dirty="0">
+                      <a:endParaRPr lang="ja-JP" sz="1350" kern="100">
                         <a:effectLst/>
                         <a:latin typeface="Century" panose="02040604050505020304" pitchFamily="18" charset="0"/>
                         <a:ea typeface="ＭＳ 明朝" panose="02020609040205080304" pitchFamily="17" charset="-128"/>
@@ -5482,7 +5479,7 @@
                     <a:p>
                       <a:pPr algn="just"/>
                       <a:r>
-                        <a:rPr lang="ja-JP" altLang="en-US" sz="1350" kern="100" dirty="0">
+                        <a:rPr lang="ja-JP" altLang="en-US" sz="1350" kern="100">
                           <a:effectLst/>
                           <a:latin typeface="+mn-ea"/>
                           <a:ea typeface="+mn-ea"/>
@@ -5490,7 +5487,7 @@
                         </a:rPr>
                         <a:t>荷重試験機</a:t>
                       </a:r>
-                      <a:endParaRPr lang="ja-JP" sz="1350" kern="100" dirty="0">
+                      <a:endParaRPr lang="ja-JP" sz="1350" kern="100">
                         <a:effectLst/>
                         <a:latin typeface="+mn-ea"/>
                         <a:ea typeface="+mn-ea"/>
@@ -5542,7 +5539,7 @@
           <a:lstStyle/>
           <a:p>
             <a:r>
-              <a:rPr lang="en-US" altLang="ja-JP" sz="1400" dirty="0">
+              <a:rPr lang="en-US" altLang="ja-JP" sz="1400">
                 <a:ea typeface="+mn-lt"/>
               </a:rPr>
               <a:t>A</a:t>
@@ -5610,12 +5607,12 @@
                     <a:p>
                       <a:pPr algn="ctr"/>
                       <a:r>
-                        <a:rPr lang="ja-JP" sz="1350" kern="100" dirty="0">
+                        <a:rPr lang="ja-JP" sz="1350" kern="100">
                           <a:effectLst/>
                         </a:rPr>
                         <a:t>実践技術</a:t>
                       </a:r>
-                      <a:endParaRPr lang="ja-JP" sz="1350" kern="100" dirty="0">
+                      <a:endParaRPr lang="ja-JP" sz="1350" kern="100">
                         <a:effectLst/>
                         <a:latin typeface="Century" panose="02040604050505020304" pitchFamily="18" charset="0"/>
                         <a:ea typeface="ＭＳ 明朝" panose="02020609040205080304" pitchFamily="17" charset="-128"/>
@@ -5632,7 +5629,7 @@
                     <a:p>
                       <a:pPr algn="just"/>
                       <a:r>
-                        <a:rPr lang="en-US" altLang="ja-JP" sz="1350" kern="100" dirty="0" err="1">
+                        <a:rPr lang="en-US" altLang="ja-JP" sz="1350" kern="100" err="1">
                           <a:effectLst/>
                           <a:latin typeface="+mn-ea"/>
                           <a:ea typeface="+mn-ea"/>
@@ -5641,7 +5638,7 @@
                         <a:t>Vivado</a:t>
                       </a:r>
                       <a:r>
-                        <a:rPr lang="en-US" altLang="ja-JP" sz="1350" kern="100" dirty="0">
+                        <a:rPr lang="en-US" altLang="ja-JP" sz="1350" kern="100">
                           <a:effectLst/>
                           <a:latin typeface="+mn-ea"/>
                           <a:ea typeface="+mn-ea"/>
@@ -5650,7 +5647,7 @@
                         <a:t>, </a:t>
                       </a:r>
                       <a:r>
-                        <a:rPr lang="en-US" altLang="ja-JP" sz="1350" kern="100" dirty="0" err="1">
+                        <a:rPr lang="en-US" altLang="ja-JP" sz="1350" kern="100" err="1">
                           <a:effectLst/>
                           <a:latin typeface="+mn-ea"/>
                           <a:ea typeface="+mn-ea"/>
@@ -5659,7 +5656,7 @@
                         <a:t>Vitis、Quartus</a:t>
                       </a:r>
                       <a:r>
-                        <a:rPr lang="en-US" altLang="ja-JP" sz="1350" kern="100" dirty="0">
+                        <a:rPr lang="en-US" altLang="ja-JP" sz="1350" kern="100">
                           <a:effectLst/>
                           <a:latin typeface="+mn-ea"/>
                           <a:ea typeface="+mn-ea"/>
@@ -5668,7 +5665,7 @@
                         <a:t> prime、e2 </a:t>
                       </a:r>
                       <a:r>
-                        <a:rPr lang="en-US" altLang="ja-JP" sz="1350" kern="100" dirty="0" err="1">
+                        <a:rPr lang="en-US" altLang="ja-JP" sz="1350" kern="100" err="1">
                           <a:effectLst/>
                           <a:latin typeface="+mn-ea"/>
                           <a:ea typeface="+mn-ea"/>
@@ -5677,7 +5674,7 @@
                         <a:t>studio、CS</a:t>
                       </a:r>
                       <a:r>
-                        <a:rPr lang="en-US" altLang="ja-JP" sz="1350" kern="100" dirty="0">
+                        <a:rPr lang="en-US" altLang="ja-JP" sz="1350" kern="100">
                           <a:effectLst/>
                           <a:latin typeface="+mn-ea"/>
                           <a:ea typeface="+mn-ea"/>
@@ -5686,7 +5683,7 @@
                         <a:t>+、</a:t>
                       </a:r>
                       <a:r>
-                        <a:rPr lang="en-US" altLang="ja-JP" sz="1350" kern="100" dirty="0" err="1">
+                        <a:rPr lang="en-US" altLang="ja-JP" sz="1350" kern="100" err="1">
                           <a:effectLst/>
                           <a:latin typeface="+mn-ea"/>
                           <a:ea typeface="+mn-ea"/>
@@ -5695,7 +5692,7 @@
                         <a:t>LTspice</a:t>
                       </a:r>
                       <a:r>
-                        <a:rPr lang="en-US" altLang="ja-JP" sz="1350" kern="100" dirty="0">
+                        <a:rPr lang="en-US" altLang="ja-JP" sz="1350" kern="100">
                           <a:effectLst/>
                           <a:latin typeface="+mn-ea"/>
                           <a:ea typeface="+mn-ea"/>
@@ -5721,12 +5718,12 @@
                     <a:p>
                       <a:pPr algn="ctr"/>
                       <a:r>
-                        <a:rPr lang="ja-JP" sz="1350" kern="100" dirty="0">
+                        <a:rPr lang="ja-JP" sz="1350" kern="100">
                           <a:effectLst/>
                         </a:rPr>
                         <a:t>評価ユーザ支援技術</a:t>
                       </a:r>
-                      <a:endParaRPr lang="ja-JP" sz="1350" kern="100" dirty="0">
+                      <a:endParaRPr lang="ja-JP" sz="1350" kern="100">
                         <a:effectLst/>
                         <a:latin typeface="Century" panose="02040604050505020304" pitchFamily="18" charset="0"/>
                         <a:ea typeface="ＭＳ 明朝" panose="02020609040205080304" pitchFamily="17" charset="-128"/>
@@ -5743,18 +5740,18 @@
                     <a:p>
                       <a:pPr algn="just"/>
                       <a:r>
-                        <a:rPr lang="en-US" altLang="ja-JP" sz="1350" kern="100" dirty="0" err="1">
+                        <a:rPr lang="en-US" altLang="ja-JP" sz="1350" kern="100" err="1">
                           <a:effectLst/>
                         </a:rPr>
                         <a:t>EMC評価とその対策業務</a:t>
                       </a:r>
                       <a:r>
-                        <a:rPr lang="ja-JP" sz="1350" kern="100" dirty="0">
+                        <a:rPr lang="ja-JP" sz="1350" kern="100">
                           <a:effectLst/>
                         </a:rPr>
                         <a:t>。</a:t>
                       </a:r>
-                      <a:endParaRPr lang="ja-JP" sz="1350" kern="100" dirty="0">
+                      <a:endParaRPr lang="ja-JP" sz="1350" kern="100">
                         <a:effectLst/>
                         <a:latin typeface="Century" panose="02040604050505020304" pitchFamily="18" charset="0"/>
                         <a:ea typeface="ＭＳ 明朝" panose="02020609040205080304" pitchFamily="17" charset="-128"/>
@@ -5800,7 +5797,7 @@
                     <a:p>
                       <a:pPr algn="just"/>
                       <a:r>
-                        <a:rPr lang="ja-JP" altLang="en-US" sz="1350" kern="100" dirty="0">
+                        <a:rPr lang="ja-JP" altLang="en-US" sz="1350" kern="100">
                           <a:effectLst/>
                           <a:latin typeface="+mn-ea"/>
                           <a:ea typeface="+mn-ea"/>
@@ -5854,19 +5851,19 @@
           <a:lstStyle/>
           <a:p>
             <a:r>
-              <a:rPr lang="en-US" altLang="ja-JP" sz="1400" dirty="0">
+              <a:rPr lang="en-US" altLang="ja-JP" sz="1400">
                 <a:ea typeface="游ゴシック"/>
               </a:rPr>
               <a:t>W</a:t>
             </a:r>
             <a:r>
-              <a:rPr lang="ja-JP" sz="1400" dirty="0">
+              <a:rPr lang="ja-JP" sz="1400">
                 <a:ea typeface="游ゴシック"/>
               </a:rPr>
               <a:t>社での派遣先</a:t>
             </a:r>
             <a:r>
-              <a:rPr lang="ja-JP" altLang="en-US" sz="1400" dirty="0">
+              <a:rPr lang="ja-JP" altLang="en-US" sz="1400">
                 <a:ea typeface="游ゴシック"/>
               </a:rPr>
               <a:t>業務</a:t>
@@ -5928,12 +5925,12 @@
                     <a:p>
                       <a:pPr algn="ctr"/>
                       <a:r>
-                        <a:rPr lang="ja-JP" sz="1350" kern="100" dirty="0">
+                        <a:rPr lang="ja-JP" sz="1350" kern="100">
                           <a:effectLst/>
                         </a:rPr>
                         <a:t>実践技術</a:t>
                       </a:r>
-                      <a:endParaRPr lang="ja-JP" sz="1350" kern="100" dirty="0">
+                      <a:endParaRPr lang="ja-JP" sz="1350" kern="100">
                         <a:effectLst/>
                         <a:latin typeface="Century" panose="02040604050505020304" pitchFamily="18" charset="0"/>
                         <a:ea typeface="ＭＳ 明朝" panose="02020609040205080304" pitchFamily="17" charset="-128"/>
@@ -5950,7 +5947,7 @@
                     <a:p>
                       <a:pPr algn="just"/>
                       <a:r>
-                        <a:rPr lang="en-US" altLang="ja-JP" sz="1350" kern="100" dirty="0" err="1">
+                        <a:rPr lang="en-US" altLang="ja-JP" sz="1350" kern="100" err="1">
                           <a:effectLst/>
                           <a:latin typeface="+mn-ea"/>
                           <a:ea typeface="+mn-ea"/>
@@ -5959,7 +5956,7 @@
                         <a:t>Vivado</a:t>
                       </a:r>
                       <a:r>
-                        <a:rPr lang="en-US" altLang="ja-JP" sz="1350" kern="100" dirty="0">
+                        <a:rPr lang="en-US" altLang="ja-JP" sz="1350" kern="100">
                           <a:effectLst/>
                           <a:latin typeface="+mn-ea"/>
                           <a:ea typeface="+mn-ea"/>
@@ -5968,7 +5965,7 @@
                         <a:t>, </a:t>
                       </a:r>
                       <a:r>
-                        <a:rPr lang="en-US" altLang="ja-JP" sz="1350" kern="100" dirty="0" err="1">
+                        <a:rPr lang="en-US" altLang="ja-JP" sz="1350" kern="100" err="1">
                           <a:effectLst/>
                           <a:latin typeface="+mn-ea"/>
                           <a:ea typeface="+mn-ea"/>
@@ -5977,7 +5974,7 @@
                         <a:t>Vitis、Vscode</a:t>
                       </a:r>
                       <a:r>
-                        <a:rPr lang="ja-JP" altLang="en-US" sz="1350" kern="100" dirty="0">
+                        <a:rPr lang="ja-JP" altLang="en-US" sz="1350" kern="100">
                           <a:effectLst/>
                           <a:latin typeface="+mn-ea"/>
                           <a:ea typeface="+mn-ea"/>
@@ -5986,7 +5983,7 @@
                         <a:t>、</a:t>
                       </a:r>
                       <a:r>
-                        <a:rPr lang="en-US" altLang="ja-JP" sz="1350" kern="100" dirty="0" err="1">
+                        <a:rPr lang="en-US" altLang="ja-JP" sz="1350" kern="100" err="1">
                           <a:effectLst/>
                           <a:latin typeface="+mn-ea"/>
                           <a:ea typeface="+mn-ea"/>
@@ -5995,7 +5992,7 @@
                         <a:t>LTspice</a:t>
                       </a:r>
                       <a:r>
-                        <a:rPr lang="en-US" altLang="ja-JP" sz="1350" kern="100" dirty="0">
+                        <a:rPr lang="en-US" altLang="ja-JP" sz="1350" kern="100">
                           <a:effectLst/>
                           <a:latin typeface="+mn-ea"/>
                           <a:ea typeface="+mn-ea"/>
@@ -6021,12 +6018,12 @@
                     <a:p>
                       <a:pPr algn="ctr"/>
                       <a:r>
-                        <a:rPr lang="ja-JP" sz="1350" kern="100" dirty="0">
+                        <a:rPr lang="ja-JP" sz="1350" kern="100">
                           <a:effectLst/>
                         </a:rPr>
                         <a:t>評価ユーザ支援技術</a:t>
                       </a:r>
-                      <a:endParaRPr lang="ja-JP" sz="1350" kern="100" dirty="0">
+                      <a:endParaRPr lang="ja-JP" sz="1350" kern="100">
                         <a:effectLst/>
                         <a:latin typeface="Century" panose="02040604050505020304" pitchFamily="18" charset="0"/>
                         <a:ea typeface="ＭＳ 明朝" panose="02020609040205080304" pitchFamily="17" charset="-128"/>
@@ -6043,18 +6040,18 @@
                     <a:p>
                       <a:pPr algn="just"/>
                       <a:r>
-                        <a:rPr lang="en-US" altLang="ja-JP" sz="1350" kern="100" dirty="0">
+                        <a:rPr lang="en-US" altLang="ja-JP" sz="1350" kern="100">
                           <a:effectLst/>
                         </a:rPr>
                         <a:t>PMIC</a:t>
                       </a:r>
                       <a:r>
-                        <a:rPr lang="ja-JP" altLang="en-US" sz="1350" kern="100" dirty="0">
+                        <a:rPr lang="ja-JP" altLang="en-US" sz="1350" kern="100">
                           <a:effectLst/>
                         </a:rPr>
                         <a:t>評価装置業務。</a:t>
                       </a:r>
-                      <a:endParaRPr lang="ja-JP" sz="1350" kern="100" dirty="0">
+                      <a:endParaRPr lang="ja-JP" sz="1350" kern="100">
                         <a:effectLst/>
                         <a:latin typeface="Century" panose="02040604050505020304" pitchFamily="18" charset="0"/>
                         <a:ea typeface="ＭＳ 明朝" panose="02020609040205080304" pitchFamily="17" charset="-128"/>
@@ -6078,7 +6075,7 @@
                     <a:p>
                       <a:pPr algn="ctr"/>
                       <a:r>
-                        <a:rPr lang="ja-JP" altLang="en-US" sz="1350" kern="100" dirty="0">
+                        <a:rPr lang="ja-JP" altLang="en-US" sz="1350" kern="100">
                           <a:effectLst/>
                           <a:latin typeface="Century" panose="02040604050505020304" pitchFamily="18" charset="0"/>
                           <a:ea typeface="ＭＳ 明朝" panose="02020609040205080304" pitchFamily="17" charset="-128"/>
@@ -6086,7 +6083,7 @@
                         </a:rPr>
                         <a:t>サポート業務</a:t>
                       </a:r>
-                      <a:endParaRPr lang="ja-JP" sz="1350" kern="100" dirty="0">
+                      <a:endParaRPr lang="ja-JP" sz="1350" kern="100">
                         <a:effectLst/>
                         <a:latin typeface="Century" panose="02040604050505020304" pitchFamily="18" charset="0"/>
                         <a:ea typeface="ＭＳ 明朝" panose="02020609040205080304" pitchFamily="17" charset="-128"/>
@@ -6103,7 +6100,7 @@
                     <a:p>
                       <a:pPr algn="just"/>
                       <a:r>
-                        <a:rPr lang="ja-JP" altLang="en-US" sz="1350" kern="100" dirty="0">
+                        <a:rPr lang="ja-JP" altLang="en-US" sz="1350" kern="100">
                           <a:effectLst/>
                           <a:latin typeface="+mn-ea"/>
                           <a:ea typeface="+mn-ea"/>
@@ -6157,19 +6154,19 @@
           <a:lstStyle/>
           <a:p>
             <a:r>
-              <a:rPr lang="en-US" altLang="ja-JP" sz="1400" dirty="0">
+              <a:rPr lang="en-US" altLang="ja-JP" sz="1400">
                 <a:ea typeface="游ゴシック"/>
               </a:rPr>
               <a:t>D</a:t>
             </a:r>
             <a:r>
-              <a:rPr lang="ja-JP" sz="1400" dirty="0">
+              <a:rPr lang="ja-JP" sz="1400">
                 <a:ea typeface="游ゴシック"/>
               </a:rPr>
               <a:t>社での派遣先</a:t>
             </a:r>
             <a:r>
-              <a:rPr lang="ja-JP" altLang="en-US" sz="1400" dirty="0">
+              <a:rPr lang="ja-JP" altLang="en-US" sz="1400">
                 <a:ea typeface="游ゴシック"/>
               </a:rPr>
               <a:t>業務</a:t>
@@ -6231,10 +6228,10 @@
           <a:lstStyle/>
           <a:p>
             <a:r>
-              <a:rPr lang="ja-JP" altLang="en-US" sz="3200" dirty="0"/>
+              <a:rPr lang="ja-JP" altLang="en-US" sz="3200"/>
               <a:t>６．基板製作スキル</a:t>
             </a:r>
-            <a:endParaRPr kumimoji="1" lang="ja-JP" altLang="en-US" sz="3200" dirty="0"/>
+            <a:endParaRPr kumimoji="1" lang="ja-JP" altLang="en-US" sz="3200"/>
           </a:p>
         </p:txBody>
       </p:sp>
@@ -6289,8 +6286,8 @@
         </p:blipFill>
         <p:spPr>
           <a:xfrm>
-            <a:off x="897098" y="1521268"/>
-            <a:ext cx="2687784" cy="1485910"/>
+            <a:off x="945225" y="1545332"/>
+            <a:ext cx="2159239" cy="1052880"/>
           </a:xfrm>
           <a:prstGeom prst="rect">
             <a:avLst/>
@@ -6319,8 +6316,8 @@
         </p:blipFill>
         <p:spPr>
           <a:xfrm>
-            <a:off x="4430049" y="1521269"/>
-            <a:ext cx="4370664" cy="1485910"/>
+            <a:off x="5416957" y="1545331"/>
+            <a:ext cx="2595302" cy="1052880"/>
           </a:xfrm>
           <a:prstGeom prst="rect">
             <a:avLst/>
@@ -6349,8 +6346,8 @@
         </p:blipFill>
         <p:spPr>
           <a:xfrm>
-            <a:off x="894140" y="3252494"/>
-            <a:ext cx="3422358" cy="1479659"/>
+            <a:off x="3188368" y="2641655"/>
+            <a:ext cx="2156972" cy="1127619"/>
           </a:xfrm>
           <a:prstGeom prst="rect">
             <a:avLst/>
@@ -6401,14 +6398,14 @@
           <a:p>
             <a:pPr algn="ctr"/>
             <a:r>
-              <a:rPr kumimoji="1" lang="en-US" altLang="ja-JP" dirty="0">
+              <a:rPr kumimoji="1" lang="en-US" altLang="ja-JP">
                 <a:solidFill>
                   <a:srgbClr val="FF0000"/>
                 </a:solidFill>
               </a:rPr>
               <a:t>Confidential</a:t>
             </a:r>
-            <a:endParaRPr kumimoji="1" lang="ja-JP" altLang="en-US" dirty="0">
+            <a:endParaRPr kumimoji="1" lang="ja-JP" altLang="en-US">
               <a:solidFill>
                 <a:srgbClr val="FF0000"/>
               </a:solidFill>
@@ -6438,8 +6435,8 @@
         </p:blipFill>
         <p:spPr>
           <a:xfrm>
-            <a:off x="895156" y="5068660"/>
-            <a:ext cx="1611476" cy="1469572"/>
+            <a:off x="943284" y="5068660"/>
+            <a:ext cx="2156048" cy="1469572"/>
           </a:xfrm>
           <a:prstGeom prst="rect">
             <a:avLst/>
@@ -6468,8 +6465,8 @@
         </p:blipFill>
         <p:spPr>
           <a:xfrm>
-            <a:off x="2830285" y="5070412"/>
-            <a:ext cx="2517322" cy="1452463"/>
+            <a:off x="3188367" y="5070412"/>
+            <a:ext cx="2159240" cy="1452463"/>
           </a:xfrm>
           <a:prstGeom prst="rect">
             <a:avLst/>
@@ -6498,8 +6495,8 @@
         </p:blipFill>
         <p:spPr>
           <a:xfrm>
-            <a:off x="5919107" y="5067518"/>
-            <a:ext cx="2598965" cy="1499071"/>
+            <a:off x="5415583" y="5066806"/>
+            <a:ext cx="2598965" cy="1469572"/>
           </a:xfrm>
           <a:prstGeom prst="rect">
             <a:avLst/>
@@ -6528,8 +6525,158 @@
         </p:blipFill>
         <p:spPr>
           <a:xfrm>
-            <a:off x="4429125" y="3217036"/>
-            <a:ext cx="3292930" cy="1505696"/>
+            <a:off x="5416032" y="3816041"/>
+            <a:ext cx="2598066" cy="1207604"/>
+          </a:xfrm>
+          <a:prstGeom prst="rect">
+            <a:avLst/>
+          </a:prstGeom>
+        </p:spPr>
+      </p:pic>
+      <p:pic>
+        <p:nvPicPr>
+          <p:cNvPr id="11" name="図 10" descr="カレンダー が含まれている画像&#10;&#10;AI 生成コンテンツは間違っている可能性があります。">
+            <a:extLst>
+              <a:ext uri="{FF2B5EF4-FFF2-40B4-BE49-F238E27FC236}">
+                <a16:creationId xmlns:a16="http://schemas.microsoft.com/office/drawing/2014/main" id="{B2EA25C0-4385-FA8D-AB25-7E6DB0CDAD02}"/>
+              </a:ext>
+            </a:extLst>
+          </p:cNvPr>
+          <p:cNvPicPr>
+            <a:picLocks noChangeAspect="1"/>
+          </p:cNvPicPr>
+          <p:nvPr/>
+        </p:nvPicPr>
+        <p:blipFill>
+          <a:blip r:embed="rId9"/>
+          <a:stretch>
+            <a:fillRect/>
+          </a:stretch>
+        </p:blipFill>
+        <p:spPr>
+          <a:xfrm>
+            <a:off x="942360" y="2647856"/>
+            <a:ext cx="2156972" cy="1127619"/>
+          </a:xfrm>
+          <a:prstGeom prst="rect">
+            <a:avLst/>
+          </a:prstGeom>
+        </p:spPr>
+      </p:pic>
+      <p:pic>
+        <p:nvPicPr>
+          <p:cNvPr id="12" name="図 11" descr="カレンダー が含まれている画像&#10;&#10;AI 生成コンテンツは間違っている可能性があります。">
+            <a:extLst>
+              <a:ext uri="{FF2B5EF4-FFF2-40B4-BE49-F238E27FC236}">
+                <a16:creationId xmlns:a16="http://schemas.microsoft.com/office/drawing/2014/main" id="{C819054F-1791-1388-9908-1E96148C9F6C}"/>
+              </a:ext>
+            </a:extLst>
+          </p:cNvPr>
+          <p:cNvPicPr>
+            <a:picLocks noChangeAspect="1"/>
+          </p:cNvPicPr>
+          <p:nvPr/>
+        </p:nvPicPr>
+        <p:blipFill>
+          <a:blip r:embed="rId10"/>
+          <a:stretch>
+            <a:fillRect/>
+          </a:stretch>
+        </p:blipFill>
+        <p:spPr>
+          <a:xfrm>
+            <a:off x="942360" y="3820171"/>
+            <a:ext cx="2156972" cy="1203793"/>
+          </a:xfrm>
+          <a:prstGeom prst="rect">
+            <a:avLst/>
+          </a:prstGeom>
+        </p:spPr>
+      </p:pic>
+      <p:pic>
+        <p:nvPicPr>
+          <p:cNvPr id="14" name="図 13">
+            <a:extLst>
+              <a:ext uri="{FF2B5EF4-FFF2-40B4-BE49-F238E27FC236}">
+                <a16:creationId xmlns:a16="http://schemas.microsoft.com/office/drawing/2014/main" id="{C7CD2F9F-4E9B-A2A8-43D6-4E66A3EB6994}"/>
+              </a:ext>
+            </a:extLst>
+          </p:cNvPr>
+          <p:cNvPicPr>
+            <a:picLocks noChangeAspect="1"/>
+          </p:cNvPicPr>
+          <p:nvPr/>
+        </p:nvPicPr>
+        <p:blipFill>
+          <a:blip r:embed="rId11"/>
+          <a:stretch>
+            <a:fillRect/>
+          </a:stretch>
+        </p:blipFill>
+        <p:spPr>
+          <a:xfrm>
+            <a:off x="5414192" y="2647856"/>
+            <a:ext cx="2598066" cy="1121418"/>
+          </a:xfrm>
+          <a:prstGeom prst="rect">
+            <a:avLst/>
+          </a:prstGeom>
+        </p:spPr>
+      </p:pic>
+      <p:pic>
+        <p:nvPicPr>
+          <p:cNvPr id="15" name="図 14">
+            <a:extLst>
+              <a:ext uri="{FF2B5EF4-FFF2-40B4-BE49-F238E27FC236}">
+                <a16:creationId xmlns:a16="http://schemas.microsoft.com/office/drawing/2014/main" id="{C4793120-410E-0E3B-F118-F7D5F0233312}"/>
+              </a:ext>
+            </a:extLst>
+          </p:cNvPr>
+          <p:cNvPicPr>
+            <a:picLocks noChangeAspect="1"/>
+          </p:cNvPicPr>
+          <p:nvPr/>
+        </p:nvPicPr>
+        <p:blipFill>
+          <a:blip r:embed="rId12"/>
+          <a:stretch>
+            <a:fillRect/>
+          </a:stretch>
+        </p:blipFill>
+        <p:spPr>
+          <a:xfrm>
+            <a:off x="3188367" y="3816041"/>
+            <a:ext cx="2159239" cy="1207604"/>
+          </a:xfrm>
+          <a:prstGeom prst="rect">
+            <a:avLst/>
+          </a:prstGeom>
+        </p:spPr>
+      </p:pic>
+      <p:pic>
+        <p:nvPicPr>
+          <p:cNvPr id="16" name="図 15" descr="グラフィカル ユーザー インターフェイス&#10;&#10;AI 生成コンテンツは間違っている可能性があります。">
+            <a:extLst>
+              <a:ext uri="{FF2B5EF4-FFF2-40B4-BE49-F238E27FC236}">
+                <a16:creationId xmlns:a16="http://schemas.microsoft.com/office/drawing/2014/main" id="{A53B3C2E-2EC2-9190-3E93-3191C2098BA2}"/>
+              </a:ext>
+            </a:extLst>
+          </p:cNvPr>
+          <p:cNvPicPr>
+            <a:picLocks noChangeAspect="1"/>
+          </p:cNvPicPr>
+          <p:nvPr/>
+        </p:nvPicPr>
+        <p:blipFill>
+          <a:blip r:embed="rId13"/>
+          <a:stretch>
+            <a:fillRect/>
+          </a:stretch>
+        </p:blipFill>
+        <p:spPr>
+          <a:xfrm>
+            <a:off x="3188368" y="1545332"/>
+            <a:ext cx="2159240" cy="1052879"/>
           </a:xfrm>
           <a:prstGeom prst="rect">
             <a:avLst/>
@@ -6590,10 +6737,10 @@
           <a:lstStyle/>
           <a:p>
             <a:r>
-              <a:rPr lang="ja-JP" altLang="en-US" sz="3200" dirty="0"/>
+              <a:rPr lang="ja-JP" altLang="en-US" sz="3200"/>
               <a:t>１．業務経歴①</a:t>
             </a:r>
-            <a:endParaRPr kumimoji="1" lang="ja-JP" altLang="en-US" sz="3200" dirty="0"/>
+            <a:endParaRPr kumimoji="1" lang="ja-JP" altLang="en-US" sz="3200"/>
           </a:p>
         </p:txBody>
       </p:sp>
@@ -6670,14 +6817,14 @@
           <a:p>
             <a:pPr algn="ctr"/>
             <a:r>
-              <a:rPr kumimoji="1" lang="en-US" altLang="ja-JP" dirty="0">
+              <a:rPr kumimoji="1" lang="en-US" altLang="ja-JP">
                 <a:solidFill>
                   <a:srgbClr val="FF0000"/>
                 </a:solidFill>
               </a:rPr>
               <a:t>Confidential</a:t>
             </a:r>
-            <a:endParaRPr kumimoji="1" lang="ja-JP" altLang="en-US" dirty="0">
+            <a:endParaRPr kumimoji="1" lang="ja-JP" altLang="en-US">
               <a:solidFill>
                 <a:srgbClr val="FF0000"/>
               </a:solidFill>
@@ -6738,7 +6885,7 @@
                     <a:lstStyle/>
                     <a:p>
                       <a:r>
-                        <a:rPr kumimoji="1" lang="en-US" altLang="ja-JP" dirty="0">
+                        <a:rPr kumimoji="1" lang="en-US" altLang="ja-JP">
                           <a:solidFill>
                             <a:schemeClr val="tx1"/>
                           </a:solidFill>
@@ -6746,7 +6893,7 @@
                         <a:t>1. S</a:t>
                       </a:r>
                       <a:r>
-                        <a:rPr kumimoji="1" lang="ja-JP" altLang="en-US" dirty="0">
+                        <a:rPr kumimoji="1" lang="ja-JP" altLang="en-US">
                           <a:solidFill>
                             <a:schemeClr val="tx1"/>
                           </a:solidFill>
@@ -6764,7 +6911,7 @@
                     <a:bodyPr/>
                     <a:lstStyle/>
                     <a:p>
-                      <a:endParaRPr kumimoji="1" lang="ja-JP" altLang="en-US" dirty="0"/>
+                      <a:endParaRPr kumimoji="1" lang="ja-JP" altLang="en-US"/>
                     </a:p>
                   </a:txBody>
                   <a:tcPr>
@@ -6784,7 +6931,7 @@
                     <a:lstStyle/>
                     <a:p>
                       <a:r>
-                        <a:rPr kumimoji="1" lang="ja-JP" altLang="en-US" dirty="0"/>
+                        <a:rPr kumimoji="1" lang="ja-JP" altLang="en-US"/>
                         <a:t>設計開発品</a:t>
                       </a:r>
                     </a:p>
@@ -6797,126 +6944,126 @@
                     <a:lstStyle/>
                     <a:p>
                       <a:r>
-                        <a:rPr kumimoji="1" lang="ja-JP" altLang="en-US" dirty="0"/>
+                        <a:rPr kumimoji="1" lang="ja-JP" altLang="en-US"/>
                         <a:t>カメラ用</a:t>
                       </a:r>
                       <a:r>
-                        <a:rPr kumimoji="1" lang="en-US" altLang="ja-JP" dirty="0"/>
+                        <a:rPr kumimoji="1" lang="en-US" altLang="ja-JP"/>
                         <a:t>LSI</a:t>
                       </a:r>
                       <a:r>
-                        <a:rPr kumimoji="1" lang="ja-JP" altLang="en-US" dirty="0"/>
+                        <a:rPr kumimoji="1" lang="ja-JP" altLang="en-US"/>
                         <a:t>、携帯用画像</a:t>
                       </a:r>
                       <a:r>
-                        <a:rPr kumimoji="1" lang="en-US" altLang="ja-JP" dirty="0"/>
+                        <a:rPr kumimoji="1" lang="en-US" altLang="ja-JP"/>
                         <a:t>LSI</a:t>
                       </a:r>
                       <a:r>
-                        <a:rPr kumimoji="1" lang="ja-JP" altLang="en-US" dirty="0"/>
+                        <a:rPr kumimoji="1" lang="ja-JP" altLang="en-US"/>
                         <a:t>、携帯用オーディオ</a:t>
                       </a:r>
                       <a:r>
-                        <a:rPr kumimoji="1" lang="en-US" altLang="ja-JP" dirty="0"/>
+                        <a:rPr kumimoji="1" lang="en-US" altLang="ja-JP"/>
                         <a:t>LSI</a:t>
                       </a:r>
                       <a:r>
-                        <a:rPr kumimoji="1" lang="ja-JP" altLang="en-US" dirty="0"/>
+                        <a:rPr kumimoji="1" lang="ja-JP" altLang="en-US"/>
                         <a:t>、ボイスレコーダ</a:t>
                       </a:r>
                       <a:r>
-                        <a:rPr kumimoji="1" lang="en-US" altLang="ja-JP" dirty="0"/>
+                        <a:rPr kumimoji="1" lang="en-US" altLang="ja-JP"/>
                         <a:t>LSI</a:t>
                       </a:r>
                       <a:r>
-                        <a:rPr kumimoji="1" lang="ja-JP" altLang="en-US" dirty="0"/>
+                        <a:rPr kumimoji="1" lang="ja-JP" altLang="en-US"/>
                         <a:t>、液晶</a:t>
                       </a:r>
                       <a:r>
-                        <a:rPr kumimoji="1" lang="en-US" altLang="ja-JP" dirty="0"/>
+                        <a:rPr kumimoji="1" lang="en-US" altLang="ja-JP"/>
                         <a:t>TV</a:t>
                       </a:r>
                       <a:r>
-                        <a:rPr kumimoji="1" lang="ja-JP" altLang="en-US" dirty="0"/>
+                        <a:rPr kumimoji="1" lang="ja-JP" altLang="en-US"/>
                         <a:t>用</a:t>
                       </a:r>
                       <a:r>
-                        <a:rPr kumimoji="1" lang="en-US" altLang="ja-JP" dirty="0"/>
+                        <a:rPr kumimoji="1" lang="en-US" altLang="ja-JP"/>
                         <a:t>LSI</a:t>
                       </a:r>
                       <a:r>
-                        <a:rPr kumimoji="1" lang="ja-JP" altLang="en-US" dirty="0"/>
+                        <a:rPr kumimoji="1" lang="ja-JP" altLang="en-US"/>
                         <a:t>、スマートホン用</a:t>
                       </a:r>
                       <a:r>
-                        <a:rPr kumimoji="1" lang="en-US" altLang="ja-JP" dirty="0"/>
+                        <a:rPr kumimoji="1" lang="en-US" altLang="ja-JP"/>
                         <a:t>LSI</a:t>
                       </a:r>
                       <a:r>
-                        <a:rPr kumimoji="1" lang="ja-JP" altLang="en-US" dirty="0"/>
+                        <a:rPr kumimoji="1" lang="ja-JP" altLang="en-US"/>
                         <a:t>、タッチセンサ</a:t>
                       </a:r>
                       <a:r>
-                        <a:rPr kumimoji="1" lang="en-US" altLang="ja-JP" dirty="0"/>
+                        <a:rPr kumimoji="1" lang="en-US" altLang="ja-JP"/>
                         <a:t>LSI</a:t>
                       </a:r>
                       <a:r>
-                        <a:rPr kumimoji="1" lang="ja-JP" altLang="en-US" dirty="0"/>
+                        <a:rPr kumimoji="1" lang="ja-JP" altLang="en-US"/>
                         <a:t>、</a:t>
                       </a:r>
                       <a:r>
-                        <a:rPr kumimoji="1" lang="en-US" altLang="ja-JP" dirty="0"/>
+                        <a:rPr kumimoji="1" lang="en-US" altLang="ja-JP"/>
                         <a:t>ARM</a:t>
                       </a:r>
                       <a:r>
-                        <a:rPr kumimoji="1" lang="ja-JP" altLang="en-US" dirty="0"/>
+                        <a:rPr kumimoji="1" lang="ja-JP" altLang="en-US"/>
                         <a:t>搭載</a:t>
                       </a:r>
                       <a:r>
-                        <a:rPr kumimoji="1" lang="en-US" altLang="ja-JP" dirty="0"/>
+                        <a:rPr kumimoji="1" lang="en-US" altLang="ja-JP"/>
                         <a:t>LSI</a:t>
                       </a:r>
                       <a:r>
-                        <a:rPr kumimoji="1" lang="ja-JP" altLang="en-US" dirty="0"/>
+                        <a:rPr kumimoji="1" lang="ja-JP" altLang="en-US"/>
                         <a:t>、車載用</a:t>
                       </a:r>
                       <a:r>
-                        <a:rPr kumimoji="1" lang="en-US" altLang="ja-JP" dirty="0"/>
+                        <a:rPr kumimoji="1" lang="en-US" altLang="ja-JP"/>
                         <a:t>LSI</a:t>
                       </a:r>
                       <a:r>
-                        <a:rPr kumimoji="1" lang="ja-JP" altLang="en-US" dirty="0"/>
+                        <a:rPr kumimoji="1" lang="ja-JP" altLang="en-US"/>
                         <a:t>、人体センサ</a:t>
                       </a:r>
                       <a:r>
-                        <a:rPr kumimoji="1" lang="en-US" altLang="ja-JP" dirty="0"/>
+                        <a:rPr kumimoji="1" lang="en-US" altLang="ja-JP"/>
                         <a:t>LSI</a:t>
                       </a:r>
                       <a:r>
-                        <a:rPr kumimoji="1" lang="ja-JP" altLang="en-US" dirty="0"/>
+                        <a:rPr kumimoji="1" lang="ja-JP" altLang="en-US"/>
                         <a:t>、カスタム</a:t>
                       </a:r>
                       <a:r>
-                        <a:rPr kumimoji="1" lang="en-US" altLang="ja-JP" dirty="0"/>
+                        <a:rPr kumimoji="1" lang="en-US" altLang="ja-JP"/>
                         <a:t>LSI</a:t>
                       </a:r>
                       <a:r>
-                        <a:rPr kumimoji="1" lang="ja-JP" altLang="en-US" dirty="0"/>
+                        <a:rPr kumimoji="1" lang="ja-JP" altLang="en-US"/>
                         <a:t>、</a:t>
                       </a:r>
                       <a:r>
-                        <a:rPr kumimoji="1" lang="en-US" altLang="ja-JP" dirty="0"/>
+                        <a:rPr kumimoji="1" lang="en-US" altLang="ja-JP"/>
                         <a:t>USB</a:t>
                       </a:r>
                       <a:r>
-                        <a:rPr kumimoji="1" lang="ja-JP" altLang="en-US" dirty="0"/>
+                        <a:rPr kumimoji="1" lang="ja-JP" altLang="en-US"/>
                         <a:t>スイッチ</a:t>
                       </a:r>
                       <a:r>
-                        <a:rPr kumimoji="1" lang="en-US" altLang="ja-JP" dirty="0"/>
+                        <a:rPr kumimoji="1" lang="en-US" altLang="ja-JP"/>
                         <a:t>LSI</a:t>
                       </a:r>
-                      <a:endParaRPr kumimoji="1" lang="ja-JP" altLang="en-US" dirty="0"/>
+                      <a:endParaRPr kumimoji="1" lang="ja-JP" altLang="en-US"/>
                     </a:p>
                   </a:txBody>
                   <a:tcPr/>
@@ -6934,7 +7081,7 @@
                     <a:lstStyle/>
                     <a:p>
                       <a:r>
-                        <a:rPr kumimoji="1" lang="ja-JP" altLang="en-US" dirty="0"/>
+                        <a:rPr kumimoji="1" lang="ja-JP" altLang="en-US"/>
                         <a:t>主業務</a:t>
                       </a:r>
                     </a:p>
@@ -6947,19 +7094,19 @@
                     <a:lstStyle/>
                     <a:p>
                       <a:r>
-                        <a:rPr kumimoji="1" lang="en-US" altLang="ja-JP" dirty="0"/>
+                        <a:rPr kumimoji="1" lang="en-US" altLang="ja-JP"/>
                         <a:t>LSI</a:t>
                       </a:r>
                       <a:r>
-                        <a:rPr kumimoji="1" lang="ja-JP" altLang="en-US" dirty="0"/>
+                        <a:rPr kumimoji="1" lang="ja-JP" altLang="en-US"/>
                         <a:t>設計開発（アナログ、デジタル）、評価業務（テスト、評価ソフト、評価基板）、ユーザサポート、</a:t>
                       </a:r>
                       <a:r>
-                        <a:rPr kumimoji="1" lang="en-US" altLang="ja-JP" dirty="0"/>
+                        <a:rPr kumimoji="1" lang="en-US" altLang="ja-JP"/>
                         <a:t>LSI</a:t>
                       </a:r>
                       <a:r>
-                        <a:rPr kumimoji="1" lang="ja-JP" altLang="en-US" dirty="0"/>
+                        <a:rPr kumimoji="1" lang="ja-JP" altLang="en-US"/>
                         <a:t>企画＆拡販。</a:t>
                       </a:r>
                     </a:p>
@@ -6979,7 +7126,7 @@
                     <a:lstStyle/>
                     <a:p>
                       <a:r>
-                        <a:rPr kumimoji="1" lang="ja-JP" altLang="en-US" dirty="0"/>
+                        <a:rPr kumimoji="1" lang="ja-JP" altLang="en-US"/>
                         <a:t>詳細</a:t>
                       </a:r>
                     </a:p>
@@ -7009,30 +7156,30 @@
                         <a:defRPr/>
                       </a:pPr>
                       <a:r>
-                        <a:rPr kumimoji="1" lang="en-US" altLang="ja-JP" dirty="0"/>
+                        <a:rPr kumimoji="1" lang="en-US" altLang="ja-JP"/>
                         <a:t>CMOS</a:t>
                       </a:r>
                       <a:r>
-                        <a:rPr kumimoji="1" lang="ja-JP" altLang="en-US" dirty="0"/>
+                        <a:rPr kumimoji="1" lang="ja-JP" altLang="en-US"/>
                         <a:t>アナログフロントエンド、</a:t>
                       </a:r>
                       <a:r>
-                        <a:rPr kumimoji="1" lang="en-US" altLang="ja-JP" dirty="0"/>
+                        <a:rPr kumimoji="1" lang="en-US" altLang="ja-JP"/>
                         <a:t>CMOS</a:t>
                       </a:r>
                       <a:r>
-                        <a:rPr kumimoji="1" lang="ja-JP" altLang="en-US" dirty="0"/>
+                        <a:rPr kumimoji="1" lang="ja-JP" altLang="en-US"/>
                         <a:t>アナログ回路、バイポーラ</a:t>
                       </a:r>
                       <a:r>
-                        <a:rPr kumimoji="1" lang="en-US" altLang="ja-JP" dirty="0"/>
+                        <a:rPr kumimoji="1" lang="en-US" altLang="ja-JP"/>
                         <a:t>LSI</a:t>
                       </a:r>
                       <a:r>
-                        <a:rPr kumimoji="1" lang="ja-JP" altLang="en-US" dirty="0"/>
+                        <a:rPr kumimoji="1" lang="ja-JP" altLang="en-US"/>
                         <a:t>設計</a:t>
                       </a:r>
-                      <a:endParaRPr kumimoji="1" lang="en-US" altLang="ja-JP" dirty="0"/>
+                      <a:endParaRPr kumimoji="1" lang="en-US" altLang="ja-JP"/>
                     </a:p>
                     <a:p>
                       <a:pPr marL="285750" marR="0" lvl="0" indent="-285750" algn="l" defTabSz="685800" rtl="0" eaLnBrk="1" fontAlgn="auto" latinLnBrk="0" hangingPunct="1">
@@ -7053,42 +7200,42 @@
                         <a:defRPr/>
                       </a:pPr>
                       <a:r>
-                        <a:rPr kumimoji="1" lang="ja-JP" altLang="en-US" dirty="0"/>
+                        <a:rPr kumimoji="1" lang="ja-JP" altLang="en-US"/>
                         <a:t>カメラ＆画像信号処理設計、</a:t>
                       </a:r>
                       <a:r>
-                        <a:rPr kumimoji="1" lang="en-US" altLang="ja-JP" dirty="0" err="1"/>
+                        <a:rPr kumimoji="1" lang="en-US" altLang="ja-JP" err="1"/>
                         <a:t>verilog</a:t>
                       </a:r>
                       <a:r>
-                        <a:rPr kumimoji="1" lang="ja-JP" altLang="en-US" dirty="0"/>
+                        <a:rPr kumimoji="1" lang="ja-JP" altLang="en-US"/>
                         <a:t>による大規模</a:t>
                       </a:r>
                       <a:r>
-                        <a:rPr kumimoji="1" lang="en-US" altLang="ja-JP" dirty="0"/>
+                        <a:rPr kumimoji="1" lang="en-US" altLang="ja-JP"/>
                         <a:t>LSI</a:t>
                       </a:r>
                       <a:r>
-                        <a:rPr kumimoji="1" lang="ja-JP" altLang="en-US" dirty="0"/>
+                        <a:rPr kumimoji="1" lang="ja-JP" altLang="en-US"/>
                         <a:t>設計</a:t>
                       </a:r>
                       <a:r>
-                        <a:rPr kumimoji="1" lang="en-US" altLang="ja-JP" dirty="0"/>
+                        <a:rPr kumimoji="1" lang="en-US" altLang="ja-JP"/>
                         <a:t>(60</a:t>
                       </a:r>
                       <a:r>
-                        <a:rPr kumimoji="1" lang="ja-JP" altLang="en-US" dirty="0"/>
+                        <a:rPr kumimoji="1" lang="ja-JP" altLang="en-US"/>
                         <a:t>万ゲート程度</a:t>
                       </a:r>
                       <a:r>
-                        <a:rPr kumimoji="1" lang="en-US" altLang="ja-JP" dirty="0"/>
+                        <a:rPr kumimoji="1" lang="en-US" altLang="ja-JP"/>
                         <a:t>)</a:t>
                       </a:r>
                       <a:r>
-                        <a:rPr kumimoji="1" lang="ja-JP" altLang="en-US" dirty="0"/>
+                        <a:rPr kumimoji="1" lang="ja-JP" altLang="en-US"/>
                         <a:t>。</a:t>
                       </a:r>
-                      <a:endParaRPr kumimoji="1" lang="en-US" altLang="ja-JP" dirty="0"/>
+                      <a:endParaRPr kumimoji="1" lang="en-US" altLang="ja-JP"/>
                     </a:p>
                     <a:p>
                       <a:pPr marL="285750" marR="0" lvl="0" indent="-285750" algn="l" defTabSz="685800" rtl="0" eaLnBrk="1" fontAlgn="auto" latinLnBrk="0" hangingPunct="1">
@@ -7109,23 +7256,23 @@
                         <a:defRPr/>
                       </a:pPr>
                       <a:r>
-                        <a:rPr kumimoji="1" lang="en-US" altLang="ja-JP" dirty="0"/>
+                        <a:rPr kumimoji="1" lang="en-US" altLang="ja-JP"/>
                         <a:t>FPGA</a:t>
                       </a:r>
                       <a:r>
-                        <a:rPr kumimoji="1" lang="ja-JP" altLang="en-US" dirty="0"/>
+                        <a:rPr kumimoji="1" lang="ja-JP" altLang="en-US"/>
                         <a:t>開発</a:t>
                       </a:r>
                       <a:r>
-                        <a:rPr kumimoji="1" lang="en-US" altLang="ja-JP" dirty="0"/>
+                        <a:rPr kumimoji="1" lang="en-US" altLang="ja-JP"/>
                         <a:t>(</a:t>
                       </a:r>
                       <a:r>
-                        <a:rPr kumimoji="1" lang="ja-JP" altLang="en-US" dirty="0"/>
+                        <a:rPr kumimoji="1" lang="ja-JP" altLang="en-US"/>
                         <a:t>アルテラ、ザイリンクス</a:t>
                       </a:r>
                       <a:r>
-                        <a:rPr kumimoji="1" lang="en-US" altLang="ja-JP" dirty="0"/>
+                        <a:rPr kumimoji="1" lang="en-US" altLang="ja-JP"/>
                         <a:t>Virtex2)</a:t>
                       </a:r>
                     </a:p>
@@ -7148,14 +7295,14 @@
                         <a:defRPr/>
                       </a:pPr>
                       <a:r>
-                        <a:rPr kumimoji="1" lang="en-US" altLang="ja-JP" dirty="0"/>
+                        <a:rPr kumimoji="1" lang="en-US" altLang="ja-JP"/>
                         <a:t>LSI</a:t>
                       </a:r>
                       <a:r>
-                        <a:rPr kumimoji="1" lang="ja-JP" altLang="en-US" dirty="0"/>
+                        <a:rPr kumimoji="1" lang="ja-JP" altLang="en-US"/>
                         <a:t>＆画質評価</a:t>
                       </a:r>
-                      <a:endParaRPr kumimoji="1" lang="en-US" altLang="ja-JP" dirty="0"/>
+                      <a:endParaRPr kumimoji="1" lang="en-US" altLang="ja-JP"/>
                     </a:p>
                     <a:p>
                       <a:pPr marL="285750" marR="0" lvl="0" indent="-285750" algn="l" defTabSz="685800" rtl="0" eaLnBrk="1" fontAlgn="auto" latinLnBrk="0" hangingPunct="1">
@@ -7176,7 +7323,7 @@
                         <a:defRPr/>
                       </a:pPr>
                       <a:r>
-                        <a:rPr kumimoji="1" lang="ja-JP" altLang="en-US" dirty="0"/>
+                        <a:rPr kumimoji="1" lang="ja-JP" altLang="en-US"/>
                         <a:t>デモ＆評価ボード作成</a:t>
                       </a:r>
                     </a:p>
@@ -7369,10 +7516,10 @@
           <a:lstStyle/>
           <a:p>
             <a:r>
-              <a:rPr lang="ja-JP" altLang="en-US" sz="3600" dirty="0"/>
+              <a:rPr lang="ja-JP" altLang="en-US" sz="3600"/>
               <a:t>１．業務経歴②</a:t>
             </a:r>
-            <a:endParaRPr kumimoji="1" lang="ja-JP" altLang="en-US" dirty="0">
+            <a:endParaRPr kumimoji="1" lang="ja-JP" altLang="en-US">
               <a:latin typeface="ＭＳ ゴシック" panose="020B0609070205080204" pitchFamily="49" charset="-128"/>
               <a:ea typeface="ＭＳ ゴシック" panose="020B0609070205080204" pitchFamily="49" charset="-128"/>
               <a:cs typeface="Leelawadee UI Semilight" panose="020B0402040204020203" pitchFamily="34" charset="-34"/>
@@ -7462,7 +7609,7 @@
                     <a:lstStyle/>
                     <a:p>
                       <a:r>
-                        <a:rPr kumimoji="1" lang="en-US" altLang="ja-JP" dirty="0">
+                        <a:rPr kumimoji="1" lang="en-US" altLang="ja-JP">
                           <a:solidFill>
                             <a:schemeClr val="tx1"/>
                           </a:solidFill>
@@ -7470,7 +7617,7 @@
                         <a:t>2. N</a:t>
                       </a:r>
                       <a:r>
-                        <a:rPr kumimoji="1" lang="ja-JP" altLang="en-US" dirty="0">
+                        <a:rPr kumimoji="1" lang="ja-JP" altLang="en-US">
                           <a:solidFill>
                             <a:schemeClr val="tx1"/>
                           </a:solidFill>
@@ -7488,7 +7635,7 @@
                     <a:bodyPr/>
                     <a:lstStyle/>
                     <a:p>
-                      <a:endParaRPr kumimoji="1" lang="ja-JP" altLang="en-US" dirty="0"/>
+                      <a:endParaRPr kumimoji="1" lang="ja-JP" altLang="en-US"/>
                     </a:p>
                   </a:txBody>
                   <a:tcPr>
@@ -7508,7 +7655,7 @@
                     <a:lstStyle/>
                     <a:p>
                       <a:r>
-                        <a:rPr kumimoji="1" lang="ja-JP" altLang="en-US" dirty="0"/>
+                        <a:rPr kumimoji="1" lang="ja-JP" altLang="en-US"/>
                         <a:t>設計開発品</a:t>
                       </a:r>
                     </a:p>
@@ -7538,7 +7685,7 @@
                         <a:defRPr/>
                       </a:pPr>
                       <a:r>
-                        <a:rPr kumimoji="1" lang="ja-JP" altLang="en-US" sz="1400" dirty="0"/>
+                        <a:rPr kumimoji="1" lang="ja-JP" altLang="en-US" sz="1400"/>
                         <a:t>マシニングセンタの機内測定用の無線式ボアゲージシステム</a:t>
                       </a:r>
                     </a:p>
@@ -7561,10 +7708,10 @@
                         <a:defRPr/>
                       </a:pPr>
                       <a:r>
-                        <a:rPr kumimoji="1" lang="ja-JP" altLang="en-US" dirty="0"/>
+                        <a:rPr kumimoji="1" lang="ja-JP" altLang="en-US"/>
                         <a:t>無線式刃先制御システム</a:t>
                       </a:r>
-                      <a:endParaRPr kumimoji="1" lang="en-US" altLang="ja-JP" dirty="0"/>
+                      <a:endParaRPr kumimoji="1" lang="en-US" altLang="ja-JP"/>
                     </a:p>
                     <a:p>
                       <a:pPr marL="0" marR="0" lvl="0" indent="0" algn="l" defTabSz="685800" rtl="0" eaLnBrk="1" fontAlgn="auto" latinLnBrk="0" hangingPunct="1">
@@ -7585,31 +7732,31 @@
                         <a:defRPr/>
                       </a:pPr>
                       <a:r>
-                        <a:rPr kumimoji="1" lang="ja-JP" altLang="en-US" dirty="0"/>
+                        <a:rPr kumimoji="1" lang="ja-JP" altLang="en-US"/>
                         <a:t>刃先エア制御装置</a:t>
                       </a:r>
                     </a:p>
                     <a:p>
                       <a:r>
-                        <a:rPr lang="en-US" altLang="ja-JP" sz="1350" dirty="0"/>
+                        <a:rPr lang="en-US" altLang="ja-JP" sz="1350"/>
                         <a:t>IoT</a:t>
                       </a:r>
                       <a:r>
-                        <a:rPr lang="ja-JP" altLang="en-US" sz="1350" dirty="0"/>
+                        <a:rPr lang="ja-JP" altLang="en-US" sz="1350"/>
                         <a:t>向け刃先欠損や消耗予兆検出の為の加速度センサーを使ったエッジデバイス</a:t>
                       </a:r>
-                      <a:endParaRPr lang="en-US" altLang="ja-JP" sz="1350" dirty="0"/>
+                      <a:endParaRPr lang="en-US" altLang="ja-JP" sz="1350"/>
                     </a:p>
                     <a:p>
                       <a:r>
-                        <a:rPr lang="en-US" altLang="ja-JP" sz="1350" dirty="0"/>
+                        <a:rPr lang="en-US" altLang="ja-JP" sz="1350"/>
                         <a:t>50W</a:t>
                       </a:r>
                       <a:r>
-                        <a:rPr lang="ja-JP" altLang="en-US" sz="1350" dirty="0"/>
+                        <a:rPr lang="ja-JP" altLang="en-US" sz="1350"/>
                         <a:t>ワイヤレス電力伝送装置</a:t>
                       </a:r>
-                      <a:endParaRPr lang="en-US" altLang="ja-JP" sz="1350" dirty="0"/>
+                      <a:endParaRPr lang="en-US" altLang="ja-JP" sz="1350"/>
                     </a:p>
                   </a:txBody>
                   <a:tcPr/>
@@ -7627,7 +7774,7 @@
                     <a:lstStyle/>
                     <a:p>
                       <a:r>
-                        <a:rPr kumimoji="1" lang="ja-JP" altLang="en-US" dirty="0"/>
+                        <a:rPr kumimoji="1" lang="ja-JP" altLang="en-US"/>
                         <a:t>主業務</a:t>
                       </a:r>
                     </a:p>
@@ -7640,14 +7787,14 @@
                     <a:lstStyle/>
                     <a:p>
                       <a:r>
-                        <a:rPr kumimoji="1" lang="ja-JP" altLang="en-US" dirty="0"/>
+                        <a:rPr kumimoji="1" lang="ja-JP" altLang="en-US"/>
                         <a:t>組み込みソフト開発、アプリソフト開発、基板設計。</a:t>
                       </a:r>
-                      <a:endParaRPr kumimoji="1" lang="en-US" altLang="ja-JP" dirty="0"/>
+                      <a:endParaRPr kumimoji="1" lang="en-US" altLang="ja-JP"/>
                     </a:p>
                     <a:p>
                       <a:r>
-                        <a:rPr kumimoji="1" lang="ja-JP" altLang="en-US" dirty="0"/>
+                        <a:rPr kumimoji="1" lang="ja-JP" altLang="en-US"/>
                         <a:t>開発部、製造部のマネージメント。</a:t>
                       </a:r>
                     </a:p>
@@ -7667,7 +7814,7 @@
                     <a:lstStyle/>
                     <a:p>
                       <a:r>
-                        <a:rPr kumimoji="1" lang="ja-JP" altLang="en-US" dirty="0"/>
+                        <a:rPr kumimoji="1" lang="ja-JP" altLang="en-US"/>
                         <a:t>詳細</a:t>
                       </a:r>
                     </a:p>
@@ -7697,7 +7844,7 @@
                         <a:defRPr/>
                       </a:pPr>
                       <a:r>
-                        <a:rPr kumimoji="1" lang="en-US" altLang="ja-JP" sz="1350" kern="1200" dirty="0">
+                        <a:rPr kumimoji="1" lang="en-US" altLang="ja-JP" sz="1350" kern="1200">
                           <a:solidFill>
                             <a:schemeClr val="dk1"/>
                           </a:solidFill>
@@ -7709,7 +7856,7 @@
                         <a:t>Bluetooth</a:t>
                       </a:r>
                       <a:r>
-                        <a:rPr kumimoji="1" lang="ja-JP" altLang="ja-JP" sz="1350" kern="1200" dirty="0">
+                        <a:rPr kumimoji="1" lang="ja-JP" altLang="ja-JP" sz="1350" kern="1200">
                           <a:solidFill>
                             <a:schemeClr val="dk1"/>
                           </a:solidFill>
@@ -7721,7 +7868,7 @@
                         <a:t>を使った無線式加工径計測装置を</a:t>
                       </a:r>
                       <a:r>
-                        <a:rPr kumimoji="1" lang="en-US" altLang="ja-JP" sz="1350" kern="1200" dirty="0">
+                        <a:rPr kumimoji="1" lang="en-US" altLang="ja-JP" sz="1350" kern="1200">
                           <a:solidFill>
                             <a:schemeClr val="dk1"/>
                           </a:solidFill>
@@ -7733,7 +7880,7 @@
                         <a:t>2</a:t>
                       </a:r>
                       <a:r>
-                        <a:rPr kumimoji="1" lang="ja-JP" altLang="ja-JP" sz="1350" kern="1200" dirty="0">
+                        <a:rPr kumimoji="1" lang="ja-JP" altLang="ja-JP" sz="1350" kern="1200">
                           <a:solidFill>
                             <a:schemeClr val="dk1"/>
                           </a:solidFill>
@@ -7745,7 +7892,7 @@
                         <a:t>年掛けて製品化。</a:t>
                       </a:r>
                       <a:r>
-                        <a:rPr kumimoji="1" lang="en-US" altLang="ja-JP" sz="1350" kern="1200" dirty="0">
+                        <a:rPr kumimoji="1" lang="en-US" altLang="ja-JP" sz="1350" kern="1200">
                           <a:solidFill>
                             <a:schemeClr val="dk1"/>
                           </a:solidFill>
@@ -7757,7 +7904,7 @@
                         <a:t>(NXP</a:t>
                       </a:r>
                       <a:r>
-                        <a:rPr kumimoji="1" lang="ja-JP" altLang="en-US" sz="1350" kern="1200" dirty="0">
+                        <a:rPr kumimoji="1" lang="ja-JP" altLang="en-US" sz="1350" kern="1200">
                           <a:solidFill>
                             <a:schemeClr val="dk1"/>
                           </a:solidFill>
@@ -7769,7 +7916,7 @@
                         <a:t>、</a:t>
                       </a:r>
                       <a:r>
-                        <a:rPr kumimoji="1" lang="en-US" altLang="ja-JP" sz="1350" kern="1200" dirty="0" err="1">
+                        <a:rPr kumimoji="1" lang="en-US" altLang="ja-JP" sz="1350" kern="1200" err="1">
                           <a:solidFill>
                             <a:schemeClr val="dk1"/>
                           </a:solidFill>
@@ -7781,7 +7928,7 @@
                         <a:t>atmel</a:t>
                       </a:r>
                       <a:r>
-                        <a:rPr kumimoji="1" lang="ja-JP" altLang="en-US" sz="1350" kern="1200" dirty="0">
+                        <a:rPr kumimoji="1" lang="ja-JP" altLang="en-US" sz="1350" kern="1200">
                           <a:solidFill>
                             <a:schemeClr val="dk1"/>
                           </a:solidFill>
@@ -7793,7 +7940,7 @@
                         <a:t>マイコン、</a:t>
                       </a:r>
                       <a:r>
-                        <a:rPr kumimoji="1" lang="en-US" altLang="ja-JP" sz="1350" kern="1200" dirty="0">
+                        <a:rPr kumimoji="1" lang="en-US" altLang="ja-JP" sz="1350" kern="1200">
                           <a:solidFill>
                             <a:schemeClr val="dk1"/>
                           </a:solidFill>
@@ -7805,7 +7952,7 @@
                         <a:t>VB</a:t>
                       </a:r>
                       <a:r>
-                        <a:rPr kumimoji="1" lang="ja-JP" altLang="en-US" sz="1350" kern="1200" dirty="0">
+                        <a:rPr kumimoji="1" lang="ja-JP" altLang="en-US" sz="1350" kern="1200">
                           <a:solidFill>
                             <a:schemeClr val="dk1"/>
                           </a:solidFill>
@@ -7817,7 +7964,7 @@
                         <a:t>、</a:t>
                       </a:r>
                       <a:r>
-                        <a:rPr kumimoji="1" lang="en-US" altLang="ja-JP" sz="1350" kern="1200" dirty="0">
+                        <a:rPr kumimoji="1" lang="en-US" altLang="ja-JP" sz="1350" kern="1200">
                           <a:solidFill>
                             <a:schemeClr val="dk1"/>
                           </a:solidFill>
@@ -7829,7 +7976,7 @@
                         <a:t>C#</a:t>
                       </a:r>
                       <a:r>
-                        <a:rPr kumimoji="1" lang="ja-JP" altLang="en-US" sz="1350" kern="1200" dirty="0">
+                        <a:rPr kumimoji="1" lang="ja-JP" altLang="en-US" sz="1350" kern="1200">
                           <a:solidFill>
                             <a:schemeClr val="dk1"/>
                           </a:solidFill>
@@ -7840,7 +7987,7 @@
                         </a:rPr>
                         <a:t>）</a:t>
                       </a:r>
-                      <a:endParaRPr kumimoji="1" lang="en-US" altLang="ja-JP" sz="1350" kern="1200" dirty="0">
+                      <a:endParaRPr kumimoji="1" lang="en-US" altLang="ja-JP" sz="1350" kern="1200">
                         <a:solidFill>
                           <a:schemeClr val="dk1"/>
                         </a:solidFill>
@@ -7856,7 +8003,7 @@
                         <a:buChar char="Ø"/>
                       </a:pPr>
                       <a:r>
-                        <a:rPr kumimoji="1" lang="ja-JP" altLang="ja-JP" sz="1350" kern="1200" dirty="0">
+                        <a:rPr kumimoji="1" lang="ja-JP" altLang="ja-JP" sz="1350" kern="1200">
                           <a:solidFill>
                             <a:schemeClr val="dk1"/>
                           </a:solidFill>
@@ -7868,7 +8015,7 @@
                         <a:t>加速度センサーによる加工状況分析装置を</a:t>
                       </a:r>
                       <a:r>
-                        <a:rPr kumimoji="1" lang="en-US" altLang="ja-JP" sz="1350" kern="1200" dirty="0">
+                        <a:rPr kumimoji="1" lang="en-US" altLang="ja-JP" sz="1350" kern="1200">
                           <a:solidFill>
                             <a:schemeClr val="dk1"/>
                           </a:solidFill>
@@ -7880,7 +8027,7 @@
                         <a:t>MATLAB</a:t>
                       </a:r>
                       <a:r>
-                        <a:rPr kumimoji="1" lang="ja-JP" altLang="ja-JP" sz="1350" kern="1200" dirty="0">
+                        <a:rPr kumimoji="1" lang="ja-JP" altLang="ja-JP" sz="1350" kern="1200">
                           <a:solidFill>
                             <a:schemeClr val="dk1"/>
                           </a:solidFill>
@@ -7892,7 +8039,7 @@
                         <a:t>を使って開発</a:t>
                       </a:r>
                       <a:r>
-                        <a:rPr kumimoji="1" lang="ja-JP" altLang="en-US" sz="1350" kern="1200" dirty="0">
+                        <a:rPr kumimoji="1" lang="ja-JP" altLang="en-US" sz="1350" kern="1200">
                           <a:solidFill>
                             <a:schemeClr val="dk1"/>
                           </a:solidFill>
@@ -7903,7 +8050,7 @@
                         </a:rPr>
                         <a:t>。</a:t>
                       </a:r>
-                      <a:endParaRPr kumimoji="1" lang="en-US" altLang="ja-JP" sz="1350" kern="1200" dirty="0">
+                      <a:endParaRPr kumimoji="1" lang="en-US" altLang="ja-JP" sz="1350" kern="1200">
                         <a:solidFill>
                           <a:schemeClr val="dk1"/>
                         </a:solidFill>
@@ -7919,7 +8066,7 @@
                         <a:buChar char="Ø"/>
                       </a:pPr>
                       <a:r>
-                        <a:rPr kumimoji="1" lang="en-US" altLang="ja-JP" sz="1350" kern="1200" dirty="0">
+                        <a:rPr kumimoji="1" lang="en-US" altLang="ja-JP" sz="1350" kern="1200">
                           <a:solidFill>
                             <a:schemeClr val="dk1"/>
                           </a:solidFill>
@@ -7931,7 +8078,7 @@
                         <a:t>Bluetooth</a:t>
                       </a:r>
                       <a:r>
-                        <a:rPr kumimoji="1" lang="ja-JP" altLang="ja-JP" sz="1350" kern="1200" dirty="0">
+                        <a:rPr kumimoji="1" lang="ja-JP" altLang="ja-JP" sz="1350" kern="1200">
                           <a:solidFill>
                             <a:schemeClr val="dk1"/>
                           </a:solidFill>
@@ -7943,7 +8090,7 @@
                         <a:t>制御＆</a:t>
                       </a:r>
                       <a:r>
-                        <a:rPr kumimoji="1" lang="en-US" altLang="ja-JP" sz="1350" kern="1200" dirty="0">
+                        <a:rPr kumimoji="1" lang="en-US" altLang="ja-JP" sz="1350" kern="1200">
                           <a:solidFill>
                             <a:schemeClr val="dk1"/>
                           </a:solidFill>
@@ -7955,7 +8102,7 @@
                         <a:t>WPT</a:t>
                       </a:r>
                       <a:r>
-                        <a:rPr kumimoji="1" lang="ja-JP" altLang="ja-JP" sz="1350" kern="1200" dirty="0">
+                        <a:rPr kumimoji="1" lang="ja-JP" altLang="ja-JP" sz="1350" kern="1200">
                           <a:solidFill>
                             <a:schemeClr val="dk1"/>
                           </a:solidFill>
@@ -7967,7 +8114,7 @@
                         <a:t>充電方式の</a:t>
                       </a:r>
                       <a:r>
-                        <a:rPr kumimoji="1" lang="en-US" altLang="ja-JP" sz="1350" kern="1200" dirty="0">
+                        <a:rPr kumimoji="1" lang="en-US" altLang="ja-JP" sz="1350" kern="1200">
                           <a:solidFill>
                             <a:schemeClr val="dk1"/>
                           </a:solidFill>
@@ -7979,7 +8126,7 @@
                         <a:t>DC</a:t>
                       </a:r>
                       <a:r>
-                        <a:rPr kumimoji="1" lang="ja-JP" altLang="ja-JP" sz="1350" kern="1200" dirty="0">
+                        <a:rPr kumimoji="1" lang="ja-JP" altLang="ja-JP" sz="1350" kern="1200">
                           <a:solidFill>
                             <a:schemeClr val="dk1"/>
                           </a:solidFill>
@@ -7991,7 +8138,7 @@
                         <a:t>サーボ刃先制御装置、ワイヤレス電力電送装置（</a:t>
                       </a:r>
                       <a:r>
-                        <a:rPr kumimoji="1" lang="en-US" altLang="ja-JP" sz="1350" kern="1200" dirty="0">
+                        <a:rPr kumimoji="1" lang="en-US" altLang="ja-JP" sz="1350" kern="1200">
                           <a:solidFill>
                             <a:schemeClr val="dk1"/>
                           </a:solidFill>
@@ -8003,7 +8150,7 @@
                         <a:t>WPT</a:t>
                       </a:r>
                       <a:r>
-                        <a:rPr kumimoji="1" lang="ja-JP" altLang="ja-JP" sz="1350" kern="1200" dirty="0">
+                        <a:rPr kumimoji="1" lang="ja-JP" altLang="ja-JP" sz="1350" kern="1200">
                           <a:solidFill>
                             <a:schemeClr val="dk1"/>
                           </a:solidFill>
@@ -8015,7 +8162,7 @@
                         <a:t>）の開発</a:t>
                       </a:r>
                       <a:r>
-                        <a:rPr kumimoji="1" lang="ja-JP" altLang="en-US" sz="1350" kern="1200" dirty="0">
+                        <a:rPr kumimoji="1" lang="ja-JP" altLang="en-US" sz="1350" kern="1200">
                           <a:solidFill>
                             <a:schemeClr val="dk1"/>
                           </a:solidFill>
@@ -8026,7 +8173,7 @@
                         </a:rPr>
                         <a:t>。</a:t>
                       </a:r>
-                      <a:endParaRPr kumimoji="1" lang="ja-JP" altLang="en-US" dirty="0"/>
+                      <a:endParaRPr kumimoji="1" lang="ja-JP" altLang="en-US"/>
                     </a:p>
                   </a:txBody>
                   <a:tcPr/>
@@ -8406,14 +8553,14 @@
           <a:p>
             <a:pPr algn="ctr"/>
             <a:r>
-              <a:rPr kumimoji="1" lang="en-US" altLang="ja-JP" dirty="0">
+              <a:rPr kumimoji="1" lang="en-US" altLang="ja-JP">
                 <a:solidFill>
                   <a:srgbClr val="FF0000"/>
                 </a:solidFill>
               </a:rPr>
               <a:t>Confidential</a:t>
             </a:r>
-            <a:endParaRPr kumimoji="1" lang="ja-JP" altLang="en-US" dirty="0">
+            <a:endParaRPr kumimoji="1" lang="ja-JP" altLang="en-US">
               <a:solidFill>
                 <a:srgbClr val="FF0000"/>
               </a:solidFill>
@@ -8473,10 +8620,10 @@
           <a:lstStyle/>
           <a:p>
             <a:r>
-              <a:rPr lang="ja-JP" altLang="en-US" sz="3200" dirty="0"/>
+              <a:rPr lang="ja-JP" altLang="en-US" sz="3200"/>
               <a:t>１．業務経歴③</a:t>
             </a:r>
-            <a:endParaRPr kumimoji="1" lang="ja-JP" altLang="en-US" dirty="0"/>
+            <a:endParaRPr kumimoji="1" lang="ja-JP" altLang="en-US"/>
           </a:p>
         </p:txBody>
       </p:sp>
@@ -8562,7 +8709,7 @@
                     <a:lstStyle/>
                     <a:p>
                       <a:r>
-                        <a:rPr kumimoji="1" lang="en-US" altLang="ja-JP" dirty="0">
+                        <a:rPr kumimoji="1" lang="en-US" altLang="ja-JP">
                           <a:solidFill>
                             <a:schemeClr val="tx1"/>
                           </a:solidFill>
@@ -8570,7 +8717,7 @@
                         <a:t>3. M</a:t>
                       </a:r>
                       <a:r>
-                        <a:rPr kumimoji="1" lang="ja-JP" altLang="en-US" dirty="0">
+                        <a:rPr kumimoji="1" lang="ja-JP" altLang="en-US">
                           <a:solidFill>
                             <a:schemeClr val="tx1"/>
                           </a:solidFill>
@@ -8588,7 +8735,7 @@
                     <a:bodyPr/>
                     <a:lstStyle/>
                     <a:p>
-                      <a:endParaRPr kumimoji="1" lang="ja-JP" altLang="en-US" dirty="0"/>
+                      <a:endParaRPr kumimoji="1" lang="ja-JP" altLang="en-US"/>
                     </a:p>
                   </a:txBody>
                   <a:tcPr>
@@ -8608,7 +8755,7 @@
                     <a:lstStyle/>
                     <a:p>
                       <a:r>
-                        <a:rPr kumimoji="1" lang="ja-JP" altLang="en-US" dirty="0"/>
+                        <a:rPr kumimoji="1" lang="ja-JP" altLang="en-US"/>
                         <a:t>設計開発品</a:t>
                       </a:r>
                     </a:p>
@@ -8638,10 +8785,10 @@
                         <a:defRPr/>
                       </a:pPr>
                       <a:r>
-                        <a:rPr lang="ja-JP" altLang="en-US" sz="1350" dirty="0"/>
+                        <a:rPr lang="ja-JP" altLang="en-US" sz="1350"/>
                         <a:t>新ヘッド搭載のプリンタ新機種開発。</a:t>
                       </a:r>
-                      <a:endParaRPr lang="en-US" altLang="ja-JP" sz="1350" dirty="0"/>
+                      <a:endParaRPr lang="en-US" altLang="ja-JP" sz="1350"/>
                     </a:p>
                     <a:p>
                       <a:pPr marL="0" marR="0" lvl="0" indent="0" algn="l" defTabSz="685800" rtl="0" eaLnBrk="1" fontAlgn="auto" latinLnBrk="0" hangingPunct="1">
@@ -8662,10 +8809,10 @@
                         <a:defRPr/>
                       </a:pPr>
                       <a:r>
-                        <a:rPr lang="ja-JP" altLang="en-US" sz="1350" dirty="0"/>
+                        <a:rPr lang="ja-JP" altLang="en-US" sz="1350"/>
                         <a:t>重量巻取り装置開発。</a:t>
                       </a:r>
-                      <a:endParaRPr lang="en-US" altLang="ja-JP" sz="1350" dirty="0"/>
+                      <a:endParaRPr lang="en-US" altLang="ja-JP" sz="1350"/>
                     </a:p>
                     <a:p>
                       <a:pPr marL="0" marR="0" lvl="0" indent="0" algn="l" defTabSz="685800" rtl="0" eaLnBrk="1" fontAlgn="auto" latinLnBrk="0" hangingPunct="1">
@@ -8686,18 +8833,18 @@
                         <a:defRPr/>
                       </a:pPr>
                       <a:r>
-                        <a:rPr lang="ja-JP" altLang="en-US" sz="1350" dirty="0"/>
+                        <a:rPr lang="ja-JP" altLang="en-US" sz="1350"/>
                         <a:t>新</a:t>
                       </a:r>
                       <a:r>
-                        <a:rPr lang="en-US" altLang="ja-JP" sz="1350" dirty="0"/>
+                        <a:rPr lang="en-US" altLang="ja-JP" sz="1350"/>
                         <a:t>CPU</a:t>
                       </a:r>
                       <a:r>
-                        <a:rPr lang="ja-JP" altLang="en-US" sz="1350" dirty="0"/>
+                        <a:rPr lang="ja-JP" altLang="en-US" sz="1350"/>
                         <a:t>を搭載した次世代プラットフォーム開発。</a:t>
                       </a:r>
-                      <a:endParaRPr lang="en-US" altLang="ja-JP" sz="1350" dirty="0"/>
+                      <a:endParaRPr lang="en-US" altLang="ja-JP" sz="1350"/>
                     </a:p>
                   </a:txBody>
                   <a:tcPr/>
@@ -8715,7 +8862,7 @@
                     <a:lstStyle/>
                     <a:p>
                       <a:r>
-                        <a:rPr kumimoji="1" lang="ja-JP" altLang="en-US" dirty="0"/>
+                        <a:rPr kumimoji="1" lang="ja-JP" altLang="en-US"/>
                         <a:t>主業務</a:t>
                       </a:r>
                     </a:p>
@@ -8728,39 +8875,39 @@
                     <a:lstStyle/>
                     <a:p>
                       <a:r>
-                        <a:rPr kumimoji="1" lang="ja-JP" altLang="en-US" dirty="0"/>
+                        <a:rPr kumimoji="1" lang="ja-JP" altLang="en-US"/>
                         <a:t>新機種用ハード設計開発。新ヘッド基板開発。新</a:t>
                       </a:r>
                       <a:r>
-                        <a:rPr kumimoji="1" lang="en-US" altLang="ja-JP" dirty="0"/>
+                        <a:rPr kumimoji="1" lang="en-US" altLang="ja-JP"/>
                         <a:t>CPU</a:t>
                       </a:r>
                       <a:r>
-                        <a:rPr kumimoji="1" lang="ja-JP" altLang="en-US" dirty="0"/>
+                        <a:rPr kumimoji="1" lang="ja-JP" altLang="en-US"/>
                         <a:t>や</a:t>
                       </a:r>
                       <a:r>
-                        <a:rPr kumimoji="1" lang="en-US" altLang="ja-JP" dirty="0"/>
+                        <a:rPr kumimoji="1" lang="en-US" altLang="ja-JP"/>
                         <a:t>ARM</a:t>
                       </a:r>
                       <a:r>
-                        <a:rPr kumimoji="1" lang="ja-JP" altLang="en-US" dirty="0"/>
+                        <a:rPr kumimoji="1" lang="ja-JP" altLang="en-US"/>
                         <a:t>内蔵</a:t>
                       </a:r>
                       <a:r>
-                        <a:rPr kumimoji="1" lang="en-US" altLang="ja-JP" dirty="0"/>
+                        <a:rPr kumimoji="1" lang="en-US" altLang="ja-JP"/>
                         <a:t>FPGA</a:t>
                       </a:r>
                       <a:r>
-                        <a:rPr kumimoji="1" lang="ja-JP" altLang="en-US" dirty="0"/>
+                        <a:rPr kumimoji="1" lang="ja-JP" altLang="en-US"/>
                         <a:t>検討。</a:t>
                       </a:r>
                       <a:r>
-                        <a:rPr kumimoji="1" lang="en-US" altLang="ja-JP" dirty="0"/>
+                        <a:rPr kumimoji="1" lang="en-US" altLang="ja-JP"/>
                         <a:t>VHDL</a:t>
                       </a:r>
                       <a:r>
-                        <a:rPr kumimoji="1" lang="ja-JP" altLang="en-US" dirty="0"/>
+                        <a:rPr kumimoji="1" lang="ja-JP" altLang="en-US"/>
                         <a:t>設計のアルテラ信号処理エンジン検証。</a:t>
                       </a:r>
                     </a:p>
@@ -8780,7 +8927,7 @@
                     <a:lstStyle/>
                     <a:p>
                       <a:r>
-                        <a:rPr kumimoji="1" lang="ja-JP" altLang="en-US" dirty="0"/>
+                        <a:rPr kumimoji="1" lang="ja-JP" altLang="en-US"/>
                         <a:t>詳細</a:t>
                       </a:r>
                     </a:p>
@@ -8810,18 +8957,18 @@
                         <a:defRPr/>
                       </a:pPr>
                       <a:r>
-                        <a:rPr kumimoji="1" lang="ja-JP" altLang="en-US" dirty="0"/>
+                        <a:rPr kumimoji="1" lang="ja-JP" altLang="en-US"/>
                         <a:t>基板設計サポート（</a:t>
                       </a:r>
                       <a:r>
-                        <a:rPr kumimoji="1" lang="en-US" altLang="ja-JP" dirty="0"/>
+                        <a:rPr kumimoji="1" lang="en-US" altLang="ja-JP"/>
                         <a:t>OrCAD</a:t>
                       </a:r>
                       <a:r>
-                        <a:rPr kumimoji="1" lang="ja-JP" altLang="en-US" dirty="0"/>
+                        <a:rPr kumimoji="1" lang="ja-JP" altLang="en-US"/>
                         <a:t>）。</a:t>
                       </a:r>
-                      <a:endParaRPr kumimoji="1" lang="en-US" altLang="ja-JP" dirty="0"/>
+                      <a:endParaRPr kumimoji="1" lang="en-US" altLang="ja-JP"/>
                     </a:p>
                     <a:p>
                       <a:pPr marL="285750" marR="0" lvl="0" indent="-285750" algn="l" defTabSz="685800" rtl="0" eaLnBrk="1" fontAlgn="auto" latinLnBrk="0" hangingPunct="1">
@@ -8842,18 +8989,18 @@
                         <a:defRPr/>
                       </a:pPr>
                       <a:r>
-                        <a:rPr kumimoji="1" lang="ja-JP" altLang="en-US" dirty="0"/>
+                        <a:rPr kumimoji="1" lang="ja-JP" altLang="en-US"/>
                         <a:t>アルテラ</a:t>
                       </a:r>
                       <a:r>
-                        <a:rPr kumimoji="1" lang="en-US" altLang="ja-JP" dirty="0"/>
+                        <a:rPr kumimoji="1" lang="en-US" altLang="ja-JP"/>
                         <a:t>Cyclone10</a:t>
                       </a:r>
                       <a:r>
-                        <a:rPr kumimoji="1" lang="ja-JP" altLang="en-US" dirty="0"/>
+                        <a:rPr kumimoji="1" lang="ja-JP" altLang="en-US"/>
                         <a:t>への新エンジン設計サポート。</a:t>
                       </a:r>
-                      <a:endParaRPr kumimoji="1" lang="en-US" altLang="ja-JP" dirty="0"/>
+                      <a:endParaRPr kumimoji="1" lang="en-US" altLang="ja-JP"/>
                     </a:p>
                     <a:p>
                       <a:pPr marL="285750" marR="0" lvl="0" indent="-285750" algn="l" defTabSz="685800" rtl="0" eaLnBrk="1" fontAlgn="auto" latinLnBrk="0" hangingPunct="1">
@@ -8874,26 +9021,26 @@
                         <a:defRPr/>
                       </a:pPr>
                       <a:r>
-                        <a:rPr kumimoji="1" lang="en-US" altLang="ja-JP" dirty="0" err="1"/>
+                        <a:rPr kumimoji="1" lang="en-US" altLang="ja-JP" err="1"/>
                         <a:t>modelsim</a:t>
                       </a:r>
                       <a:r>
-                        <a:rPr kumimoji="1" lang="ja-JP" altLang="en-US" dirty="0"/>
+                        <a:rPr kumimoji="1" lang="ja-JP" altLang="en-US"/>
                         <a:t>、</a:t>
                       </a:r>
                       <a:r>
-                        <a:rPr kumimoji="1" lang="en-US" altLang="ja-JP" dirty="0" err="1"/>
+                        <a:rPr kumimoji="1" lang="en-US" altLang="ja-JP" err="1"/>
                         <a:t>quartus</a:t>
                       </a:r>
                       <a:r>
-                        <a:rPr kumimoji="1" lang="en-US" altLang="ja-JP" dirty="0"/>
+                        <a:rPr kumimoji="1" lang="en-US" altLang="ja-JP"/>
                         <a:t> prime</a:t>
                       </a:r>
                       <a:r>
-                        <a:rPr kumimoji="1" lang="ja-JP" altLang="en-US" dirty="0"/>
+                        <a:rPr kumimoji="1" lang="ja-JP" altLang="en-US"/>
                         <a:t>を使った環境で開発。</a:t>
                       </a:r>
-                      <a:endParaRPr kumimoji="1" lang="en-US" altLang="ja-JP" dirty="0"/>
+                      <a:endParaRPr kumimoji="1" lang="en-US" altLang="ja-JP"/>
                     </a:p>
                     <a:p>
                       <a:pPr marL="285750" marR="0" lvl="0" indent="-285750" algn="l" defTabSz="685800" rtl="0" eaLnBrk="1" fontAlgn="auto" latinLnBrk="0" hangingPunct="1">
@@ -8914,7 +9061,7 @@
                         <a:defRPr/>
                       </a:pPr>
                       <a:r>
-                        <a:rPr kumimoji="1" lang="ja-JP" altLang="en-US" dirty="0">
+                        <a:rPr kumimoji="1" lang="ja-JP" altLang="en-US">
                           <a:solidFill>
                             <a:srgbClr val="FF0000"/>
                           </a:solidFill>
@@ -8922,10 +9069,10 @@
                         <a:t>外注した新エンジンの致命的な問題点を解消して、生産に寄与</a:t>
                       </a:r>
                       <a:r>
-                        <a:rPr kumimoji="1" lang="ja-JP" altLang="en-US" dirty="0"/>
+                        <a:rPr kumimoji="1" lang="ja-JP" altLang="en-US"/>
                         <a:t>。</a:t>
                       </a:r>
-                      <a:endParaRPr kumimoji="1" lang="en-US" altLang="ja-JP" dirty="0"/>
+                      <a:endParaRPr kumimoji="1" lang="en-US" altLang="ja-JP"/>
                     </a:p>
                     <a:p>
                       <a:pPr marL="285750" marR="0" lvl="0" indent="-285750" algn="l" defTabSz="685800" rtl="0" eaLnBrk="1" fontAlgn="auto" latinLnBrk="0" hangingPunct="1">
@@ -8946,18 +9093,18 @@
                         <a:defRPr/>
                       </a:pPr>
                       <a:r>
-                        <a:rPr kumimoji="1" lang="ja-JP" altLang="en-US" dirty="0"/>
+                        <a:rPr kumimoji="1" lang="ja-JP" altLang="en-US"/>
                         <a:t>低コストな新ヘッドの回路を</a:t>
                       </a:r>
                       <a:r>
-                        <a:rPr kumimoji="1" lang="en-US" altLang="ja-JP" dirty="0"/>
+                        <a:rPr kumimoji="1" lang="en-US" altLang="ja-JP"/>
                         <a:t>fix</a:t>
                       </a:r>
                       <a:r>
-                        <a:rPr kumimoji="1" lang="ja-JP" altLang="en-US" dirty="0"/>
+                        <a:rPr kumimoji="1" lang="ja-JP" altLang="en-US"/>
                         <a:t>するための検討検証の実施と生産寄与。</a:t>
                       </a:r>
-                      <a:endParaRPr kumimoji="1" lang="en-US" altLang="ja-JP" dirty="0"/>
+                      <a:endParaRPr kumimoji="1" lang="en-US" altLang="ja-JP"/>
                     </a:p>
                     <a:p>
                       <a:pPr marL="285750" marR="0" lvl="0" indent="-285750" algn="l" defTabSz="685800" rtl="0" eaLnBrk="1" fontAlgn="auto" latinLnBrk="0" hangingPunct="1">
@@ -8978,7 +9125,7 @@
                         <a:defRPr/>
                       </a:pPr>
                       <a:r>
-                        <a:rPr kumimoji="1" lang="ja-JP" altLang="en-US" dirty="0">
+                        <a:rPr kumimoji="1" lang="ja-JP" altLang="en-US">
                           <a:solidFill>
                             <a:srgbClr val="FF0000"/>
                           </a:solidFill>
@@ -8986,10 +9133,10 @@
                         <a:t>新ヘッドのクロストーク対策の検討実施</a:t>
                       </a:r>
                       <a:r>
-                        <a:rPr kumimoji="1" lang="ja-JP" altLang="en-US" dirty="0"/>
+                        <a:rPr kumimoji="1" lang="ja-JP" altLang="en-US"/>
                         <a:t>。</a:t>
                       </a:r>
-                      <a:endParaRPr kumimoji="1" lang="en-US" altLang="ja-JP" dirty="0"/>
+                      <a:endParaRPr kumimoji="1" lang="en-US" altLang="ja-JP"/>
                     </a:p>
                     <a:p>
                       <a:pPr marL="285750" marR="0" lvl="0" indent="-285750" algn="l" defTabSz="685800" rtl="0" eaLnBrk="1" fontAlgn="auto" latinLnBrk="0" hangingPunct="1">
@@ -9010,18 +9157,18 @@
                         <a:defRPr/>
                       </a:pPr>
                       <a:r>
-                        <a:rPr kumimoji="1" lang="ja-JP" altLang="en-US" dirty="0"/>
+                        <a:rPr kumimoji="1" lang="ja-JP" altLang="en-US"/>
                         <a:t>現行の重量巻取りの問題点を</a:t>
                       </a:r>
                       <a:r>
-                        <a:rPr kumimoji="1" lang="en-US" altLang="ja-JP" dirty="0"/>
+                        <a:rPr kumimoji="1" lang="en-US" altLang="ja-JP"/>
                         <a:t>FPGA</a:t>
                       </a:r>
                       <a:r>
-                        <a:rPr kumimoji="1" lang="ja-JP" altLang="en-US" dirty="0"/>
+                        <a:rPr kumimoji="1" lang="ja-JP" altLang="en-US"/>
                         <a:t>で解消して、生産に寄与。</a:t>
                       </a:r>
-                      <a:endParaRPr kumimoji="1" lang="en-US" altLang="ja-JP" dirty="0"/>
+                      <a:endParaRPr kumimoji="1" lang="en-US" altLang="ja-JP"/>
                     </a:p>
                   </a:txBody>
                   <a:tcPr/>
@@ -9140,14 +9287,14 @@
           <a:p>
             <a:pPr algn="ctr"/>
             <a:r>
-              <a:rPr kumimoji="1" lang="en-US" altLang="ja-JP" dirty="0">
+              <a:rPr kumimoji="1" lang="en-US" altLang="ja-JP">
                 <a:solidFill>
                   <a:srgbClr val="FF0000"/>
                 </a:solidFill>
               </a:rPr>
               <a:t>Confidential</a:t>
             </a:r>
-            <a:endParaRPr kumimoji="1" lang="ja-JP" altLang="en-US" dirty="0">
+            <a:endParaRPr kumimoji="1" lang="ja-JP" altLang="en-US">
               <a:solidFill>
                 <a:srgbClr val="FF0000"/>
               </a:solidFill>
@@ -9207,10 +9354,10 @@
           <a:lstStyle/>
           <a:p>
             <a:r>
-              <a:rPr lang="ja-JP" altLang="en-US" sz="3600" dirty="0"/>
+              <a:rPr lang="ja-JP" altLang="en-US" sz="3600"/>
               <a:t>１．業務経歴④</a:t>
             </a:r>
-            <a:endParaRPr kumimoji="1" lang="ja-JP" altLang="en-US" dirty="0"/>
+            <a:endParaRPr kumimoji="1" lang="ja-JP" altLang="en-US"/>
           </a:p>
         </p:txBody>
       </p:sp>
@@ -9296,7 +9443,7 @@
                     <a:lstStyle/>
                     <a:p>
                       <a:r>
-                        <a:rPr kumimoji="1" lang="en-US" altLang="ja-JP" dirty="0">
+                        <a:rPr kumimoji="1" lang="en-US" altLang="ja-JP">
                           <a:solidFill>
                             <a:schemeClr val="tx1"/>
                           </a:solidFill>
@@ -9304,7 +9451,7 @@
                         <a:t>4. </a:t>
                       </a:r>
                       <a:r>
-                        <a:rPr kumimoji="1" lang="ja-JP" altLang="en-US" dirty="0">
+                        <a:rPr kumimoji="1" lang="ja-JP" altLang="en-US">
                           <a:solidFill>
                             <a:schemeClr val="tx1"/>
                           </a:solidFill>
@@ -9322,7 +9469,7 @@
                     <a:bodyPr/>
                     <a:lstStyle/>
                     <a:p>
-                      <a:endParaRPr kumimoji="1" lang="ja-JP" altLang="en-US" dirty="0"/>
+                      <a:endParaRPr kumimoji="1" lang="ja-JP" altLang="en-US"/>
                     </a:p>
                   </a:txBody>
                   <a:tcPr>
@@ -9342,7 +9489,7 @@
                     <a:lstStyle/>
                     <a:p>
                       <a:r>
-                        <a:rPr kumimoji="1" lang="ja-JP" altLang="en-US" dirty="0"/>
+                        <a:rPr kumimoji="1" lang="ja-JP" altLang="en-US"/>
                         <a:t>設計開発品</a:t>
                       </a:r>
                     </a:p>
@@ -9372,14 +9519,14 @@
                         <a:defRPr/>
                       </a:pPr>
                       <a:r>
-                        <a:rPr lang="en-US" altLang="ja-JP" sz="1350" dirty="0"/>
+                        <a:rPr lang="en-US" altLang="ja-JP" sz="1350"/>
                         <a:t>A</a:t>
                       </a:r>
                       <a:r>
-                        <a:rPr lang="ja-JP" altLang="en-US" sz="1350" dirty="0"/>
+                        <a:rPr lang="ja-JP" altLang="en-US" sz="1350"/>
                         <a:t>社向け荷重試験機開発</a:t>
                       </a:r>
-                      <a:endParaRPr lang="en-US" altLang="ja-JP" sz="1350" dirty="0"/>
+                      <a:endParaRPr lang="en-US" altLang="ja-JP" sz="1350"/>
                     </a:p>
                   </a:txBody>
                   <a:tcPr/>
@@ -9397,7 +9544,7 @@
                     <a:lstStyle/>
                     <a:p>
                       <a:r>
-                        <a:rPr kumimoji="1" lang="ja-JP" altLang="en-US" dirty="0"/>
+                        <a:rPr kumimoji="1" lang="ja-JP" altLang="en-US"/>
                         <a:t>主業務</a:t>
                       </a:r>
                     </a:p>
@@ -9410,19 +9557,19 @@
                     <a:lstStyle/>
                     <a:p>
                       <a:r>
-                        <a:rPr kumimoji="1" lang="en-US" altLang="ja-JP" dirty="0"/>
+                        <a:rPr kumimoji="1" lang="en-US" altLang="ja-JP"/>
                         <a:t>AC</a:t>
                       </a:r>
                       <a:r>
-                        <a:rPr kumimoji="1" lang="ja-JP" altLang="en-US" dirty="0"/>
+                        <a:rPr kumimoji="1" lang="ja-JP" altLang="en-US"/>
                         <a:t>サーボモータを制御するマイコンハード製作し、</a:t>
                       </a:r>
                       <a:r>
-                        <a:rPr kumimoji="1" lang="en-US" altLang="ja-JP" dirty="0"/>
+                        <a:rPr kumimoji="1" lang="en-US" altLang="ja-JP"/>
                         <a:t>PC</a:t>
                       </a:r>
                       <a:r>
-                        <a:rPr kumimoji="1" lang="ja-JP" altLang="en-US" dirty="0"/>
+                        <a:rPr kumimoji="1" lang="ja-JP" altLang="en-US"/>
                         <a:t>制御システムを製品納入。</a:t>
                       </a:r>
                     </a:p>
@@ -9442,7 +9589,7 @@
                     <a:lstStyle/>
                     <a:p>
                       <a:r>
-                        <a:rPr kumimoji="1" lang="ja-JP" altLang="en-US" dirty="0"/>
+                        <a:rPr kumimoji="1" lang="ja-JP" altLang="en-US"/>
                         <a:t>詳細</a:t>
                       </a:r>
                     </a:p>
@@ -9459,7 +9606,7 @@
                         <a:buChar char="Ø"/>
                       </a:pPr>
                       <a:r>
-                        <a:rPr kumimoji="1" lang="en-US" altLang="ja-JP" sz="1350" kern="1200" dirty="0">
+                        <a:rPr kumimoji="1" lang="en-US" altLang="ja-JP" sz="1350" kern="1200">
                           <a:solidFill>
                             <a:schemeClr val="dk1"/>
                           </a:solidFill>
@@ -9471,7 +9618,7 @@
                         <a:t>AC</a:t>
                       </a:r>
                       <a:r>
-                        <a:rPr kumimoji="1" lang="ja-JP" altLang="ja-JP" sz="1350" kern="1200" dirty="0">
+                        <a:rPr kumimoji="1" lang="ja-JP" altLang="ja-JP" sz="1350" kern="1200">
                           <a:solidFill>
                             <a:schemeClr val="dk1"/>
                           </a:solidFill>
@@ -9483,7 +9630,7 @@
                         <a:t>サーボモータを制御する為の</a:t>
                       </a:r>
                       <a:r>
-                        <a:rPr kumimoji="1" lang="ja-JP" altLang="en-US" sz="1350" kern="1200" dirty="0">
+                        <a:rPr kumimoji="1" lang="ja-JP" altLang="en-US" sz="1350" kern="1200">
                           <a:solidFill>
                             <a:srgbClr val="FF0000"/>
                           </a:solidFill>
@@ -9495,7 +9642,7 @@
                         <a:t>モーションコントローラ、</a:t>
                       </a:r>
                       <a:r>
-                        <a:rPr kumimoji="1" lang="ja-JP" altLang="ja-JP" sz="1350" kern="1200" dirty="0">
+                        <a:rPr kumimoji="1" lang="ja-JP" altLang="ja-JP" sz="1350" kern="1200">
                           <a:solidFill>
                             <a:srgbClr val="FF0000"/>
                           </a:solidFill>
@@ -9507,7 +9654,7 @@
                         <a:t>サーボコントローラ</a:t>
                       </a:r>
                       <a:r>
-                        <a:rPr kumimoji="1" lang="ja-JP" altLang="en-US" sz="1350" kern="1200" dirty="0">
+                        <a:rPr kumimoji="1" lang="ja-JP" altLang="en-US" sz="1350" kern="1200">
                           <a:solidFill>
                             <a:srgbClr val="FF0000"/>
                           </a:solidFill>
@@ -9519,7 +9666,7 @@
                         <a:t>と</a:t>
                       </a:r>
                       <a:r>
-                        <a:rPr kumimoji="1" lang="en-US" altLang="ja-JP" sz="1350" kern="1200" dirty="0">
+                        <a:rPr kumimoji="1" lang="en-US" altLang="ja-JP" sz="1350" kern="1200">
                           <a:solidFill>
                             <a:srgbClr val="FF0000"/>
                           </a:solidFill>
@@ -9531,7 +9678,7 @@
                         <a:t>PLC</a:t>
                       </a:r>
                       <a:r>
-                        <a:rPr kumimoji="1" lang="ja-JP" altLang="ja-JP" sz="1350" kern="1200" dirty="0">
+                        <a:rPr kumimoji="1" lang="ja-JP" altLang="ja-JP" sz="1350" kern="1200">
                           <a:solidFill>
                             <a:srgbClr val="FF0000"/>
                           </a:solidFill>
@@ -9543,7 +9690,7 @@
                         <a:t>相当</a:t>
                       </a:r>
                       <a:r>
-                        <a:rPr kumimoji="1" lang="ja-JP" altLang="ja-JP" sz="1350" kern="1200" dirty="0">
+                        <a:rPr kumimoji="1" lang="ja-JP" altLang="ja-JP" sz="1350" kern="1200">
                           <a:solidFill>
                             <a:schemeClr val="dk1"/>
                           </a:solidFill>
@@ -9555,7 +9702,7 @@
                         <a:t>のハードウエアを、マイコン</a:t>
                       </a:r>
                       <a:r>
-                        <a:rPr kumimoji="1" lang="en-US" altLang="ja-JP" sz="1350" kern="1200" dirty="0">
+                        <a:rPr kumimoji="1" lang="en-US" altLang="ja-JP" sz="1350" kern="1200">
                           <a:solidFill>
                             <a:schemeClr val="dk1"/>
                           </a:solidFill>
@@ -9567,7 +9714,7 @@
                         <a:t>(pic32mm0256gpm64)</a:t>
                       </a:r>
                       <a:r>
-                        <a:rPr kumimoji="1" lang="ja-JP" altLang="ja-JP" sz="1350" kern="1200" dirty="0">
+                        <a:rPr kumimoji="1" lang="ja-JP" altLang="ja-JP" sz="1350" kern="1200">
                           <a:solidFill>
                             <a:schemeClr val="dk1"/>
                           </a:solidFill>
@@ -9578,7 +9725,7 @@
                         </a:rPr>
                         <a:t>と周辺部品を使って実現し、大幅な設備の低コスト化を実現。</a:t>
                       </a:r>
-                      <a:endParaRPr kumimoji="1" lang="en-US" altLang="ja-JP" sz="1350" kern="1200" dirty="0">
+                      <a:endParaRPr kumimoji="1" lang="en-US" altLang="ja-JP" sz="1350" kern="1200">
                         <a:solidFill>
                           <a:schemeClr val="dk1"/>
                         </a:solidFill>
@@ -9607,7 +9754,7 @@
                         <a:defRPr/>
                       </a:pPr>
                       <a:r>
-                        <a:rPr kumimoji="1" lang="ja-JP" altLang="ja-JP" sz="1350" kern="1200" dirty="0">
+                        <a:rPr kumimoji="1" lang="ja-JP" altLang="ja-JP" sz="1350" kern="1200">
                           <a:solidFill>
                             <a:schemeClr val="dk1"/>
                           </a:solidFill>
@@ -9638,7 +9785,7 @@
                         <a:defRPr/>
                       </a:pPr>
                       <a:r>
-                        <a:rPr kumimoji="1" lang="ja-JP" altLang="ja-JP" sz="1350" kern="1200" dirty="0">
+                        <a:rPr kumimoji="1" lang="ja-JP" altLang="ja-JP" sz="1350" kern="1200">
                           <a:solidFill>
                             <a:schemeClr val="dk1"/>
                           </a:solidFill>
@@ -9650,7 +9797,7 @@
                         <a:t>プロトタイプは、半田付けで装置を作成し、メンテナンス用に</a:t>
                       </a:r>
                       <a:r>
-                        <a:rPr kumimoji="1" lang="en-US" altLang="ja-JP" sz="1350" kern="1200" dirty="0">
+                        <a:rPr kumimoji="1" lang="en-US" altLang="ja-JP" sz="1350" kern="1200">
                           <a:solidFill>
                             <a:schemeClr val="dk1"/>
                           </a:solidFill>
@@ -9662,7 +9809,7 @@
                         <a:t>PCB</a:t>
                       </a:r>
                       <a:r>
-                        <a:rPr kumimoji="1" lang="ja-JP" altLang="ja-JP" sz="1350" kern="1200" dirty="0">
+                        <a:rPr kumimoji="1" lang="ja-JP" altLang="ja-JP" sz="1350" kern="1200">
                           <a:solidFill>
                             <a:schemeClr val="dk1"/>
                           </a:solidFill>
@@ -9680,7 +9827,7 @@
                         <a:buChar char="Ø"/>
                       </a:pPr>
                       <a:r>
-                        <a:rPr kumimoji="1" lang="ja-JP" altLang="ja-JP" sz="1350" kern="1200" dirty="0">
+                        <a:rPr kumimoji="1" lang="ja-JP" altLang="ja-JP" sz="1350" kern="1200">
                           <a:solidFill>
                             <a:schemeClr val="dk1"/>
                           </a:solidFill>
@@ -9779,14 +9926,14 @@
           <a:p>
             <a:pPr algn="ctr"/>
             <a:r>
-              <a:rPr kumimoji="1" lang="en-US" altLang="ja-JP" dirty="0">
+              <a:rPr kumimoji="1" lang="en-US" altLang="ja-JP">
                 <a:solidFill>
                   <a:srgbClr val="FF0000"/>
                 </a:solidFill>
               </a:rPr>
               <a:t>Confidential</a:t>
             </a:r>
-            <a:endParaRPr kumimoji="1" lang="ja-JP" altLang="en-US" dirty="0">
+            <a:endParaRPr kumimoji="1" lang="ja-JP" altLang="en-US">
               <a:solidFill>
                 <a:srgbClr val="FF0000"/>
               </a:solidFill>
@@ -9937,14 +10084,14 @@
           <p:nvPr>
             <p:extLst>
               <p:ext uri="{D42A27DB-BD31-4B8C-83A1-F6EECF244321}">
-                <p14:modId xmlns:p14="http://schemas.microsoft.com/office/powerpoint/2010/main" val="1274299155"/>
+                <p14:modId xmlns:p14="http://schemas.microsoft.com/office/powerpoint/2010/main" val="3200954852"/>
               </p:ext>
             </p:extLst>
           </p:nvPr>
         </p:nvGraphicFramePr>
         <p:xfrm>
-          <a:off x="661070" y="1516110"/>
-          <a:ext cx="7821860" cy="4599940"/>
+          <a:off x="628650" y="1341609"/>
+          <a:ext cx="7821860" cy="4805680"/>
         </p:xfrm>
         <a:graphic>
           <a:graphicData uri="http://schemas.openxmlformats.org/drawingml/2006/table">
@@ -10001,7 +10148,7 @@
                     <a:bodyPr/>
                     <a:lstStyle/>
                     <a:p>
-                      <a:endParaRPr kumimoji="1" lang="ja-JP" altLang="en-US" dirty="0"/>
+                      <a:endParaRPr kumimoji="1" lang="ja-JP" altLang="en-US"/>
                     </a:p>
                   </a:txBody>
                   <a:tcPr>
@@ -10021,7 +10168,7 @@
                     <a:lstStyle/>
                     <a:p>
                       <a:r>
-                        <a:rPr kumimoji="1" lang="ja-JP" altLang="en-US" dirty="0"/>
+                        <a:rPr kumimoji="1" lang="ja-JP" altLang="en-US"/>
                         <a:t>設計開発品</a:t>
                       </a:r>
                     </a:p>
@@ -10051,10 +10198,10 @@
                         <a:defRPr/>
                       </a:pPr>
                       <a:r>
-                        <a:rPr lang="en-US" altLang="ja-JP" sz="1350" dirty="0" err="1"/>
+                        <a:rPr lang="en-US" altLang="ja-JP" sz="1350" err="1"/>
                         <a:t>W社派遣先において、ロボット搭載FPGA開発、エンコーダ、センサー開発、プラットフォーム検討</a:t>
                       </a:r>
-                      <a:endParaRPr lang="en-US" altLang="ja-JP" sz="1350" dirty="0"/>
+                      <a:endParaRPr lang="en-US" altLang="ja-JP" sz="1350"/>
                     </a:p>
                   </a:txBody>
                   <a:tcPr/>
@@ -10072,7 +10219,7 @@
                     <a:lstStyle/>
                     <a:p>
                       <a:r>
-                        <a:rPr kumimoji="1" lang="ja-JP" altLang="en-US" dirty="0"/>
+                        <a:rPr kumimoji="1" lang="ja-JP" altLang="en-US"/>
                         <a:t>主業務</a:t>
                       </a:r>
                     </a:p>
@@ -10107,7 +10254,7 @@
                         <a:t>①ロボットに搭載する</a:t>
                       </a:r>
                       <a:r>
-                        <a:rPr lang="en-US" altLang="ja-JP" sz="1400" b="0" i="0" u="none" strike="noStrike" noProof="0" dirty="0">
+                        <a:rPr lang="en-US" altLang="ja-JP" sz="1400" b="0" i="0" u="none" strike="noStrike" noProof="0">
                           <a:solidFill>
                             <a:srgbClr val="000000"/>
                           </a:solidFill>
@@ -10127,7 +10274,7 @@
                         <a:t>開発、</a:t>
                       </a:r>
                       <a:r>
-                        <a:rPr lang="en-US" altLang="ja-JP" sz="1400" b="0" i="0" u="none" strike="noStrike" noProof="0" dirty="0">
+                        <a:rPr lang="en-US" altLang="ja-JP" sz="1400" b="0" i="0" u="none" strike="noStrike" noProof="0">
                           <a:solidFill>
                             <a:srgbClr val="000000"/>
                           </a:solidFill>
@@ -10164,7 +10311,7 @@
                     <a:lstStyle/>
                     <a:p>
                       <a:r>
-                        <a:rPr kumimoji="1" lang="ja-JP" altLang="en-US" dirty="0"/>
+                        <a:rPr kumimoji="1" lang="ja-JP" altLang="en-US"/>
                         <a:t>詳細</a:t>
                       </a:r>
                     </a:p>
@@ -10277,7 +10424,46 @@
                           <a:ea typeface="+mn-ea"/>
                           <a:cs typeface="+mn-cs"/>
                         </a:rPr>
-                        <a:t>NewTypeエンコーダ評価のため、アプリソフトをVBで開発し、Zynqマイコンでエンコーダの制御を実装。</a:t>
+                        <a:t>NewTypeエンコーダ評価のため、アプリソフトをVBで</a:t>
+                      </a:r>
+                      <a:endParaRPr lang="en-US" altLang="ja-JP" sz="1350" kern="1200" dirty="0">
+                        <a:solidFill>
+                          <a:schemeClr val="dk1"/>
+                        </a:solidFill>
+                        <a:effectLst/>
+                        <a:latin typeface="+mn-lt"/>
+                        <a:ea typeface="+mn-ea"/>
+                        <a:cs typeface="+mn-cs"/>
+                      </a:endParaRPr>
+                    </a:p>
+                    <a:p>
+                      <a:pPr marL="0" lvl="0" indent="0">
+                        <a:buFont typeface="Wingdings" panose="05000000000000000000" pitchFamily="2" charset="2"/>
+                        <a:buNone/>
+                      </a:pPr>
+                      <a:r>
+                        <a:rPr lang="en-US" altLang="ja-JP" sz="1350" kern="1200" dirty="0">
+                          <a:solidFill>
+                            <a:schemeClr val="dk1"/>
+                          </a:solidFill>
+                          <a:effectLst/>
+                          <a:latin typeface="+mn-lt"/>
+                          <a:ea typeface="+mn-ea"/>
+                          <a:cs typeface="+mn-cs"/>
+                        </a:rPr>
+                        <a:t>      </a:t>
+                      </a:r>
+                      <a:r>
+                        <a:rPr lang="ja-JP" altLang="ja-JP" sz="1350" kern="1200" dirty="0">
+                          <a:solidFill>
+                            <a:schemeClr val="dk1"/>
+                          </a:solidFill>
+                          <a:effectLst/>
+                          <a:latin typeface="+mn-lt"/>
+                          <a:ea typeface="+mn-ea"/>
+                          <a:cs typeface="+mn-cs"/>
+                        </a:rPr>
+                        <a:t>開発し、Zynqマイコンでエンコーダの制御を実装。</a:t>
                       </a:r>
                     </a:p>
                     <a:p>
@@ -10295,7 +10481,124 @@
                           <a:ea typeface="+mn-ea"/>
                           <a:cs typeface="+mn-cs"/>
                         </a:rPr>
-                        <a:t>FPGAソリューションからマイコンソリューションのフィージビリティ検討を行い、処理時間内に実現可能か、ソフトの移植作業を実施。処理能力を満たし、コスト削減が可能な事を確認。</a:t>
+                        <a:t>FPGAソリューションからマイコンソリューションの</a:t>
+                      </a:r>
+                      <a:endParaRPr lang="en-US" altLang="ja-JP" sz="1350" kern="1200" dirty="0">
+                        <a:solidFill>
+                          <a:schemeClr val="dk1"/>
+                        </a:solidFill>
+                        <a:effectLst/>
+                        <a:latin typeface="+mn-lt"/>
+                        <a:ea typeface="+mn-ea"/>
+                        <a:cs typeface="+mn-cs"/>
+                      </a:endParaRPr>
+                    </a:p>
+                    <a:p>
+                      <a:pPr marL="0" lvl="0" indent="0">
+                        <a:buFont typeface="Wingdings" panose="05000000000000000000" pitchFamily="2" charset="2"/>
+                        <a:buNone/>
+                      </a:pPr>
+                      <a:r>
+                        <a:rPr lang="en-US" altLang="ja-JP" sz="1350" kern="1200" dirty="0">
+                          <a:solidFill>
+                            <a:schemeClr val="dk1"/>
+                          </a:solidFill>
+                          <a:effectLst/>
+                          <a:latin typeface="+mn-lt"/>
+                          <a:ea typeface="+mn-ea"/>
+                          <a:cs typeface="+mn-cs"/>
+                        </a:rPr>
+                        <a:t>      </a:t>
+                      </a:r>
+                      <a:r>
+                        <a:rPr lang="ja-JP" altLang="ja-JP" sz="1350" kern="1200" dirty="0">
+                          <a:solidFill>
+                            <a:schemeClr val="dk1"/>
+                          </a:solidFill>
+                          <a:effectLst/>
+                          <a:latin typeface="+mn-lt"/>
+                          <a:ea typeface="+mn-ea"/>
+                          <a:cs typeface="+mn-cs"/>
+                        </a:rPr>
+                        <a:t>フィージビリティ検討を行い、処理時間内に実現可能か、</a:t>
+                      </a:r>
+                      <a:endParaRPr lang="en-US" altLang="ja-JP" sz="1350" kern="1200" dirty="0">
+                        <a:solidFill>
+                          <a:schemeClr val="dk1"/>
+                        </a:solidFill>
+                        <a:effectLst/>
+                        <a:latin typeface="+mn-lt"/>
+                        <a:ea typeface="+mn-ea"/>
+                        <a:cs typeface="+mn-cs"/>
+                      </a:endParaRPr>
+                    </a:p>
+                    <a:p>
+                      <a:pPr marL="0" lvl="0" indent="0">
+                        <a:buFont typeface="Wingdings" panose="05000000000000000000" pitchFamily="2" charset="2"/>
+                        <a:buNone/>
+                      </a:pPr>
+                      <a:r>
+                        <a:rPr lang="en-US" altLang="ja-JP" sz="1350" kern="1200" dirty="0">
+                          <a:solidFill>
+                            <a:schemeClr val="dk1"/>
+                          </a:solidFill>
+                          <a:effectLst/>
+                          <a:latin typeface="+mn-lt"/>
+                          <a:ea typeface="+mn-ea"/>
+                          <a:cs typeface="+mn-cs"/>
+                        </a:rPr>
+                        <a:t>     </a:t>
+                      </a:r>
+                      <a:r>
+                        <a:rPr lang="ja-JP" altLang="ja-JP" sz="1350" kern="1200" dirty="0">
+                          <a:solidFill>
+                            <a:schemeClr val="dk1"/>
+                          </a:solidFill>
+                          <a:effectLst/>
+                          <a:latin typeface="+mn-lt"/>
+                          <a:ea typeface="+mn-ea"/>
+                          <a:cs typeface="+mn-cs"/>
+                        </a:rPr>
+                        <a:t>ソフトの移植作業を実施。処理能力を満たし、コスト削減</a:t>
+                      </a:r>
+                      <a:endParaRPr lang="en-US" altLang="ja-JP" sz="1350" kern="1200" dirty="0">
+                        <a:solidFill>
+                          <a:schemeClr val="dk1"/>
+                        </a:solidFill>
+                        <a:effectLst/>
+                        <a:latin typeface="+mn-lt"/>
+                        <a:ea typeface="+mn-ea"/>
+                        <a:cs typeface="+mn-cs"/>
+                      </a:endParaRPr>
+                    </a:p>
+                    <a:p>
+                      <a:pPr marL="0" lvl="0" indent="0">
+                        <a:buFont typeface="Wingdings" panose="05000000000000000000" pitchFamily="2" charset="2"/>
+                        <a:buNone/>
+                      </a:pPr>
+                      <a:r>
+                        <a:rPr lang="en-US" altLang="ja-JP" sz="1350" kern="1200" dirty="0">
+                          <a:solidFill>
+                            <a:schemeClr val="dk1"/>
+                          </a:solidFill>
+                          <a:effectLst/>
+                          <a:latin typeface="+mn-lt"/>
+                          <a:ea typeface="+mn-ea"/>
+                          <a:cs typeface="+mn-cs"/>
+                        </a:rPr>
+                        <a:t>     </a:t>
+                      </a:r>
+                      <a:r>
+                        <a:rPr lang="ja-JP" altLang="ja-JP" sz="1350" kern="1200" dirty="0">
+                          <a:solidFill>
+                            <a:schemeClr val="dk1"/>
+                          </a:solidFill>
+                          <a:effectLst/>
+                          <a:latin typeface="+mn-lt"/>
+                          <a:ea typeface="+mn-ea"/>
+                          <a:cs typeface="+mn-cs"/>
+                        </a:rPr>
+                        <a:t>が可能な事を確認。</a:t>
                       </a:r>
                     </a:p>
                     <a:p>
@@ -10313,7 +10616,46 @@
                           <a:ea typeface="+mn-ea"/>
                           <a:cs typeface="+mn-cs"/>
                         </a:rPr>
-                        <a:t>新プラットフォームとしてZynqソリューションの検討。VIVADO、vitisで移植の実現性を検討。</a:t>
+                        <a:t>新プラットフォームとしてZynqソリューションの検討。</a:t>
+                      </a:r>
+                      <a:endParaRPr lang="en-US" altLang="ja-JP" sz="1350" kern="1200" dirty="0">
+                        <a:solidFill>
+                          <a:schemeClr val="dk1"/>
+                        </a:solidFill>
+                        <a:effectLst/>
+                        <a:latin typeface="+mn-lt"/>
+                        <a:ea typeface="+mn-ea"/>
+                        <a:cs typeface="+mn-cs"/>
+                      </a:endParaRPr>
+                    </a:p>
+                    <a:p>
+                      <a:pPr marL="0" lvl="0" indent="0">
+                        <a:buFont typeface="Wingdings" panose="05000000000000000000" pitchFamily="2" charset="2"/>
+                        <a:buNone/>
+                      </a:pPr>
+                      <a:r>
+                        <a:rPr lang="en-US" altLang="ja-JP" sz="1350" kern="1200" dirty="0">
+                          <a:solidFill>
+                            <a:schemeClr val="dk1"/>
+                          </a:solidFill>
+                          <a:effectLst/>
+                          <a:latin typeface="+mn-lt"/>
+                          <a:ea typeface="+mn-ea"/>
+                          <a:cs typeface="+mn-cs"/>
+                        </a:rPr>
+                        <a:t>      </a:t>
+                      </a:r>
+                      <a:r>
+                        <a:rPr lang="ja-JP" altLang="ja-JP" sz="1350" kern="1200" dirty="0">
+                          <a:solidFill>
+                            <a:schemeClr val="dk1"/>
+                          </a:solidFill>
+                          <a:effectLst/>
+                          <a:latin typeface="+mn-lt"/>
+                          <a:ea typeface="+mn-ea"/>
+                          <a:cs typeface="+mn-cs"/>
+                        </a:rPr>
+                        <a:t>VIVADO、vitisで移植の実現性を検討。</a:t>
                       </a:r>
                     </a:p>
                   </a:txBody>
@@ -10373,14 +10715,14 @@
           <a:p>
             <a:pPr algn="ctr"/>
             <a:r>
-              <a:rPr kumimoji="1" lang="en-US" altLang="ja-JP" dirty="0">
+              <a:rPr kumimoji="1" lang="en-US" altLang="ja-JP">
                 <a:solidFill>
                   <a:srgbClr val="FF0000"/>
                 </a:solidFill>
               </a:rPr>
               <a:t>Confidential</a:t>
             </a:r>
-            <a:endParaRPr kumimoji="1" lang="ja-JP" altLang="en-US" dirty="0">
+            <a:endParaRPr kumimoji="1" lang="ja-JP" altLang="en-US">
               <a:solidFill>
                 <a:srgbClr val="FF0000"/>
               </a:solidFill>
@@ -10388,6 +10730,42 @@
           </a:p>
         </p:txBody>
       </p:sp>
+      <p:pic>
+        <p:nvPicPr>
+          <p:cNvPr id="6" name="図 5">
+            <a:extLst>
+              <a:ext uri="{FF2B5EF4-FFF2-40B4-BE49-F238E27FC236}">
+                <a16:creationId xmlns:a16="http://schemas.microsoft.com/office/drawing/2014/main" id="{411CA59A-08F5-AA88-0B81-F49D47EB024F}"/>
+              </a:ext>
+            </a:extLst>
+          </p:cNvPr>
+          <p:cNvPicPr>
+            <a:picLocks noChangeAspect="1"/>
+          </p:cNvPicPr>
+          <p:nvPr/>
+        </p:nvPicPr>
+        <p:blipFill>
+          <a:blip r:embed="rId2">
+            <a:extLst>
+              <a:ext uri="{28A0092B-C50C-407E-A947-70E740481C1C}">
+                <a14:useLocalDpi xmlns:a14="http://schemas.microsoft.com/office/drawing/2010/main" val="0"/>
+              </a:ext>
+            </a:extLst>
+          </a:blip>
+          <a:stretch>
+            <a:fillRect/>
+          </a:stretch>
+        </p:blipFill>
+        <p:spPr>
+          <a:xfrm>
+            <a:off x="6985053" y="4656040"/>
+            <a:ext cx="1314633" cy="1381318"/>
+          </a:xfrm>
+          <a:prstGeom prst="rect">
+            <a:avLst/>
+          </a:prstGeom>
+        </p:spPr>
+      </p:pic>
     </p:spTree>
     <p:extLst>
       <p:ext uri="{BB962C8B-B14F-4D97-AF65-F5344CB8AC3E}">
@@ -10446,12 +10824,12 @@
           <a:lstStyle/>
           <a:p>
             <a:r>
-              <a:rPr lang="ja-JP" altLang="en-US" sz="3600" dirty="0">
+              <a:rPr lang="ja-JP" altLang="en-US" sz="3600">
                 <a:ea typeface="游ゴシック Light"/>
               </a:rPr>
               <a:t>１．業務経歴⑥</a:t>
             </a:r>
-            <a:endParaRPr kumimoji="1" lang="ja-JP" altLang="en-US" dirty="0">
+            <a:endParaRPr kumimoji="1" lang="ja-JP" altLang="en-US">
               <a:ea typeface="游ゴシック Light"/>
             </a:endParaRPr>
           </a:p>
@@ -10539,7 +10917,7 @@
                     <a:lstStyle/>
                     <a:p>
                       <a:r>
-                        <a:rPr kumimoji="1" lang="en-US" altLang="ja-JP" dirty="0">
+                        <a:rPr kumimoji="1" lang="en-US" altLang="ja-JP">
                           <a:solidFill>
                             <a:schemeClr val="tx1"/>
                           </a:solidFill>
@@ -10547,7 +10925,7 @@
                         <a:t>4. </a:t>
                       </a:r>
                       <a:r>
-                        <a:rPr kumimoji="1" lang="ja-JP" altLang="en-US" dirty="0">
+                        <a:rPr kumimoji="1" lang="ja-JP" altLang="en-US">
                           <a:solidFill>
                             <a:schemeClr val="tx1"/>
                           </a:solidFill>
@@ -10555,14 +10933,14 @@
                         <a:t>（株）</a:t>
                       </a:r>
                       <a:r>
-                        <a:rPr kumimoji="1" lang="en-US" altLang="ja-JP" dirty="0">
+                        <a:rPr kumimoji="1" lang="en-US" altLang="ja-JP">
                           <a:solidFill>
                             <a:schemeClr val="tx1"/>
                           </a:solidFill>
                         </a:rPr>
                         <a:t>BREXA Technology</a:t>
                       </a:r>
-                      <a:endParaRPr kumimoji="1" lang="ja-JP" altLang="en-US" dirty="0">
+                      <a:endParaRPr kumimoji="1" lang="ja-JP" altLang="en-US">
                         <a:solidFill>
                           <a:schemeClr val="tx1"/>
                         </a:solidFill>
@@ -10578,7 +10956,7 @@
                     <a:bodyPr/>
                     <a:lstStyle/>
                     <a:p>
-                      <a:endParaRPr kumimoji="1" lang="ja-JP" altLang="en-US" dirty="0"/>
+                      <a:endParaRPr kumimoji="1" lang="ja-JP" altLang="en-US"/>
                     </a:p>
                   </a:txBody>
                   <a:tcPr>
@@ -10598,7 +10976,7 @@
                     <a:lstStyle/>
                     <a:p>
                       <a:r>
-                        <a:rPr kumimoji="1" lang="ja-JP" altLang="en-US" dirty="0"/>
+                        <a:rPr kumimoji="1" lang="ja-JP" altLang="en-US"/>
                         <a:t>設計開発品</a:t>
                       </a:r>
                     </a:p>
@@ -10628,26 +11006,26 @@
                         <a:defRPr/>
                       </a:pPr>
                       <a:r>
-                        <a:rPr lang="en-US" altLang="ja-JP" sz="1350" dirty="0" err="1"/>
+                        <a:rPr lang="en-US" altLang="ja-JP" sz="1350" err="1"/>
                         <a:t>D社派遣先において</a:t>
                       </a:r>
                       <a:r>
-                        <a:rPr lang="en-US" altLang="ja-JP" sz="1350" dirty="0"/>
+                        <a:rPr lang="en-US" altLang="ja-JP" sz="1350"/>
                         <a:t>、</a:t>
                       </a:r>
                       <a:r>
-                        <a:rPr lang="ja-JP" altLang="en-US" sz="1350" dirty="0"/>
+                        <a:rPr lang="ja-JP" altLang="en-US" sz="1350"/>
                         <a:t>次機</a:t>
                       </a:r>
                       <a:r>
-                        <a:rPr lang="en-US" altLang="ja-JP" sz="1350" dirty="0"/>
+                        <a:rPr lang="en-US" altLang="ja-JP" sz="1350"/>
                         <a:t>ECU-SOC</a:t>
                       </a:r>
                       <a:r>
-                        <a:rPr lang="ja-JP" altLang="en-US" sz="1350" dirty="0"/>
+                        <a:rPr lang="ja-JP" altLang="en-US" sz="1350"/>
                         <a:t>向けリファレンスボード検討。</a:t>
                       </a:r>
-                      <a:endParaRPr lang="en-US" altLang="ja-JP" sz="1350" dirty="0"/>
+                      <a:endParaRPr lang="en-US" altLang="ja-JP" sz="1350"/>
                     </a:p>
                   </a:txBody>
                   <a:tcPr/>
@@ -10665,7 +11043,7 @@
                     <a:lstStyle/>
                     <a:p>
                       <a:r>
-                        <a:rPr kumimoji="1" lang="ja-JP" altLang="en-US" dirty="0"/>
+                        <a:rPr kumimoji="1" lang="ja-JP" altLang="en-US"/>
                         <a:t>主業務</a:t>
                       </a:r>
                     </a:p>
@@ -10690,7 +11068,7 @@
                         <a:buNone/>
                       </a:pPr>
                       <a:r>
-                        <a:rPr lang="ja-JP" altLang="en-US" sz="1400" b="0" i="0" u="none" strike="noStrike" noProof="0" dirty="0">
+                        <a:rPr lang="ja-JP" altLang="en-US" sz="1400" b="0" i="0" u="none" strike="noStrike" noProof="0">
                           <a:solidFill>
                             <a:srgbClr val="000000"/>
                           </a:solidFill>
@@ -10700,18 +11078,18 @@
                         <a:t>①</a:t>
                       </a:r>
                       <a:r>
-                        <a:rPr lang="ja-JP" altLang="en-US" sz="1400" dirty="0"/>
+                        <a:rPr lang="ja-JP" altLang="en-US" sz="1400"/>
                         <a:t>次期</a:t>
                       </a:r>
                       <a:r>
-                        <a:rPr lang="en-US" altLang="ja-JP" sz="1400" dirty="0"/>
+                        <a:rPr lang="en-US" altLang="ja-JP" sz="1400"/>
                         <a:t>PMIC</a:t>
                       </a:r>
                       <a:r>
-                        <a:rPr lang="ja-JP" altLang="en-US" sz="1400" dirty="0"/>
+                        <a:rPr lang="ja-JP" altLang="en-US" sz="1400"/>
                         <a:t>開発検討と評価ボード立ち上げ。</a:t>
                       </a:r>
-                      <a:endParaRPr lang="en-US" altLang="ja-JP" sz="1400" dirty="0"/>
+                      <a:endParaRPr lang="en-US" altLang="ja-JP" sz="1400"/>
                     </a:p>
                     <a:p>
                       <a:pPr lvl="0" algn="l">
@@ -10727,18 +11105,18 @@
                         <a:buNone/>
                       </a:pPr>
                       <a:r>
-                        <a:rPr lang="ja-JP" altLang="en-US" sz="1400" dirty="0"/>
+                        <a:rPr lang="ja-JP" altLang="en-US" sz="1400"/>
                         <a:t>②</a:t>
                       </a:r>
                       <a:r>
-                        <a:rPr lang="en-US" altLang="ja-JP" sz="1400" dirty="0"/>
+                        <a:rPr lang="en-US" altLang="ja-JP" sz="1400"/>
                         <a:t>UFS Ver3.1, Ver4.1 </a:t>
                       </a:r>
                       <a:r>
-                        <a:rPr lang="ja-JP" altLang="en-US" sz="1400" dirty="0"/>
+                        <a:rPr lang="ja-JP" altLang="en-US" sz="1400"/>
                         <a:t>メモリ使用マニュアル作成。</a:t>
                       </a:r>
-                      <a:endParaRPr lang="en-US" altLang="ja-JP" sz="1400" dirty="0"/>
+                      <a:endParaRPr lang="en-US" altLang="ja-JP" sz="1400"/>
                     </a:p>
                     <a:p>
                       <a:pPr lvl="0" algn="l">
@@ -10754,18 +11132,18 @@
                         <a:buNone/>
                       </a:pPr>
                       <a:r>
-                        <a:rPr lang="ja-JP" altLang="en-US" sz="1400" dirty="0"/>
+                        <a:rPr lang="ja-JP" altLang="en-US" sz="1400"/>
                         <a:t>③半導体デバイス</a:t>
                       </a:r>
                       <a:r>
-                        <a:rPr lang="en-US" altLang="ja-JP" sz="1400" dirty="0"/>
+                        <a:rPr lang="en-US" altLang="ja-JP" sz="1400"/>
                         <a:t>(MOS, Bipolar</a:t>
                       </a:r>
                       <a:r>
-                        <a:rPr lang="ja-JP" altLang="en-US" sz="1400" dirty="0"/>
+                        <a:rPr lang="ja-JP" altLang="en-US" sz="1400"/>
                         <a:t>）のデバイス構造と動作メカニズム、アナログ回路の勉強会レクチャ</a:t>
                       </a:r>
-                      <a:endParaRPr lang="ja-JP" dirty="0"/>
+                      <a:endParaRPr lang="ja-JP"/>
                     </a:p>
                   </a:txBody>
                   <a:tcPr/>
@@ -10783,7 +11161,7 @@
                     <a:lstStyle/>
                     <a:p>
                       <a:r>
-                        <a:rPr kumimoji="1" lang="ja-JP" altLang="en-US" dirty="0"/>
+                        <a:rPr kumimoji="1" lang="ja-JP" altLang="en-US"/>
                         <a:t>詳細</a:t>
                       </a:r>
                     </a:p>
@@ -10811,7 +11189,7 @@
                         <a:buChar char="Ø"/>
                       </a:pPr>
                       <a:r>
-                        <a:rPr lang="en-US" altLang="ja-JP" sz="1350" kern="1200" dirty="0">
+                        <a:rPr lang="en-US" altLang="ja-JP" sz="1350" kern="1200">
                           <a:solidFill>
                             <a:schemeClr val="dk1"/>
                           </a:solidFill>
@@ -10823,7 +11201,7 @@
                         <a:t>PMIC</a:t>
                       </a:r>
                       <a:r>
-                        <a:rPr lang="ja-JP" altLang="en-US" sz="1350" kern="1200" dirty="0">
+                        <a:rPr lang="ja-JP" altLang="en-US" sz="1350" kern="1200">
                           <a:solidFill>
                             <a:schemeClr val="dk1"/>
                           </a:solidFill>
@@ -10835,7 +11213,7 @@
                         <a:t>評価用として、</a:t>
                       </a:r>
                       <a:r>
-                        <a:rPr lang="en-US" altLang="ja-JP" sz="1350" kern="1200" dirty="0">
+                        <a:rPr lang="en-US" altLang="ja-JP" sz="1350" kern="1200">
                           <a:solidFill>
                             <a:schemeClr val="dk1"/>
                           </a:solidFill>
@@ -10847,7 +11225,7 @@
                         <a:t>Xilinx</a:t>
                       </a:r>
                       <a:r>
-                        <a:rPr lang="ja-JP" altLang="en-US" sz="1350" kern="1200" dirty="0">
+                        <a:rPr lang="ja-JP" altLang="en-US" sz="1350" kern="1200">
                           <a:solidFill>
                             <a:schemeClr val="dk1"/>
                           </a:solidFill>
@@ -10859,7 +11237,7 @@
                         <a:t>エバボードに</a:t>
                       </a:r>
                       <a:r>
-                        <a:rPr lang="en-US" altLang="ja-JP" sz="1350" kern="1200" dirty="0" err="1">
+                        <a:rPr lang="en-US" altLang="ja-JP" sz="1350" kern="1200" err="1">
                           <a:solidFill>
                             <a:srgbClr val="FF0000"/>
                           </a:solidFill>
@@ -10871,7 +11249,7 @@
                         <a:t>MicroBlaze</a:t>
                       </a:r>
                       <a:r>
-                        <a:rPr lang="ja-JP" altLang="en-US" sz="1350" kern="1200" dirty="0">
+                        <a:rPr lang="ja-JP" altLang="en-US" sz="1350" kern="1200">
                           <a:solidFill>
                             <a:schemeClr val="dk1"/>
                           </a:solidFill>
@@ -10883,7 +11261,7 @@
                         <a:t>を搭載して制御し、</a:t>
                       </a:r>
                       <a:r>
-                        <a:rPr lang="en-US" altLang="ja-JP" sz="1350" kern="1200" dirty="0">
+                        <a:rPr lang="en-US" altLang="ja-JP" sz="1350" kern="1200">
                           <a:solidFill>
                             <a:schemeClr val="dk1"/>
                           </a:solidFill>
@@ -10895,7 +11273,7 @@
                         <a:t>PC</a:t>
                       </a:r>
                       <a:r>
-                        <a:rPr lang="ja-JP" altLang="en-US" sz="1350" kern="1200" dirty="0">
+                        <a:rPr lang="ja-JP" altLang="en-US" sz="1350" kern="1200">
                           <a:solidFill>
                             <a:schemeClr val="dk1"/>
                           </a:solidFill>
@@ -10907,7 +11285,7 @@
                         <a:t>上からアプリソフトから、ターゲット</a:t>
                       </a:r>
                       <a:r>
-                        <a:rPr lang="en-US" altLang="ja-JP" sz="1350" kern="1200" dirty="0">
+                        <a:rPr lang="en-US" altLang="ja-JP" sz="1350" kern="1200">
                           <a:solidFill>
                             <a:schemeClr val="dk1"/>
                           </a:solidFill>
@@ -10919,7 +11297,7 @@
                         <a:t>PMIC</a:t>
                       </a:r>
                       <a:r>
-                        <a:rPr lang="ja-JP" altLang="en-US" sz="1350" kern="1200" dirty="0">
+                        <a:rPr lang="ja-JP" altLang="en-US" sz="1350" kern="1200">
                           <a:solidFill>
                             <a:schemeClr val="dk1"/>
                           </a:solidFill>
@@ -10930,7 +11308,7 @@
                         </a:rPr>
                         <a:t>を制御するシステムを作成。</a:t>
                       </a:r>
-                      <a:endParaRPr lang="ja-JP" altLang="ja-JP" sz="1350" kern="1200" dirty="0">
+                      <a:endParaRPr lang="ja-JP" altLang="ja-JP" sz="1350" kern="1200">
                         <a:solidFill>
                           <a:schemeClr val="dk1"/>
                         </a:solidFill>
@@ -10946,7 +11324,7 @@
                         <a:buChar char="Ø"/>
                       </a:pPr>
                       <a:r>
-                        <a:rPr lang="ja-JP" altLang="en-US" sz="1350" kern="1200" dirty="0">
+                        <a:rPr lang="ja-JP" altLang="en-US" sz="1350" kern="1200">
                           <a:solidFill>
                             <a:schemeClr val="dk1"/>
                           </a:solidFill>
@@ -10958,7 +11336,7 @@
                         <a:t>既存の市販品</a:t>
                       </a:r>
                       <a:r>
-                        <a:rPr lang="en-US" altLang="ja-JP" sz="1350" kern="1200" dirty="0">
+                        <a:rPr lang="en-US" altLang="ja-JP" sz="1350" kern="1200">
                           <a:solidFill>
                             <a:schemeClr val="dk1"/>
                           </a:solidFill>
@@ -10970,7 +11348,7 @@
                         <a:t>PMIC,DCDC</a:t>
                       </a:r>
                       <a:r>
-                        <a:rPr lang="ja-JP" altLang="en-US" sz="1350" kern="1200" dirty="0">
+                        <a:rPr lang="ja-JP" altLang="en-US" sz="1350" kern="1200">
                           <a:solidFill>
                             <a:schemeClr val="dk1"/>
                           </a:solidFill>
@@ -10982,7 +11360,7 @@
                         <a:t>を組み合わせた</a:t>
                       </a:r>
                       <a:r>
-                        <a:rPr lang="ja-JP" altLang="en-US" sz="1350" kern="1200" dirty="0">
+                        <a:rPr lang="ja-JP" altLang="en-US" sz="1350" kern="1200">
                           <a:solidFill>
                             <a:srgbClr val="FF0000"/>
                           </a:solidFill>
@@ -10994,7 +11372,7 @@
                         <a:t>電源システムソリューション検討</a:t>
                       </a:r>
                       <a:r>
-                        <a:rPr lang="ja-JP" altLang="en-US" sz="1350" kern="1200" dirty="0">
+                        <a:rPr lang="ja-JP" altLang="en-US" sz="1350" kern="1200">
                           <a:solidFill>
                             <a:schemeClr val="dk1"/>
                           </a:solidFill>
@@ -11005,7 +11383,7 @@
                         </a:rPr>
                         <a:t>。</a:t>
                       </a:r>
-                      <a:endParaRPr lang="en-US" altLang="ja-JP" sz="1350" kern="1200" dirty="0">
+                      <a:endParaRPr lang="en-US" altLang="ja-JP" sz="1350" kern="1200">
                         <a:solidFill>
                           <a:schemeClr val="dk1"/>
                         </a:solidFill>
@@ -11021,7 +11399,7 @@
                         <a:buChar char="Ø"/>
                       </a:pPr>
                       <a:r>
-                        <a:rPr lang="en-US" altLang="ja-JP" sz="1350" kern="1200" dirty="0">
+                        <a:rPr lang="en-US" altLang="ja-JP" sz="1350" kern="1200">
                           <a:solidFill>
                             <a:schemeClr val="dk1"/>
                           </a:solidFill>
@@ -11033,7 +11411,7 @@
                         <a:t>UFS</a:t>
                       </a:r>
                       <a:r>
-                        <a:rPr lang="ja-JP" altLang="en-US" sz="1350" kern="1200" dirty="0">
+                        <a:rPr lang="ja-JP" altLang="en-US" sz="1350" kern="1200">
                           <a:solidFill>
                             <a:schemeClr val="dk1"/>
                           </a:solidFill>
@@ -11045,7 +11423,7 @@
                         <a:t>メモリを使ったシステムを立ち上げる開発部署に向けた、使用マニュアル</a:t>
                       </a:r>
                       <a:r>
-                        <a:rPr lang="en-US" altLang="ja-JP" sz="1350" kern="1200" dirty="0">
+                        <a:rPr lang="en-US" altLang="ja-JP" sz="1350" kern="1200">
                           <a:solidFill>
                             <a:schemeClr val="dk1"/>
                           </a:solidFill>
@@ -11057,7 +11435,7 @@
                         <a:t>-</a:t>
                       </a:r>
                       <a:r>
-                        <a:rPr lang="ja-JP" altLang="en-US" sz="1350" kern="1200" dirty="0">
+                        <a:rPr lang="ja-JP" altLang="en-US" sz="1350" kern="1200">
                           <a:solidFill>
                             <a:schemeClr val="dk1"/>
                           </a:solidFill>
@@ -11068,7 +11446,7 @@
                         </a:rPr>
                         <a:t>注意点資料作成。</a:t>
                       </a:r>
-                      <a:endParaRPr lang="en-US" altLang="ja-JP" sz="1350" kern="1200" dirty="0">
+                      <a:endParaRPr lang="en-US" altLang="ja-JP" sz="1350" kern="1200">
                         <a:solidFill>
                           <a:schemeClr val="dk1"/>
                         </a:solidFill>
@@ -11084,7 +11462,7 @@
                         <a:buChar char="Ø"/>
                       </a:pPr>
                       <a:r>
-                        <a:rPr lang="ja-JP" altLang="en-US" sz="1350" kern="1200" dirty="0">
+                        <a:rPr lang="ja-JP" altLang="en-US" sz="1350" kern="1200">
                           <a:solidFill>
                             <a:schemeClr val="dk1"/>
                           </a:solidFill>
@@ -11096,7 +11474,7 @@
                         <a:t>半導体デバイス全般の標準化推進部門に対し、</a:t>
                       </a:r>
                       <a:r>
-                        <a:rPr lang="ja-JP" altLang="en-US" sz="1350" kern="1200" dirty="0">
+                        <a:rPr lang="ja-JP" altLang="en-US" sz="1350" kern="1200">
                           <a:solidFill>
                             <a:srgbClr val="FF0000"/>
                           </a:solidFill>
@@ -11108,7 +11486,7 @@
                         <a:t>デバイス構造・各種部品の動作原理・アナログ回路に関する講師</a:t>
                       </a:r>
                       <a:r>
-                        <a:rPr lang="ja-JP" altLang="en-US" sz="1350" kern="1200" dirty="0">
+                        <a:rPr lang="ja-JP" altLang="en-US" sz="1350" kern="1200">
                           <a:solidFill>
                             <a:schemeClr val="dk1"/>
                           </a:solidFill>
@@ -11119,7 +11497,7 @@
                         </a:rPr>
                         <a:t>を務め、組織全体の技術レベル向上に貢献。</a:t>
                       </a:r>
-                      <a:endParaRPr lang="en-US" altLang="ja-JP" sz="1350" kern="1200" dirty="0">
+                      <a:endParaRPr lang="en-US" altLang="ja-JP" sz="1350" kern="1200">
                         <a:solidFill>
                           <a:srgbClr val="FF0000"/>
                         </a:solidFill>
@@ -11186,14 +11564,14 @@
           <a:p>
             <a:pPr algn="ctr"/>
             <a:r>
-              <a:rPr kumimoji="1" lang="en-US" altLang="ja-JP" dirty="0">
+              <a:rPr kumimoji="1" lang="en-US" altLang="ja-JP">
                 <a:solidFill>
                   <a:srgbClr val="FF0000"/>
                 </a:solidFill>
               </a:rPr>
               <a:t>Confidential</a:t>
             </a:r>
-            <a:endParaRPr kumimoji="1" lang="ja-JP" altLang="en-US" dirty="0">
+            <a:endParaRPr kumimoji="1" lang="ja-JP" altLang="en-US">
               <a:solidFill>
                 <a:srgbClr val="FF0000"/>
               </a:solidFill>
@@ -11255,18 +11633,18 @@
           <a:lstStyle/>
           <a:p>
             <a:r>
-              <a:rPr lang="ja-JP" altLang="en-US" sz="3200" dirty="0"/>
+              <a:rPr lang="ja-JP" altLang="en-US" sz="3200"/>
               <a:t>２．</a:t>
             </a:r>
             <a:r>
-              <a:rPr lang="en-US" altLang="ja-JP" sz="3200" dirty="0"/>
+              <a:rPr lang="en-US" altLang="ja-JP" sz="3200"/>
               <a:t>S</a:t>
             </a:r>
             <a:r>
-              <a:rPr lang="ja-JP" altLang="en-US" sz="3200" dirty="0"/>
+              <a:rPr lang="ja-JP" altLang="en-US" sz="3200"/>
               <a:t>社での知識とスキル</a:t>
             </a:r>
-            <a:endParaRPr kumimoji="1" lang="ja-JP" altLang="en-US" sz="3200" dirty="0"/>
+            <a:endParaRPr kumimoji="1" lang="ja-JP" altLang="en-US" sz="3200"/>
           </a:p>
         </p:txBody>
       </p:sp>
@@ -11343,14 +11721,14 @@
           <a:p>
             <a:pPr algn="ctr"/>
             <a:r>
-              <a:rPr kumimoji="1" lang="en-US" altLang="ja-JP" dirty="0">
+              <a:rPr kumimoji="1" lang="en-US" altLang="ja-JP">
                 <a:solidFill>
                   <a:srgbClr val="FF0000"/>
                 </a:solidFill>
               </a:rPr>
               <a:t>Confidential</a:t>
             </a:r>
-            <a:endParaRPr kumimoji="1" lang="ja-JP" altLang="en-US" dirty="0">
+            <a:endParaRPr kumimoji="1" lang="ja-JP" altLang="en-US">
               <a:solidFill>
                 <a:srgbClr val="FF0000"/>
               </a:solidFill>
@@ -11419,12 +11797,12 @@
                     <a:p>
                       <a:pPr algn="ctr"/>
                       <a:r>
-                        <a:rPr lang="ja-JP" sz="1350" kern="100" dirty="0">
+                        <a:rPr lang="ja-JP" sz="1350" kern="100">
                           <a:effectLst/>
                         </a:rPr>
                         <a:t>設計技術</a:t>
                       </a:r>
-                      <a:endParaRPr lang="ja-JP" sz="1350" kern="100" dirty="0">
+                      <a:endParaRPr lang="ja-JP" sz="1350" kern="100">
                         <a:effectLst/>
                         <a:latin typeface="Century" panose="02040604050505020304" pitchFamily="18" charset="0"/>
                         <a:ea typeface="ＭＳ 明朝" panose="02020609040205080304" pitchFamily="17" charset="-128"/>
@@ -11441,12 +11819,12 @@
                     <a:p>
                       <a:pPr algn="ctr"/>
                       <a:r>
-                        <a:rPr lang="ja-JP" sz="1350" kern="100" dirty="0">
+                        <a:rPr lang="ja-JP" sz="1350" kern="100">
                           <a:effectLst/>
                         </a:rPr>
                         <a:t>デジタル回路＆基板技術</a:t>
                       </a:r>
-                      <a:endParaRPr lang="ja-JP" sz="1350" kern="100" dirty="0">
+                      <a:endParaRPr lang="ja-JP" sz="1350" kern="100">
                         <a:effectLst/>
                         <a:latin typeface="Century" panose="02040604050505020304" pitchFamily="18" charset="0"/>
                         <a:ea typeface="ＭＳ 明朝" panose="02020609040205080304" pitchFamily="17" charset="-128"/>
@@ -11463,25 +11841,25 @@
                     <a:p>
                       <a:pPr algn="just"/>
                       <a:r>
-                        <a:rPr lang="en-US" sz="1350" kern="100" dirty="0">
+                        <a:rPr lang="en-US" sz="1350" kern="100">
                           <a:effectLst/>
                         </a:rPr>
                         <a:t>LSI</a:t>
                       </a:r>
                       <a:r>
-                        <a:rPr lang="ja-JP" sz="1350" kern="100" dirty="0">
+                        <a:rPr lang="ja-JP" sz="1350" kern="100">
                           <a:effectLst/>
                         </a:rPr>
                         <a:t>設計：</a:t>
                       </a:r>
                       <a:r>
-                        <a:rPr lang="en-US" sz="1350" kern="100" dirty="0">
+                        <a:rPr lang="en-US" sz="1350" kern="100">
                           <a:effectLst/>
                         </a:rPr>
                         <a:t>Verilog-HDL, VCS, Spice</a:t>
                       </a:r>
                       <a:r>
-                        <a:rPr lang="ja-JP" sz="1350" kern="100" dirty="0">
+                        <a:rPr lang="ja-JP" sz="1350" kern="100">
                           <a:effectLst/>
                         </a:rPr>
                         <a:t>。</a:t>
@@ -11490,25 +11868,25 @@
                     <a:p>
                       <a:pPr algn="just"/>
                       <a:r>
-                        <a:rPr lang="ja-JP" sz="1350" kern="100" dirty="0">
+                        <a:rPr lang="ja-JP" sz="1350" kern="100">
                           <a:effectLst/>
                         </a:rPr>
                         <a:t>基板設計：回路図エントリ（</a:t>
                       </a:r>
                       <a:r>
-                        <a:rPr lang="en-US" sz="1350" kern="100" dirty="0" err="1">
+                        <a:rPr lang="en-US" sz="1350" kern="100" err="1">
                           <a:effectLst/>
                         </a:rPr>
                         <a:t>Orcad</a:t>
                       </a:r>
                       <a:r>
-                        <a:rPr lang="en-US" sz="1350" kern="100" dirty="0">
+                        <a:rPr lang="en-US" sz="1350" kern="100">
                           <a:effectLst/>
                         </a:rPr>
                         <a:t>, Protel</a:t>
                       </a:r>
                       <a:r>
-                        <a:rPr lang="ja-JP" sz="1350" kern="100" dirty="0">
+                        <a:rPr lang="ja-JP" sz="1350" kern="100">
                           <a:effectLst/>
                         </a:rPr>
                         <a:t>）。フロアプラン＆チェック</a:t>
@@ -11517,48 +11895,48 @@
                     <a:p>
                       <a:pPr algn="just"/>
                       <a:r>
-                        <a:rPr lang="ja-JP" sz="1350" kern="100" dirty="0">
+                        <a:rPr lang="ja-JP" sz="1350" kern="100">
                           <a:effectLst/>
                         </a:rPr>
                         <a:t>試作検証：</a:t>
                       </a:r>
                       <a:r>
-                        <a:rPr lang="en-US" sz="1350" kern="100" dirty="0">
+                        <a:rPr lang="en-US" sz="1350" kern="100">
                           <a:effectLst/>
                         </a:rPr>
                         <a:t>FPGA(Xilinx, Altera )</a:t>
                       </a:r>
                       <a:r>
-                        <a:rPr lang="ja-JP" sz="1350" kern="100" dirty="0">
+                        <a:rPr lang="ja-JP" sz="1350" kern="100">
                           <a:effectLst/>
                         </a:rPr>
                         <a:t>の実装</a:t>
                       </a:r>
                       <a:r>
-                        <a:rPr lang="en-US" sz="1350" kern="100" dirty="0">
+                        <a:rPr lang="en-US" sz="1350" kern="100">
                           <a:effectLst/>
                         </a:rPr>
                         <a:t>(</a:t>
                       </a:r>
                       <a:r>
-                        <a:rPr lang="ja-JP" sz="1350" kern="100" dirty="0">
+                        <a:rPr lang="ja-JP" sz="1350" kern="100">
                           <a:effectLst/>
                         </a:rPr>
                         <a:t>コンパイル＆</a:t>
                       </a:r>
                       <a:r>
-                        <a:rPr lang="en-US" sz="1350" kern="100" dirty="0">
+                        <a:rPr lang="en-US" sz="1350" kern="100">
                           <a:effectLst/>
                         </a:rPr>
                         <a:t>STA)</a:t>
                       </a:r>
                       <a:r>
-                        <a:rPr lang="ja-JP" sz="1350" kern="100" dirty="0">
+                        <a:rPr lang="ja-JP" sz="1350" kern="100">
                           <a:effectLst/>
                         </a:rPr>
                         <a:t>と動作検証。</a:t>
                       </a:r>
-                      <a:endParaRPr lang="ja-JP" sz="1350" kern="100" dirty="0">
+                      <a:endParaRPr lang="ja-JP" sz="1350" kern="100">
                         <a:effectLst/>
                         <a:latin typeface="Century" panose="02040604050505020304" pitchFamily="18" charset="0"/>
                         <a:ea typeface="ＭＳ 明朝" panose="02020609040205080304" pitchFamily="17" charset="-128"/>
@@ -11592,12 +11970,12 @@
                     <a:p>
                       <a:pPr algn="ctr"/>
                       <a:r>
-                        <a:rPr lang="ja-JP" sz="1350" kern="100" dirty="0">
+                        <a:rPr lang="ja-JP" sz="1350" kern="100">
                           <a:effectLst/>
                         </a:rPr>
                         <a:t>アナログ回路</a:t>
                       </a:r>
-                      <a:endParaRPr lang="ja-JP" sz="1350" kern="100" dirty="0">
+                      <a:endParaRPr lang="ja-JP" sz="1350" kern="100">
                         <a:effectLst/>
                         <a:latin typeface="Century" panose="02040604050505020304" pitchFamily="18" charset="0"/>
                         <a:ea typeface="ＭＳ 明朝" panose="02020609040205080304" pitchFamily="17" charset="-128"/>
@@ -11614,96 +11992,96 @@
                     <a:p>
                       <a:pPr algn="just"/>
                       <a:r>
-                        <a:rPr lang="ja-JP" sz="1350" kern="100" dirty="0">
+                        <a:rPr lang="ja-JP" sz="1350" kern="100">
                           <a:effectLst/>
                         </a:rPr>
                         <a:t>アナログ</a:t>
                       </a:r>
                       <a:r>
-                        <a:rPr lang="en-US" sz="1350" kern="100" dirty="0">
+                        <a:rPr lang="en-US" sz="1350" kern="100">
                           <a:effectLst/>
                         </a:rPr>
                         <a:t>IC</a:t>
                       </a:r>
                       <a:r>
-                        <a:rPr lang="ja-JP" sz="1350" kern="100" dirty="0">
+                        <a:rPr lang="ja-JP" sz="1350" kern="100">
                           <a:effectLst/>
                         </a:rPr>
                         <a:t>、ビデオアンプ、</a:t>
                       </a:r>
                       <a:r>
-                        <a:rPr lang="en-US" sz="1350" kern="100" dirty="0">
+                        <a:rPr lang="en-US" sz="1350" kern="100">
                           <a:effectLst/>
                         </a:rPr>
                         <a:t>AGC</a:t>
                       </a:r>
                       <a:r>
-                        <a:rPr lang="ja-JP" sz="1350" kern="100" dirty="0">
+                        <a:rPr lang="ja-JP" sz="1350" kern="100">
                           <a:effectLst/>
                         </a:rPr>
                         <a:t>アンプの回路設計とアートワーク。ドライバ、オペアンプ</a:t>
                       </a:r>
                       <a:r>
-                        <a:rPr lang="en-US" sz="1350" kern="100" dirty="0">
+                        <a:rPr lang="en-US" sz="1350" kern="100">
                           <a:effectLst/>
                         </a:rPr>
                         <a:t>,</a:t>
                       </a:r>
                       <a:r>
-                        <a:rPr lang="ja-JP" sz="1350" kern="100" dirty="0">
+                        <a:rPr lang="ja-JP" sz="1350" kern="100">
                           <a:effectLst/>
                         </a:rPr>
                         <a:t>レギュレータ、</a:t>
                       </a:r>
                       <a:r>
-                        <a:rPr lang="en-US" sz="1350" kern="100" dirty="0">
+                        <a:rPr lang="en-US" sz="1350" kern="100">
                           <a:effectLst/>
                         </a:rPr>
                         <a:t>ADC</a:t>
                       </a:r>
                       <a:r>
-                        <a:rPr lang="ja-JP" sz="1350" kern="100" dirty="0">
+                        <a:rPr lang="ja-JP" sz="1350" kern="100">
                           <a:effectLst/>
                         </a:rPr>
                         <a:t>、</a:t>
                       </a:r>
                       <a:r>
-                        <a:rPr lang="en-US" sz="1350" kern="100" dirty="0">
+                        <a:rPr lang="en-US" sz="1350" kern="100">
                           <a:effectLst/>
                         </a:rPr>
                         <a:t>DAC</a:t>
                       </a:r>
                       <a:r>
-                        <a:rPr lang="ja-JP" sz="1350" kern="100" dirty="0">
+                        <a:rPr lang="ja-JP" sz="1350" kern="100">
                           <a:effectLst/>
                         </a:rPr>
                         <a:t>、</a:t>
                       </a:r>
                       <a:r>
-                        <a:rPr lang="en-US" sz="1350" kern="100" dirty="0">
+                        <a:rPr lang="en-US" sz="1350" kern="100">
                           <a:effectLst/>
                         </a:rPr>
                         <a:t>PLL</a:t>
                       </a:r>
                       <a:r>
-                        <a:rPr lang="ja-JP" sz="1350" kern="100" dirty="0">
+                        <a:rPr lang="ja-JP" sz="1350" kern="100">
                           <a:effectLst/>
                         </a:rPr>
                         <a:t>、</a:t>
                       </a:r>
                       <a:r>
-                        <a:rPr lang="en-US" sz="1350" kern="100" dirty="0">
+                        <a:rPr lang="en-US" sz="1350" kern="100">
                           <a:effectLst/>
                         </a:rPr>
                         <a:t>OSC</a:t>
                       </a:r>
                       <a:r>
-                        <a:rPr lang="ja-JP" sz="1350" kern="100" dirty="0">
+                        <a:rPr lang="ja-JP" sz="1350" kern="100">
                           <a:effectLst/>
                         </a:rPr>
                         <a:t>の技術的知見とノウハウ。</a:t>
                       </a:r>
-                      <a:endParaRPr lang="ja-JP" sz="1350" kern="100" dirty="0">
+                      <a:endParaRPr lang="ja-JP" sz="1350" kern="100">
                         <a:effectLst/>
                         <a:latin typeface="Century" panose="02040604050505020304" pitchFamily="18" charset="0"/>
                         <a:ea typeface="ＭＳ 明朝" panose="02020609040205080304" pitchFamily="17" charset="-128"/>
@@ -11759,36 +12137,36 @@
                     <a:p>
                       <a:pPr algn="just"/>
                       <a:r>
-                        <a:rPr lang="ja-JP" sz="1350" kern="100" dirty="0">
+                        <a:rPr lang="ja-JP" sz="1350" kern="100">
                           <a:effectLst/>
                         </a:rPr>
                         <a:t>オシロ、スペアナ、評価基板作成、</a:t>
                       </a:r>
                       <a:r>
-                        <a:rPr lang="en-US" sz="1350" kern="100" dirty="0">
+                        <a:rPr lang="en-US" sz="1350" kern="100">
                           <a:effectLst/>
                         </a:rPr>
                         <a:t>PIC</a:t>
                       </a:r>
                       <a:r>
-                        <a:rPr lang="ja-JP" sz="1350" kern="100" dirty="0">
+                        <a:rPr lang="ja-JP" sz="1350" kern="100">
                           <a:effectLst/>
                         </a:rPr>
                         <a:t>マイコンや汎用マイコンによる拡販＆評価基板作成。デモソフト作成（</a:t>
                       </a:r>
                       <a:r>
-                        <a:rPr lang="en-US" sz="1350" kern="100" dirty="0">
+                        <a:rPr lang="en-US" sz="1350" kern="100">
                           <a:effectLst/>
                         </a:rPr>
                         <a:t>C,VC++</a:t>
                       </a:r>
                       <a:r>
-                        <a:rPr lang="ja-JP" sz="1350" kern="100" dirty="0">
+                        <a:rPr lang="ja-JP" sz="1350" kern="100">
                           <a:effectLst/>
                         </a:rPr>
                         <a:t>）。カメラ＆画像信号処理。フィルタ理論。</a:t>
                       </a:r>
-                      <a:endParaRPr lang="ja-JP" sz="1350" kern="100" dirty="0">
+                      <a:endParaRPr lang="ja-JP" sz="1350" kern="100">
                         <a:effectLst/>
                         <a:latin typeface="Century" panose="02040604050505020304" pitchFamily="18" charset="0"/>
                         <a:ea typeface="ＭＳ 明朝" panose="02020609040205080304" pitchFamily="17" charset="-128"/>
@@ -11812,149 +12190,10 @@
                     <a:p>
                       <a:pPr algn="ctr"/>
                       <a:r>
-                        <a:rPr lang="ja-JP" sz="1350" kern="100" dirty="0">
+                        <a:rPr lang="ja-JP" sz="1350" kern="100">
                           <a:effectLst/>
                         </a:rPr>
                         <a:t>企画＆ユーザ対応</a:t>
-                      </a:r>
-                      <a:endParaRPr lang="ja-JP" sz="1350" kern="100" dirty="0">
-                        <a:effectLst/>
-                        <a:latin typeface="Century" panose="02040604050505020304" pitchFamily="18" charset="0"/>
-                        <a:ea typeface="ＭＳ 明朝" panose="02020609040205080304" pitchFamily="17" charset="-128"/>
-                        <a:cs typeface="Times New Roman" panose="02020603050405020304" pitchFamily="18" charset="0"/>
-                      </a:endParaRPr>
-                    </a:p>
-                  </a:txBody>
-                  <a:tcPr marL="68580" marR="68580" marT="0" marB="0" anchor="ctr"/>
-                </a:tc>
-                <a:tc hMerge="1">
-                  <a:txBody>
-                    <a:bodyPr/>
-                    <a:lstStyle/>
-                    <a:p>
-                      <a:endParaRPr kumimoji="1" lang="ja-JP" altLang="en-US"/>
-                    </a:p>
-                  </a:txBody>
-                  <a:tcPr/>
-                </a:tc>
-                <a:tc>
-                  <a:txBody>
-                    <a:bodyPr/>
-                    <a:lstStyle/>
-                    <a:p>
-                      <a:pPr algn="just"/>
-                      <a:r>
-                        <a:rPr lang="en-US" sz="1350" kern="100" dirty="0">
-                          <a:effectLst/>
-                        </a:rPr>
-                        <a:t>LSI</a:t>
-                      </a:r>
-                      <a:r>
-                        <a:rPr lang="ja-JP" sz="1350" kern="100" dirty="0">
-                          <a:effectLst/>
-                        </a:rPr>
-                        <a:t>製品開発：マーケット分析、開発企画書作成。</a:t>
-                      </a:r>
-                    </a:p>
-                    <a:p>
-                      <a:pPr algn="just"/>
-                      <a:r>
-                        <a:rPr lang="ja-JP" sz="1350" kern="100" dirty="0">
-                          <a:effectLst/>
-                        </a:rPr>
-                        <a:t>拡販：プレゼンテーション資料作成、展示会対応、プレス向け資料、</a:t>
-                      </a:r>
-                      <a:r>
-                        <a:rPr lang="en-US" sz="1350" kern="100" dirty="0">
-                          <a:effectLst/>
-                        </a:rPr>
-                        <a:t>FAE</a:t>
-                      </a:r>
-                      <a:r>
-                        <a:rPr lang="ja-JP" sz="1350" kern="100" dirty="0">
-                          <a:effectLst/>
-                        </a:rPr>
-                        <a:t>業務。</a:t>
-                      </a:r>
-                    </a:p>
-                    <a:p>
-                      <a:pPr algn="just"/>
-                      <a:r>
-                        <a:rPr lang="en-US" sz="1350" kern="100" dirty="0">
-                          <a:effectLst/>
-                        </a:rPr>
-                        <a:t>Project Manager</a:t>
-                      </a:r>
-                      <a:r>
-                        <a:rPr lang="ja-JP" sz="1350" kern="100" dirty="0">
-                          <a:effectLst/>
-                        </a:rPr>
-                        <a:t>：</a:t>
-                      </a:r>
-                      <a:r>
-                        <a:rPr lang="en-US" sz="1350" kern="100" dirty="0">
-                          <a:effectLst/>
-                        </a:rPr>
-                        <a:t>LSI</a:t>
-                      </a:r>
-                      <a:r>
-                        <a:rPr lang="ja-JP" sz="1350" kern="100" dirty="0">
-                          <a:effectLst/>
-                        </a:rPr>
-                        <a:t>開発の</a:t>
-                      </a:r>
-                      <a:r>
-                        <a:rPr lang="en-US" sz="1350" kern="100" dirty="0">
-                          <a:effectLst/>
-                        </a:rPr>
-                        <a:t>Project Manager,</a:t>
-                      </a:r>
-                      <a:r>
-                        <a:rPr lang="ja-JP" sz="1350" kern="100" dirty="0">
-                          <a:effectLst/>
-                        </a:rPr>
-                        <a:t>ユーザ対応</a:t>
-                      </a:r>
-                      <a:r>
-                        <a:rPr lang="en-US" sz="1350" kern="100" dirty="0">
-                          <a:effectLst/>
-                        </a:rPr>
-                        <a:t>&amp;</a:t>
-                      </a:r>
-                      <a:r>
-                        <a:rPr lang="ja-JP" sz="1350" kern="100" dirty="0">
-                          <a:effectLst/>
-                        </a:rPr>
-                        <a:t>技術支援。</a:t>
-                      </a:r>
-                      <a:endParaRPr lang="ja-JP" sz="1350" kern="100" dirty="0">
-                        <a:effectLst/>
-                        <a:latin typeface="Century" panose="02040604050505020304" pitchFamily="18" charset="0"/>
-                        <a:ea typeface="ＭＳ 明朝" panose="02020609040205080304" pitchFamily="17" charset="-128"/>
-                        <a:cs typeface="Times New Roman" panose="02020603050405020304" pitchFamily="18" charset="0"/>
-                      </a:endParaRPr>
-                    </a:p>
-                  </a:txBody>
-                  <a:tcPr marL="68580" marR="68580" marT="0" marB="0" anchor="ctr"/>
-                </a:tc>
-                <a:extLst>
-                  <a:ext uri="{0D108BD9-81ED-4DB2-BD59-A6C34878D82A}">
-                    <a16:rowId xmlns:a16="http://schemas.microsoft.com/office/drawing/2014/main" val="462738535"/>
-                  </a:ext>
-                </a:extLst>
-              </a:tr>
-              <a:tr h="476355">
-                <a:tc gridSpan="2">
-                  <a:txBody>
-                    <a:bodyPr/>
-                    <a:lstStyle/>
-                    <a:p>
-                      <a:pPr algn="ctr"/>
-                      <a:r>
-                        <a:rPr lang="ja-JP" sz="1350" kern="100">
-                          <a:effectLst/>
-                        </a:rPr>
-                        <a:t>マネージメント</a:t>
                       </a:r>
                       <a:endParaRPr lang="ja-JP" sz="1350" kern="100">
                         <a:effectLst/>
@@ -11983,24 +12222,163 @@
                     <a:p>
                       <a:pPr algn="just"/>
                       <a:r>
-                        <a:rPr lang="ja-JP" sz="1350" kern="100" dirty="0">
+                        <a:rPr lang="en-US" sz="1350" kern="100">
+                          <a:effectLst/>
+                        </a:rPr>
+                        <a:t>LSI</a:t>
+                      </a:r>
+                      <a:r>
+                        <a:rPr lang="ja-JP" sz="1350" kern="100">
+                          <a:effectLst/>
+                        </a:rPr>
+                        <a:t>製品開発：マーケット分析、開発企画書作成。</a:t>
+                      </a:r>
+                    </a:p>
+                    <a:p>
+                      <a:pPr algn="just"/>
+                      <a:r>
+                        <a:rPr lang="ja-JP" sz="1350" kern="100">
+                          <a:effectLst/>
+                        </a:rPr>
+                        <a:t>拡販：プレゼンテーション資料作成、展示会対応、プレス向け資料、</a:t>
+                      </a:r>
+                      <a:r>
+                        <a:rPr lang="en-US" sz="1350" kern="100">
+                          <a:effectLst/>
+                        </a:rPr>
+                        <a:t>FAE</a:t>
+                      </a:r>
+                      <a:r>
+                        <a:rPr lang="ja-JP" sz="1350" kern="100">
+                          <a:effectLst/>
+                        </a:rPr>
+                        <a:t>業務。</a:t>
+                      </a:r>
+                    </a:p>
+                    <a:p>
+                      <a:pPr algn="just"/>
+                      <a:r>
+                        <a:rPr lang="en-US" sz="1350" kern="100">
+                          <a:effectLst/>
+                        </a:rPr>
+                        <a:t>Project Manager</a:t>
+                      </a:r>
+                      <a:r>
+                        <a:rPr lang="ja-JP" sz="1350" kern="100">
+                          <a:effectLst/>
+                        </a:rPr>
+                        <a:t>：</a:t>
+                      </a:r>
+                      <a:r>
+                        <a:rPr lang="en-US" sz="1350" kern="100">
+                          <a:effectLst/>
+                        </a:rPr>
+                        <a:t>LSI</a:t>
+                      </a:r>
+                      <a:r>
+                        <a:rPr lang="ja-JP" sz="1350" kern="100">
+                          <a:effectLst/>
+                        </a:rPr>
+                        <a:t>開発の</a:t>
+                      </a:r>
+                      <a:r>
+                        <a:rPr lang="en-US" sz="1350" kern="100">
+                          <a:effectLst/>
+                        </a:rPr>
+                        <a:t>Project Manager,</a:t>
+                      </a:r>
+                      <a:r>
+                        <a:rPr lang="ja-JP" sz="1350" kern="100">
+                          <a:effectLst/>
+                        </a:rPr>
+                        <a:t>ユーザ対応</a:t>
+                      </a:r>
+                      <a:r>
+                        <a:rPr lang="en-US" sz="1350" kern="100">
+                          <a:effectLst/>
+                        </a:rPr>
+                        <a:t>&amp;</a:t>
+                      </a:r>
+                      <a:r>
+                        <a:rPr lang="ja-JP" sz="1350" kern="100">
+                          <a:effectLst/>
+                        </a:rPr>
+                        <a:t>技術支援。</a:t>
+                      </a:r>
+                      <a:endParaRPr lang="ja-JP" sz="1350" kern="100">
+                        <a:effectLst/>
+                        <a:latin typeface="Century" panose="02040604050505020304" pitchFamily="18" charset="0"/>
+                        <a:ea typeface="ＭＳ 明朝" panose="02020609040205080304" pitchFamily="17" charset="-128"/>
+                        <a:cs typeface="Times New Roman" panose="02020603050405020304" pitchFamily="18" charset="0"/>
+                      </a:endParaRPr>
+                    </a:p>
+                  </a:txBody>
+                  <a:tcPr marL="68580" marR="68580" marT="0" marB="0" anchor="ctr"/>
+                </a:tc>
+                <a:extLst>
+                  <a:ext uri="{0D108BD9-81ED-4DB2-BD59-A6C34878D82A}">
+                    <a16:rowId xmlns:a16="http://schemas.microsoft.com/office/drawing/2014/main" val="462738535"/>
+                  </a:ext>
+                </a:extLst>
+              </a:tr>
+              <a:tr h="476355">
+                <a:tc gridSpan="2">
+                  <a:txBody>
+                    <a:bodyPr/>
+                    <a:lstStyle/>
+                    <a:p>
+                      <a:pPr algn="ctr"/>
+                      <a:r>
+                        <a:rPr lang="ja-JP" sz="1350" kern="100">
+                          <a:effectLst/>
+                        </a:rPr>
+                        <a:t>マネージメント</a:t>
+                      </a:r>
+                      <a:endParaRPr lang="ja-JP" sz="1350" kern="100">
+                        <a:effectLst/>
+                        <a:latin typeface="Century" panose="02040604050505020304" pitchFamily="18" charset="0"/>
+                        <a:ea typeface="ＭＳ 明朝" panose="02020609040205080304" pitchFamily="17" charset="-128"/>
+                        <a:cs typeface="Times New Roman" panose="02020603050405020304" pitchFamily="18" charset="0"/>
+                      </a:endParaRPr>
+                    </a:p>
+                  </a:txBody>
+                  <a:tcPr marL="68580" marR="68580" marT="0" marB="0" anchor="ctr"/>
+                </a:tc>
+                <a:tc hMerge="1">
+                  <a:txBody>
+                    <a:bodyPr/>
+                    <a:lstStyle/>
+                    <a:p>
+                      <a:endParaRPr kumimoji="1" lang="ja-JP" altLang="en-US"/>
+                    </a:p>
+                  </a:txBody>
+                  <a:tcPr/>
+                </a:tc>
+                <a:tc>
+                  <a:txBody>
+                    <a:bodyPr/>
+                    <a:lstStyle/>
+                    <a:p>
+                      <a:pPr algn="just"/>
+                      <a:r>
+                        <a:rPr lang="ja-JP" sz="1350" kern="100">
                           <a:effectLst/>
                         </a:rPr>
                         <a:t>プロジェクトマネージャーとして、部下</a:t>
                       </a:r>
                       <a:r>
-                        <a:rPr lang="en-US" sz="1350" kern="100" dirty="0">
+                        <a:rPr lang="en-US" sz="1350" kern="100">
                           <a:effectLst/>
                         </a:rPr>
                         <a:t>3-5</a:t>
                       </a:r>
                       <a:r>
-                        <a:rPr lang="ja-JP" sz="1350" kern="100" dirty="0">
+                        <a:rPr lang="ja-JP" sz="1350" kern="100">
                           <a:effectLst/>
                         </a:rPr>
                         <a:t>名をマネージメント。</a:t>
                       </a:r>
-                      <a:endParaRPr lang="ja-JP" sz="1350" kern="100" dirty="0">
+                      <a:endParaRPr lang="ja-JP" sz="1350" kern="100">
                         <a:effectLst/>
                         <a:latin typeface="Century" panose="02040604050505020304" pitchFamily="18" charset="0"/>
                         <a:ea typeface="ＭＳ 明朝" panose="02020609040205080304" pitchFamily="17" charset="-128"/>
@@ -12079,18 +12457,18 @@
           <a:lstStyle/>
           <a:p>
             <a:r>
-              <a:rPr lang="ja-JP" altLang="en-US" sz="3200" dirty="0"/>
+              <a:rPr lang="ja-JP" altLang="en-US" sz="3200"/>
               <a:t>３．</a:t>
             </a:r>
             <a:r>
-              <a:rPr lang="en-US" altLang="ja-JP" sz="3200" dirty="0"/>
+              <a:rPr lang="en-US" altLang="ja-JP" sz="3200"/>
               <a:t>N</a:t>
             </a:r>
             <a:r>
-              <a:rPr lang="ja-JP" altLang="en-US" sz="3200" dirty="0"/>
+              <a:rPr lang="ja-JP" altLang="en-US" sz="3200"/>
               <a:t>社での知識とスキル</a:t>
             </a:r>
-            <a:endParaRPr kumimoji="1" lang="ja-JP" altLang="en-US" sz="3200" dirty="0"/>
+            <a:endParaRPr kumimoji="1" lang="ja-JP" altLang="en-US" sz="3200"/>
           </a:p>
         </p:txBody>
       </p:sp>
@@ -12167,14 +12545,14 @@
           <a:p>
             <a:pPr algn="ctr"/>
             <a:r>
-              <a:rPr kumimoji="1" lang="en-US" altLang="ja-JP" dirty="0">
+              <a:rPr kumimoji="1" lang="en-US" altLang="ja-JP">
                 <a:solidFill>
                   <a:srgbClr val="FF0000"/>
                 </a:solidFill>
               </a:rPr>
               <a:t>Confidential</a:t>
             </a:r>
-            <a:endParaRPr kumimoji="1" lang="ja-JP" altLang="en-US" dirty="0">
+            <a:endParaRPr kumimoji="1" lang="ja-JP" altLang="en-US">
               <a:solidFill>
                 <a:srgbClr val="FF0000"/>
               </a:solidFill>
@@ -12236,12 +12614,12 @@
                     <a:p>
                       <a:pPr algn="ctr"/>
                       <a:r>
-                        <a:rPr lang="ja-JP" sz="1350" kern="100" dirty="0">
+                        <a:rPr lang="ja-JP" sz="1350" kern="100">
                           <a:effectLst/>
                         </a:rPr>
                         <a:t>実践技術</a:t>
                       </a:r>
-                      <a:endParaRPr lang="ja-JP" sz="1350" kern="100" dirty="0">
+                      <a:endParaRPr lang="ja-JP" sz="1350" kern="100">
                         <a:effectLst/>
                         <a:latin typeface="Century" panose="02040604050505020304" pitchFamily="18" charset="0"/>
                         <a:ea typeface="ＭＳ 明朝" panose="02020609040205080304" pitchFamily="17" charset="-128"/>
@@ -12258,102 +12636,102 @@
                     <a:p>
                       <a:pPr algn="just"/>
                       <a:r>
-                        <a:rPr lang="en-US" sz="1350" kern="100" dirty="0">
+                        <a:rPr lang="en-US" sz="1350" kern="100">
                           <a:effectLst/>
                         </a:rPr>
                         <a:t>Bluetooth</a:t>
                       </a:r>
                       <a:r>
-                        <a:rPr lang="ja-JP" sz="1350" kern="100" dirty="0">
+                        <a:rPr lang="ja-JP" sz="1350" kern="100">
                           <a:effectLst/>
                         </a:rPr>
                         <a:t>、</a:t>
                       </a:r>
                       <a:r>
-                        <a:rPr lang="en-US" sz="1350" kern="100" dirty="0">
+                        <a:rPr lang="en-US" sz="1350" kern="100">
                           <a:effectLst/>
                         </a:rPr>
                         <a:t>ZigBee</a:t>
                       </a:r>
                       <a:r>
-                        <a:rPr lang="ja-JP" sz="1350" kern="100" dirty="0">
+                        <a:rPr lang="ja-JP" sz="1350" kern="100">
                           <a:effectLst/>
                         </a:rPr>
                         <a:t>、</a:t>
                       </a:r>
                       <a:r>
-                        <a:rPr lang="en-US" sz="1350" kern="100" dirty="0">
+                        <a:rPr lang="en-US" sz="1350" kern="100">
                           <a:effectLst/>
                         </a:rPr>
                         <a:t>WPT</a:t>
                       </a:r>
                       <a:r>
-                        <a:rPr lang="ja-JP" sz="1350" kern="100" dirty="0">
+                        <a:rPr lang="ja-JP" sz="1350" kern="100">
                           <a:effectLst/>
                         </a:rPr>
                         <a:t>、</a:t>
                       </a:r>
                       <a:r>
-                        <a:rPr lang="en-US" sz="1350" kern="100" dirty="0">
+                        <a:rPr lang="en-US" sz="1350" kern="100">
                           <a:effectLst/>
                         </a:rPr>
                         <a:t>FFT</a:t>
                       </a:r>
                       <a:r>
-                        <a:rPr lang="ja-JP" sz="1350" kern="100" dirty="0">
+                        <a:rPr lang="ja-JP" sz="1350" kern="100">
                           <a:effectLst/>
                         </a:rPr>
                         <a:t>、電磁界シミュレータ、</a:t>
                       </a:r>
                       <a:r>
-                        <a:rPr lang="en-US" sz="1350" kern="100" dirty="0">
+                        <a:rPr lang="en-US" sz="1350" kern="100">
                           <a:effectLst/>
                         </a:rPr>
                         <a:t>DC</a:t>
                       </a:r>
                       <a:r>
-                        <a:rPr lang="ja-JP" sz="1350" kern="100" dirty="0">
+                        <a:rPr lang="ja-JP" sz="1350" kern="100">
                           <a:effectLst/>
                         </a:rPr>
                         <a:t>サーボ、回路</a:t>
                       </a:r>
                       <a:r>
-                        <a:rPr lang="en-US" sz="1350" kern="100" dirty="0">
+                        <a:rPr lang="en-US" sz="1350" kern="100">
                           <a:effectLst/>
                         </a:rPr>
                         <a:t>Simulator</a:t>
                       </a:r>
                       <a:r>
-                        <a:rPr lang="ja-JP" altLang="en-US" sz="1350" kern="100" dirty="0">
+                        <a:rPr lang="ja-JP" altLang="en-US" sz="1350" kern="100">
                           <a:effectLst/>
                         </a:rPr>
                         <a:t>（</a:t>
                       </a:r>
                       <a:r>
-                        <a:rPr lang="en-US" altLang="ja-JP" sz="1350" kern="100" dirty="0">
+                        <a:rPr lang="en-US" altLang="ja-JP" sz="1350" kern="100">
                           <a:effectLst/>
                         </a:rPr>
                         <a:t>LT-spice</a:t>
                       </a:r>
                       <a:r>
-                        <a:rPr lang="ja-JP" altLang="en-US" sz="1350" kern="100" dirty="0">
+                        <a:rPr lang="ja-JP" altLang="en-US" sz="1350" kern="100">
                           <a:effectLst/>
                         </a:rPr>
                         <a:t>、</a:t>
                       </a:r>
                       <a:r>
-                        <a:rPr lang="en-US" altLang="ja-JP" sz="1350" kern="100" dirty="0">
+                        <a:rPr lang="en-US" altLang="ja-JP" sz="1350" kern="100">
                           <a:effectLst/>
                         </a:rPr>
                         <a:t>TINA</a:t>
                       </a:r>
                       <a:r>
-                        <a:rPr lang="ja-JP" altLang="en-US" sz="1350" kern="100" dirty="0">
+                        <a:rPr lang="ja-JP" altLang="en-US" sz="1350" kern="100">
                           <a:effectLst/>
                         </a:rPr>
                         <a:t>）</a:t>
                       </a:r>
-                      <a:endParaRPr lang="ja-JP" sz="1350" kern="100" dirty="0">
+                      <a:endParaRPr lang="ja-JP" sz="1350" kern="100">
                         <a:effectLst/>
                         <a:latin typeface="Century" panose="02040604050505020304" pitchFamily="18" charset="0"/>
                         <a:ea typeface="ＭＳ 明朝" panose="02020609040205080304" pitchFamily="17" charset="-128"/>
@@ -12399,72 +12777,72 @@
                     <a:p>
                       <a:pPr algn="just"/>
                       <a:r>
-                        <a:rPr lang="ja-JP" sz="1350" kern="100" dirty="0">
+                        <a:rPr lang="ja-JP" sz="1350" kern="100">
                           <a:effectLst/>
                         </a:rPr>
                         <a:t>評価基板作成、</a:t>
                       </a:r>
                       <a:r>
-                        <a:rPr lang="en-US" altLang="ja-JP" sz="1350" kern="100" dirty="0">
+                        <a:rPr lang="en-US" altLang="ja-JP" sz="1350" kern="100">
                           <a:effectLst/>
                         </a:rPr>
                         <a:t>PIC</a:t>
                       </a:r>
                       <a:r>
-                        <a:rPr lang="ja-JP" altLang="en-US" sz="1350" kern="100" dirty="0">
+                        <a:rPr lang="ja-JP" altLang="en-US" sz="1350" kern="100">
                           <a:effectLst/>
                         </a:rPr>
                         <a:t>、</a:t>
                       </a:r>
                       <a:r>
-                        <a:rPr lang="en-US" altLang="ja-JP" sz="1350" kern="100" dirty="0">
+                        <a:rPr lang="en-US" altLang="ja-JP" sz="1350" kern="100">
                           <a:effectLst/>
                         </a:rPr>
                         <a:t>NXP</a:t>
                       </a:r>
                       <a:r>
-                        <a:rPr lang="ja-JP" altLang="en-US" sz="1350" kern="100" dirty="0">
+                        <a:rPr lang="ja-JP" altLang="en-US" sz="1350" kern="100">
                           <a:effectLst/>
                         </a:rPr>
                         <a:t>、</a:t>
                       </a:r>
                       <a:r>
-                        <a:rPr lang="en-US" sz="1350" kern="100" dirty="0">
+                        <a:rPr lang="en-US" sz="1350" kern="100">
                           <a:effectLst/>
                         </a:rPr>
                         <a:t>Atmel</a:t>
                       </a:r>
                       <a:r>
-                        <a:rPr lang="ja-JP" sz="1350" kern="100" dirty="0">
+                        <a:rPr lang="ja-JP" sz="1350" kern="100">
                           <a:effectLst/>
                         </a:rPr>
                         <a:t>マイコン</a:t>
                       </a:r>
                       <a:r>
-                        <a:rPr lang="en-US" sz="1350" kern="100" dirty="0">
+                        <a:rPr lang="en-US" sz="1350" kern="100">
                           <a:effectLst/>
                         </a:rPr>
                         <a:t>&amp;VB</a:t>
                       </a:r>
                       <a:r>
-                        <a:rPr lang="ja-JP" sz="1350" kern="100" dirty="0">
+                        <a:rPr lang="ja-JP" sz="1350" kern="100">
                           <a:effectLst/>
                         </a:rPr>
                         <a:t>によるアプリソフト、</a:t>
                       </a:r>
                       <a:r>
-                        <a:rPr lang="en-US" sz="1350" kern="100" dirty="0">
+                        <a:rPr lang="en-US" sz="1350" kern="100">
                           <a:effectLst/>
                         </a:rPr>
                         <a:t>MATLAB</a:t>
                       </a:r>
                       <a:r>
-                        <a:rPr lang="ja-JP" sz="1350" kern="100" dirty="0">
+                        <a:rPr lang="ja-JP" sz="1350" kern="100">
                           <a:effectLst/>
                         </a:rPr>
                         <a:t>互換ソフト。</a:t>
                       </a:r>
-                      <a:endParaRPr lang="ja-JP" sz="1350" kern="100" dirty="0">
+                      <a:endParaRPr lang="ja-JP" sz="1350" kern="100">
                         <a:effectLst/>
                         <a:latin typeface="Century" panose="02040604050505020304" pitchFamily="18" charset="0"/>
                         <a:ea typeface="ＭＳ 明朝" panose="02020609040205080304" pitchFamily="17" charset="-128"/>
@@ -12510,42 +12888,42 @@
                     <a:p>
                       <a:pPr algn="just"/>
                       <a:r>
-                        <a:rPr lang="en-US" sz="1350" kern="100" dirty="0">
+                        <a:rPr lang="en-US" sz="1350" kern="100">
                           <a:effectLst/>
                         </a:rPr>
                         <a:t>Project Manager</a:t>
                       </a:r>
                       <a:r>
-                        <a:rPr lang="ja-JP" sz="1350" kern="100" dirty="0">
+                        <a:rPr lang="ja-JP" sz="1350" kern="100">
                           <a:effectLst/>
                         </a:rPr>
                         <a:t>：製品開発の</a:t>
                       </a:r>
                       <a:r>
-                        <a:rPr lang="en-US" sz="1350" kern="100" dirty="0">
+                        <a:rPr lang="en-US" sz="1350" kern="100">
                           <a:effectLst/>
                         </a:rPr>
                         <a:t>Project Manager,</a:t>
                       </a:r>
                       <a:r>
-                        <a:rPr lang="ja-JP" sz="1350" kern="100" dirty="0">
+                        <a:rPr lang="ja-JP" sz="1350" kern="100">
                           <a:effectLst/>
                         </a:rPr>
                         <a:t>ユーザ対応</a:t>
                       </a:r>
                       <a:r>
-                        <a:rPr lang="en-US" sz="1350" kern="100" dirty="0">
+                        <a:rPr lang="en-US" sz="1350" kern="100">
                           <a:effectLst/>
                         </a:rPr>
                         <a:t>&amp;</a:t>
                       </a:r>
                       <a:r>
-                        <a:rPr lang="ja-JP" sz="1350" kern="100" dirty="0">
+                        <a:rPr lang="ja-JP" sz="1350" kern="100">
                           <a:effectLst/>
                         </a:rPr>
                         <a:t>技術支援。</a:t>
                       </a:r>
-                      <a:endParaRPr lang="ja-JP" sz="1350" kern="100" dirty="0">
+                      <a:endParaRPr lang="ja-JP" sz="1350" kern="100">
                         <a:effectLst/>
                         <a:latin typeface="Century" panose="02040604050505020304" pitchFamily="18" charset="0"/>
                         <a:ea typeface="ＭＳ 明朝" panose="02020609040205080304" pitchFamily="17" charset="-128"/>
@@ -12591,18 +12969,18 @@
                     <a:p>
                       <a:pPr algn="just"/>
                       <a:r>
-                        <a:rPr lang="ja-JP" altLang="en-US" sz="1350" kern="100" dirty="0">
+                        <a:rPr lang="ja-JP" altLang="en-US" sz="1350" kern="100">
                           <a:effectLst/>
                         </a:rPr>
                         <a:t>プレイングマネージャ</a:t>
                       </a:r>
                       <a:r>
-                        <a:rPr lang="ja-JP" sz="1350" kern="100" dirty="0">
+                        <a:rPr lang="ja-JP" sz="1350" kern="100">
                           <a:effectLst/>
                         </a:rPr>
                         <a:t>として、製造、開発の部下７名をマネージメント。</a:t>
                       </a:r>
-                      <a:endParaRPr lang="ja-JP" sz="1350" kern="100" dirty="0">
+                      <a:endParaRPr lang="ja-JP" sz="1350" kern="100">
                         <a:effectLst/>
                         <a:latin typeface="Century" panose="02040604050505020304" pitchFamily="18" charset="0"/>
                         <a:ea typeface="ＭＳ 明朝" panose="02020609040205080304" pitchFamily="17" charset="-128"/>

--- a/経歴紹介 伊藤浩也20260525A.pptx
+++ b/経歴紹介 伊藤浩也20260525A.pptx
@@ -10879,7 +10879,7 @@
           <p:nvPr>
             <p:extLst>
               <p:ext uri="{D42A27DB-BD31-4B8C-83A1-F6EECF244321}">
-                <p14:modId xmlns:p14="http://schemas.microsoft.com/office/powerpoint/2010/main" val="2339772356"/>
+                <p14:modId xmlns:p14="http://schemas.microsoft.com/office/powerpoint/2010/main" val="4000527219"/>
               </p:ext>
             </p:extLst>
           </p:nvPr>
@@ -11068,7 +11068,7 @@
                         <a:buNone/>
                       </a:pPr>
                       <a:r>
-                        <a:rPr lang="ja-JP" altLang="en-US" sz="1400" b="0" i="0" u="none" strike="noStrike" noProof="0">
+                        <a:rPr lang="ja-JP" altLang="en-US" sz="1400" b="0" i="0" u="none" strike="noStrike" noProof="0" dirty="0">
                           <a:solidFill>
                             <a:srgbClr val="000000"/>
                           </a:solidFill>
@@ -11078,18 +11078,18 @@
                         <a:t>①</a:t>
                       </a:r>
                       <a:r>
-                        <a:rPr lang="ja-JP" altLang="en-US" sz="1400"/>
+                        <a:rPr lang="ja-JP" altLang="en-US" sz="1400" dirty="0"/>
                         <a:t>次期</a:t>
                       </a:r>
                       <a:r>
-                        <a:rPr lang="en-US" altLang="ja-JP" sz="1400"/>
+                        <a:rPr lang="en-US" altLang="ja-JP" sz="1400" dirty="0"/>
                         <a:t>PMIC</a:t>
                       </a:r>
                       <a:r>
-                        <a:rPr lang="ja-JP" altLang="en-US" sz="1400"/>
+                        <a:rPr lang="ja-JP" altLang="en-US" sz="1400" dirty="0"/>
                         <a:t>開発検討と評価ボード立ち上げ。</a:t>
                       </a:r>
-                      <a:endParaRPr lang="en-US" altLang="ja-JP" sz="1400"/>
+                      <a:endParaRPr lang="en-US" altLang="ja-JP" sz="1400" dirty="0"/>
                     </a:p>
                     <a:p>
                       <a:pPr lvl="0" algn="l">
@@ -11105,18 +11105,18 @@
                         <a:buNone/>
                       </a:pPr>
                       <a:r>
-                        <a:rPr lang="ja-JP" altLang="en-US" sz="1400"/>
+                        <a:rPr lang="ja-JP" altLang="en-US" sz="1400" dirty="0"/>
                         <a:t>②</a:t>
                       </a:r>
                       <a:r>
-                        <a:rPr lang="en-US" altLang="ja-JP" sz="1400"/>
+                        <a:rPr lang="en-US" altLang="ja-JP" sz="1400" dirty="0"/>
                         <a:t>UFS Ver3.1, Ver4.1 </a:t>
                       </a:r>
                       <a:r>
-                        <a:rPr lang="ja-JP" altLang="en-US" sz="1400"/>
+                        <a:rPr lang="ja-JP" altLang="en-US" sz="1400" dirty="0"/>
                         <a:t>メモリ使用マニュアル作成。</a:t>
                       </a:r>
-                      <a:endParaRPr lang="en-US" altLang="ja-JP" sz="1400"/>
+                      <a:endParaRPr lang="en-US" altLang="ja-JP" sz="1400" dirty="0"/>
                     </a:p>
                     <a:p>
                       <a:pPr lvl="0" algn="l">
@@ -11132,18 +11132,18 @@
                         <a:buNone/>
                       </a:pPr>
                       <a:r>
-                        <a:rPr lang="ja-JP" altLang="en-US" sz="1400"/>
+                        <a:rPr lang="ja-JP" altLang="en-US" sz="1400" dirty="0"/>
                         <a:t>③半導体デバイス</a:t>
                       </a:r>
                       <a:r>
-                        <a:rPr lang="en-US" altLang="ja-JP" sz="1400"/>
+                        <a:rPr lang="en-US" altLang="ja-JP" sz="1400" dirty="0"/>
                         <a:t>(MOS, Bipolar</a:t>
                       </a:r>
                       <a:r>
-                        <a:rPr lang="ja-JP" altLang="en-US" sz="1400"/>
-                        <a:t>）のデバイス構造と動作メカニズム、アナログ回路の勉強会レクチャ</a:t>
-                      </a:r>
-                      <a:endParaRPr lang="ja-JP"/>
+                        <a:rPr lang="ja-JP" altLang="en-US" sz="1400" dirty="0"/>
+                        <a:t>）のデバイス構造と動作メカニズム、アナログ回路の勉強会レクチャ講師</a:t>
+                      </a:r>
+                      <a:endParaRPr lang="ja-JP" dirty="0"/>
                     </a:p>
                   </a:txBody>
                   <a:tcPr/>
@@ -11189,7 +11189,7 @@
                         <a:buChar char="Ø"/>
                       </a:pPr>
                       <a:r>
-                        <a:rPr lang="en-US" altLang="ja-JP" sz="1350" kern="1200">
+                        <a:rPr lang="en-US" altLang="ja-JP" sz="1350" kern="1200" dirty="0">
                           <a:solidFill>
                             <a:schemeClr val="dk1"/>
                           </a:solidFill>
@@ -11201,7 +11201,7 @@
                         <a:t>PMIC</a:t>
                       </a:r>
                       <a:r>
-                        <a:rPr lang="ja-JP" altLang="en-US" sz="1350" kern="1200">
+                        <a:rPr lang="ja-JP" altLang="en-US" sz="1350" kern="1200" dirty="0">
                           <a:solidFill>
                             <a:schemeClr val="dk1"/>
                           </a:solidFill>
@@ -11213,7 +11213,7 @@
                         <a:t>評価用として、</a:t>
                       </a:r>
                       <a:r>
-                        <a:rPr lang="en-US" altLang="ja-JP" sz="1350" kern="1200">
+                        <a:rPr lang="en-US" altLang="ja-JP" sz="1350" kern="1200" dirty="0">
                           <a:solidFill>
                             <a:schemeClr val="dk1"/>
                           </a:solidFill>
@@ -11225,7 +11225,7 @@
                         <a:t>Xilinx</a:t>
                       </a:r>
                       <a:r>
-                        <a:rPr lang="ja-JP" altLang="en-US" sz="1350" kern="1200">
+                        <a:rPr lang="ja-JP" altLang="en-US" sz="1350" kern="1200" dirty="0">
                           <a:solidFill>
                             <a:schemeClr val="dk1"/>
                           </a:solidFill>
@@ -11237,7 +11237,7 @@
                         <a:t>エバボードに</a:t>
                       </a:r>
                       <a:r>
-                        <a:rPr lang="en-US" altLang="ja-JP" sz="1350" kern="1200" err="1">
+                        <a:rPr lang="en-US" altLang="ja-JP" sz="1350" kern="1200" dirty="0" err="1">
                           <a:solidFill>
                             <a:srgbClr val="FF0000"/>
                           </a:solidFill>
@@ -11249,7 +11249,7 @@
                         <a:t>MicroBlaze</a:t>
                       </a:r>
                       <a:r>
-                        <a:rPr lang="ja-JP" altLang="en-US" sz="1350" kern="1200">
+                        <a:rPr lang="ja-JP" altLang="en-US" sz="1350" kern="1200" dirty="0">
                           <a:solidFill>
                             <a:schemeClr val="dk1"/>
                           </a:solidFill>
@@ -11261,7 +11261,7 @@
                         <a:t>を搭載して制御し、</a:t>
                       </a:r>
                       <a:r>
-                        <a:rPr lang="en-US" altLang="ja-JP" sz="1350" kern="1200">
+                        <a:rPr lang="en-US" altLang="ja-JP" sz="1350" kern="1200" dirty="0">
                           <a:solidFill>
                             <a:schemeClr val="dk1"/>
                           </a:solidFill>
@@ -11273,7 +11273,7 @@
                         <a:t>PC</a:t>
                       </a:r>
                       <a:r>
-                        <a:rPr lang="ja-JP" altLang="en-US" sz="1350" kern="1200">
+                        <a:rPr lang="ja-JP" altLang="en-US" sz="1350" kern="1200" dirty="0">
                           <a:solidFill>
                             <a:schemeClr val="dk1"/>
                           </a:solidFill>
@@ -11285,7 +11285,7 @@
                         <a:t>上からアプリソフトから、ターゲット</a:t>
                       </a:r>
                       <a:r>
-                        <a:rPr lang="en-US" altLang="ja-JP" sz="1350" kern="1200">
+                        <a:rPr lang="en-US" altLang="ja-JP" sz="1350" kern="1200" dirty="0">
                           <a:solidFill>
                             <a:schemeClr val="dk1"/>
                           </a:solidFill>
@@ -11297,7 +11297,7 @@
                         <a:t>PMIC</a:t>
                       </a:r>
                       <a:r>
-                        <a:rPr lang="ja-JP" altLang="en-US" sz="1350" kern="1200">
+                        <a:rPr lang="ja-JP" altLang="en-US" sz="1350" kern="1200" dirty="0">
                           <a:solidFill>
                             <a:schemeClr val="dk1"/>
                           </a:solidFill>
@@ -11308,7 +11308,7 @@
                         </a:rPr>
                         <a:t>を制御するシステムを作成。</a:t>
                       </a:r>
-                      <a:endParaRPr lang="ja-JP" altLang="ja-JP" sz="1350" kern="1200">
+                      <a:endParaRPr lang="ja-JP" altLang="ja-JP" sz="1350" kern="1200" dirty="0">
                         <a:solidFill>
                           <a:schemeClr val="dk1"/>
                         </a:solidFill>
@@ -11324,7 +11324,7 @@
                         <a:buChar char="Ø"/>
                       </a:pPr>
                       <a:r>
-                        <a:rPr lang="ja-JP" altLang="en-US" sz="1350" kern="1200">
+                        <a:rPr lang="ja-JP" altLang="en-US" sz="1350" kern="1200" dirty="0">
                           <a:solidFill>
                             <a:schemeClr val="dk1"/>
                           </a:solidFill>
@@ -11336,7 +11336,7 @@
                         <a:t>既存の市販品</a:t>
                       </a:r>
                       <a:r>
-                        <a:rPr lang="en-US" altLang="ja-JP" sz="1350" kern="1200">
+                        <a:rPr lang="en-US" altLang="ja-JP" sz="1350" kern="1200" dirty="0">
                           <a:solidFill>
                             <a:schemeClr val="dk1"/>
                           </a:solidFill>
@@ -11348,7 +11348,7 @@
                         <a:t>PMIC,DCDC</a:t>
                       </a:r>
                       <a:r>
-                        <a:rPr lang="ja-JP" altLang="en-US" sz="1350" kern="1200">
+                        <a:rPr lang="ja-JP" altLang="en-US" sz="1350" kern="1200" dirty="0">
                           <a:solidFill>
                             <a:schemeClr val="dk1"/>
                           </a:solidFill>
@@ -11360,7 +11360,7 @@
                         <a:t>を組み合わせた</a:t>
                       </a:r>
                       <a:r>
-                        <a:rPr lang="ja-JP" altLang="en-US" sz="1350" kern="1200">
+                        <a:rPr lang="ja-JP" altLang="en-US" sz="1350" kern="1200" dirty="0">
                           <a:solidFill>
                             <a:srgbClr val="FF0000"/>
                           </a:solidFill>
@@ -11372,7 +11372,7 @@
                         <a:t>電源システムソリューション検討</a:t>
                       </a:r>
                       <a:r>
-                        <a:rPr lang="ja-JP" altLang="en-US" sz="1350" kern="1200">
+                        <a:rPr lang="ja-JP" altLang="en-US" sz="1350" kern="1200" dirty="0">
                           <a:solidFill>
                             <a:schemeClr val="dk1"/>
                           </a:solidFill>
@@ -11383,7 +11383,7 @@
                         </a:rPr>
                         <a:t>。</a:t>
                       </a:r>
-                      <a:endParaRPr lang="en-US" altLang="ja-JP" sz="1350" kern="1200">
+                      <a:endParaRPr lang="en-US" altLang="ja-JP" sz="1350" kern="1200" dirty="0">
                         <a:solidFill>
                           <a:schemeClr val="dk1"/>
                         </a:solidFill>
@@ -11399,7 +11399,7 @@
                         <a:buChar char="Ø"/>
                       </a:pPr>
                       <a:r>
-                        <a:rPr lang="en-US" altLang="ja-JP" sz="1350" kern="1200">
+                        <a:rPr lang="en-US" altLang="ja-JP" sz="1350" kern="1200" dirty="0">
                           <a:solidFill>
                             <a:schemeClr val="dk1"/>
                           </a:solidFill>
@@ -11411,7 +11411,7 @@
                         <a:t>UFS</a:t>
                       </a:r>
                       <a:r>
-                        <a:rPr lang="ja-JP" altLang="en-US" sz="1350" kern="1200">
+                        <a:rPr lang="ja-JP" altLang="en-US" sz="1350" kern="1200" dirty="0">
                           <a:solidFill>
                             <a:schemeClr val="dk1"/>
                           </a:solidFill>
@@ -11423,7 +11423,7 @@
                         <a:t>メモリを使ったシステムを立ち上げる開発部署に向けた、使用マニュアル</a:t>
                       </a:r>
                       <a:r>
-                        <a:rPr lang="en-US" altLang="ja-JP" sz="1350" kern="1200">
+                        <a:rPr lang="en-US" altLang="ja-JP" sz="1350" kern="1200" dirty="0">
                           <a:solidFill>
                             <a:schemeClr val="dk1"/>
                           </a:solidFill>
@@ -11435,7 +11435,7 @@
                         <a:t>-</a:t>
                       </a:r>
                       <a:r>
-                        <a:rPr lang="ja-JP" altLang="en-US" sz="1350" kern="1200">
+                        <a:rPr lang="ja-JP" altLang="en-US" sz="1350" kern="1200" dirty="0">
                           <a:solidFill>
                             <a:schemeClr val="dk1"/>
                           </a:solidFill>
@@ -11446,7 +11446,7 @@
                         </a:rPr>
                         <a:t>注意点資料作成。</a:t>
                       </a:r>
-                      <a:endParaRPr lang="en-US" altLang="ja-JP" sz="1350" kern="1200">
+                      <a:endParaRPr lang="en-US" altLang="ja-JP" sz="1350" kern="1200" dirty="0">
                         <a:solidFill>
                           <a:schemeClr val="dk1"/>
                         </a:solidFill>
@@ -11462,7 +11462,7 @@
                         <a:buChar char="Ø"/>
                       </a:pPr>
                       <a:r>
-                        <a:rPr lang="ja-JP" altLang="en-US" sz="1350" kern="1200">
+                        <a:rPr lang="ja-JP" altLang="en-US" sz="1350" kern="1200" dirty="0">
                           <a:solidFill>
                             <a:schemeClr val="dk1"/>
                           </a:solidFill>
@@ -11474,7 +11474,7 @@
                         <a:t>半導体デバイス全般の標準化推進部門に対し、</a:t>
                       </a:r>
                       <a:r>
-                        <a:rPr lang="ja-JP" altLang="en-US" sz="1350" kern="1200">
+                        <a:rPr lang="ja-JP" altLang="en-US" sz="1350" kern="1200" dirty="0">
                           <a:solidFill>
                             <a:srgbClr val="FF0000"/>
                           </a:solidFill>
@@ -11486,7 +11486,7 @@
                         <a:t>デバイス構造・各種部品の動作原理・アナログ回路に関する講師</a:t>
                       </a:r>
                       <a:r>
-                        <a:rPr lang="ja-JP" altLang="en-US" sz="1350" kern="1200">
+                        <a:rPr lang="ja-JP" altLang="en-US" sz="1350" kern="1200" dirty="0">
                           <a:solidFill>
                             <a:schemeClr val="dk1"/>
                           </a:solidFill>
@@ -11497,7 +11497,7 @@
                         </a:rPr>
                         <a:t>を務め、組織全体の技術レベル向上に貢献。</a:t>
                       </a:r>
-                      <a:endParaRPr lang="en-US" altLang="ja-JP" sz="1350" kern="1200">
+                      <a:endParaRPr lang="en-US" altLang="ja-JP" sz="1350" kern="1200" dirty="0">
                         <a:solidFill>
                           <a:srgbClr val="FF0000"/>
                         </a:solidFill>
